--- a/decks/day2/module-5-foundry-toolbox.pptx
+++ b/decks/day2/module-5-foundry-toolbox.pptx
@@ -5174,7 +5174,7 @@
                 <a:ea typeface="Calibri" pitchFamily="34" charset="-122"/>
                 <a:cs typeface="Calibri" pitchFamily="34" charset="-120"/>
               </a:rPr>
-              <a:t>Standard workflow attendees will use:</a:t>
+              <a:t>Standard workflow you'll use:</a:t>
             </a:r>
             <a:endParaRPr lang="en-US" sz="1400" dirty="0"/>
           </a:p>

--- a/decks/day2/module-5-foundry-toolbox.pptx
+++ b/decks/day2/module-5-foundry-toolbox.pptx
@@ -6644,27 +6644,6 @@
             </a:r>
             <a:endParaRPr lang="en-US" sz="1300" dirty="0"/>
           </a:p>
-          <a:p>
-            <a:pPr marL="342900" indent="-342900">
-              <a:spcAft>
-                <a:spcPts val="600"/>
-              </a:spcAft>
-              <a:buSzPct val="100000"/>
-              <a:buChar char="•"/>
-            </a:pPr>
-            <a:r>
-              <a:rPr lang="en-US" sz="1300" dirty="0">
-                <a:solidFill>
-                  <a:srgbClr val="212121"/>
-                </a:solidFill>
-                <a:latin typeface="Calibri" pitchFamily="34" charset="0"/>
-                <a:ea typeface="Calibri" pitchFamily="34" charset="-122"/>
-                <a:cs typeface="Calibri" pitchFamily="34" charset="-120"/>
-              </a:rPr>
-              <a:t>Module 7 — Combining knowledge + tools</a:t>
-            </a:r>
-            <a:endParaRPr lang="en-US" sz="1300" dirty="0"/>
-          </a:p>
         </p:txBody>
       </p:sp>
       <p:sp>

--- a/decks/day2/module-5-foundry-toolbox.pptx
+++ b/decks/day2/module-5-foundry-toolbox.pptx
@@ -23,9 +23,10 @@
     <p:sldId id="271" r:id="rId17"/>
     <p:sldId id="272" r:id="rId18"/>
     <p:sldId id="273" r:id="rId19"/>
+    <p:sldId id="274" r:id="rId20"/>
   </p:sldIdLst>
   <p:notesMasterIdLst>
-    <p:notesMasterId r:id="rId20"/>
+    <p:notesMasterId r:id="rId21"/>
   </p:notesMasterIdLst>
   <p:sldSz cx="9144000" cy="5143500"/>
   <p:notesSz cx="5143500" cy="9144000"/>
@@ -611,10 +612,10 @@
           <a:p>
             <a:r>
               <a:rPr lang="en-US" dirty="0"/>
-              <a:t>• Preview of Day 3 — this is one way to attach MCP servers
-• Day 3's approach: direct MAF wiring (no toolbox)
-• Both work; toolbox route gives you governance and reuse
-• require_approval='never' for safe tools; 'always' for anything with side effects</a:t>
+              <a:t>• Two-step pattern: connection, then tool that references it
+• Managed identity = the toolbox has its own Entra identity
+• No API keys in YAML, no keys checked into source
+• This is the Day 1 IaC-first operating norm in action</a:t>
             </a:r>
             <a:endParaRPr lang="en-US" dirty="0"/>
           </a:p>
@@ -702,11 +703,10 @@
           <a:p>
             <a:r>
               <a:rPr lang="en-US" dirty="0"/>
-              <a:t>• Two endpoints — same information
-• Consumer = default version = production path
-• Developer = version-pinned = testing path
-• Rule: agents point at consumer, humans test at developer
-• Promote new toolbox version = live update for all agents on the consumer endpoint</a:t>
+              <a:t>• Preview of Day 3 — this is one way to attach MCP servers
+• Day 3's approach: direct MAF wiring (no toolbox)
+• Both work; toolbox route gives you governance and reuse
+• require_approval='never' for safe tools; 'always' for anything with side effects</a:t>
             </a:r>
             <a:endParaRPr lang="en-US" dirty="0"/>
           </a:p>
@@ -794,10 +794,11 @@
           <a:p>
             <a:r>
               <a:rPr lang="en-US" dirty="0"/>
-              <a:t>• One line — tools=[toolbox] — attaches everything
-• Under the hood: MCP handshake, tool schemas fetched, wired to function calling
-• Attendees do this in the lab — very few lines of code
-• Point back to Module 4 — same contract, different origin</a:t>
+              <a:t>• Two endpoints — same information
+• Consumer = default version = production path
+• Developer = version-pinned = testing path
+• Rule: agents point at consumer, humans test at developer
+• Promote new toolbox version = live update for all agents on the consumer endpoint</a:t>
             </a:r>
             <a:endParaRPr lang="en-US" dirty="0"/>
           </a:p>
@@ -885,10 +886,10 @@
           <a:p>
             <a:r>
               <a:rPr lang="en-US" dirty="0"/>
-              <a:t>• For Prompt / Hosted agents: toolbox lives in configuration
-• Agent code that connects to the Prompt agent doesn't change
-• Portal, SDK, YAML — three ways to attach
-• Powerful pattern: update toolbox, all agents get new tools</a:t>
+              <a:t>• One line — tools=[toolbox] — attaches everything
+• Under the hood: MCP handshake, tool schemas fetched, wired to function calling
+• Attendees do this in the lab — very few lines of code
+• Point back to Module 4 — same contract, different origin</a:t>
             </a:r>
             <a:endParaRPr lang="en-US" dirty="0"/>
           </a:p>
@@ -976,10 +977,10 @@
           <a:p>
             <a:r>
               <a:rPr lang="en-US" dirty="0"/>
-              <a:t>• Governance = the enterprise pitch
-• Four benefits: RBAC, audit, RAI, catalog
-• The italic line is the CIO-worthy framing
-• For attendees who work in regulated environments — this is why they'd choose Toolbox over function tools</a:t>
+              <a:t>• For Prompt / Hosted agents: toolbox lives in configuration
+• Agent code that connects to the Prompt agent doesn't change
+• Portal, SDK, YAML — three ways to attach
+• Powerful pattern: update toolbox, all agents get new tools</a:t>
             </a:r>
             <a:endParaRPr lang="en-US" dirty="0"/>
           </a:p>
@@ -1067,10 +1068,10 @@
           <a:p>
             <a:r>
               <a:rPr lang="en-US" dirty="0"/>
-              <a:t>• Four-step workflow — attendees will run this in production
-• Test at developer endpoint, promote to default
-• No agent redeploy — the consumer endpoint always serves default
-• Same publish discipline as Prompt agents (Day 1 Module 6)</a:t>
+              <a:t>• Governance = the enterprise pitch
+• Four benefits: RBAC, audit, RAI, catalog
+• The italic line is the CIO-worthy framing
+• For attendees who work in regulated environments — this is why they'd choose Toolbox over function tools</a:t>
             </a:r>
             <a:endParaRPr lang="en-US" dirty="0"/>
           </a:p>
@@ -1158,10 +1159,10 @@
           <a:p>
             <a:r>
               <a:rPr lang="en-US" dirty="0"/>
-              <a:t>• Decision framework — left vs. right
-• Function tools = flexibility, quick prototyping
-• Toolbox = shared, governed, enterprise-integrated
-• The bottom line = mix. Sets up Module 6 next.</a:t>
+              <a:t>• Four-step workflow — attendees will run this in production
+• Test at developer endpoint, promote to default
+• No agent redeploy — the consumer endpoint always serves default
+• Same publish discipline as Prompt agents (Day 1 Module 6)</a:t>
             </a:r>
             <a:endParaRPr lang="en-US" dirty="0"/>
           </a:p>
@@ -1249,11 +1250,10 @@
           <a:p>
             <a:r>
               <a:rPr lang="en-US" dirty="0"/>
-              <a:t>• Six traps — same pattern as prior modules
-• The credentials-in-YAML trap is the biggest — attendees WILL try to shortcut
-• Endpoint confusion catches everyone once
-• 'Cost' bullet is real — Bing has per-call pricing
-• RAI policy is the governance win most attendees skip</a:t>
+              <a:t>• Decision framework — left vs. right
+• Function tools = flexibility, quick prototyping
+• Toolbox = shared, governed, enterprise-integrated
+• The bottom line = mix. Sets up Module 6 next.</a:t>
             </a:r>
             <a:endParaRPr lang="en-US" dirty="0"/>
           </a:p>
@@ -1341,9 +1341,11 @@
           <a:p>
             <a:r>
               <a:rPr lang="en-US" dirty="0"/>
-              <a:t>• Six-bullet recap
-• Bridge to Module 6 — the hands-on tool authoring
-• Time check — Modules 1+2+3+4+5 = ~160 min in against 240 budget</a:t>
+              <a:t>• Six traps — same pattern as prior modules
+• The credentials-in-YAML trap is the biggest — attendees WILL try to shortcut
+• Endpoint confusion catches everyone once
+• 'Cost' bullet is real — Bing has per-call pricing
+• RAI policy is the governance win most attendees skip</a:t>
             </a:r>
             <a:endParaRPr lang="en-US" dirty="0"/>
           </a:p>
@@ -1367,6 +1369,96 @@
             <a:fld id="{F7021451-1387-4CA6-816F-3879F97B5CBC}" type="slidenum">
               <a:rPr lang="en-US"/>
               <a:t>18</a:t>
+            </a:fld>
+            <a:endParaRPr lang="en-US"/>
+          </a:p>
+        </p:txBody>
+      </p:sp>
+    </p:spTree>
+    <p:extLst>
+      <p:ext uri="{BB962C8B-B14F-4D97-AF65-F5344CB8AC3E}">
+        <p14:creationId xmlns:p14="http://schemas.microsoft.com/office/powerpoint/2010/main" val="1024086991"/>
+      </p:ext>
+    </p:extLst>
+  </p:cSld>
+  <p:clrMapOvr>
+    <a:masterClrMapping/>
+  </p:clrMapOvr>
+</p:notes>
+</file>
+
+<file path=ppt/notesSlides/notesSlide19.xml><?xml version="1.0" encoding="utf-8"?>
+<p:notes xmlns:a="http://schemas.openxmlformats.org/drawingml/2006/main" xmlns:r="http://schemas.openxmlformats.org/officeDocument/2006/relationships" xmlns:p="http://schemas.openxmlformats.org/presentationml/2006/main">
+  <p:cSld>
+    <p:spTree>
+      <p:nvGrpSpPr>
+        <p:cNvPr id="1" name=""/>
+        <p:cNvGrpSpPr/>
+        <p:nvPr/>
+      </p:nvGrpSpPr>
+      <p:grpSpPr>
+        <a:xfrm>
+          <a:off x="0" y="0"/>
+          <a:ext cx="0" cy="0"/>
+          <a:chOff x="0" y="0"/>
+          <a:chExt cx="0" cy="0"/>
+        </a:xfrm>
+      </p:grpSpPr>
+      <p:sp>
+        <p:nvSpPr>
+          <p:cNvPr id="2" name="Slide Image Placeholder 1"/>
+          <p:cNvSpPr>
+            <a:spLocks noGrp="1" noRot="1" noChangeAspect="1"/>
+          </p:cNvSpPr>
+          <p:nvPr>
+            <p:ph type="sldImg"/>
+          </p:nvPr>
+        </p:nvSpPr>
+        <p:spPr/>
+      </p:sp>
+      <p:sp>
+        <p:nvSpPr>
+          <p:cNvPr id="3" name="Notes Placeholder 2"/>
+          <p:cNvSpPr>
+            <a:spLocks noGrp="1"/>
+          </p:cNvSpPr>
+          <p:nvPr>
+            <p:ph type="body" idx="1"/>
+          </p:nvPr>
+        </p:nvSpPr>
+        <p:spPr/>
+        <p:txBody>
+          <a:bodyPr/>
+          <a:lstStyle/>
+          <a:p>
+            <a:r>
+              <a:rPr lang="en-US" dirty="0"/>
+              <a:t>• Six-bullet recap
+• Bridge to Module 6 — the hands-on tool authoring
+• Time check — Modules 1+2+3+4+5 = ~160 min in against 240 budget</a:t>
+            </a:r>
+            <a:endParaRPr lang="en-US" dirty="0"/>
+          </a:p>
+        </p:txBody>
+      </p:sp>
+      <p:sp>
+        <p:nvSpPr>
+          <p:cNvPr id="4" name="Slide Number Placeholder 3"/>
+          <p:cNvSpPr>
+            <a:spLocks noGrp="1"/>
+          </p:cNvSpPr>
+          <p:nvPr>
+            <p:ph type="sldNum" sz="quarter" idx="10"/>
+          </p:nvPr>
+        </p:nvSpPr>
+        <p:spPr/>
+        <p:txBody>
+          <a:bodyPr/>
+          <a:lstStyle/>
+          <a:p>
+            <a:fld id="{F7021451-1387-4CA6-816F-3879F97B5CBC}" type="slidenum">
+              <a:rPr lang="en-US"/>
+              <a:t>19</a:t>
             </a:fld>
             <a:endParaRPr lang="en-US"/>
           </a:p>
@@ -1797,11 +1889,15 @@
           <a:p>
             <a:r>
               <a:rPr lang="en-US" dirty="0"/>
-              <a:t>• Seven parts — the toolbox spec
-• Connections are separate objects — YAML references by name
-• Skills are Foundry-specific — MCP-packaged expertise
-• RAI policy at toolbox level = central content-safety enforcement
-• Versioning is first-class — same discipline as Prompt agents</a:t>
+              <a:t>• DEMO 5.1 · ~5 min
+• Toolbox already published in your project — do NOT create live
+• .env at demo folder: FOUNDRY_PROJECT_ENDPOINT, FOUNDRY_MODEL, FOUNDRY_TOOLBOX_ENDPOINT
+• Step 1 (~30s): show it exists — 'azd ai toolbox show &lt;name&gt;' OR portal → Toolboxes; point at the MCP endpoint URL
+• Step 2 (~90s): open main.py; walk the three blocks — auth (get_bearer_token_provider on ai.azure.com/.default), MCP tool (MCPStreamableHTTPTool with header_provider), agent (tools=[toolbox_tool])
+• Step 3 (~2 min): 'uv run python main.py &lt;question&gt;'; watch it call the tool; read the answer aloud
+• Optional (~30s): show tool_call span in the trace if App Insights is connected
+• Fallback: dry-run screenshots (endpoint, code pattern, successful answer, trace)
+• Payoff line: 'Toolbox is auth + one MCPStreamableHTTPTool + the same tools=[] list — value is in what you DIDN'T write.'</a:t>
             </a:r>
             <a:endParaRPr lang="en-US" dirty="0"/>
           </a:p>
@@ -1889,10 +1985,11 @@
           <a:p>
             <a:r>
               <a:rPr lang="en-US" dirty="0"/>
-              <a:t>• Two paths — portal for learning, azd for production (Day 1's operating norm)
-• Two-step flow: connections first, THEN toolbox
-• This split is intentional — YAML is checkable into source; credentials aren't
-• azd ai is the same CLI attendees used for Day 1 Part B (Hosted agent deploy)</a:t>
+              <a:t>• Seven parts — the toolbox spec
+• Connections are separate objects — YAML references by name
+• Skills are Foundry-specific — MCP-packaged expertise
+• RAI policy at toolbox level = central content-safety enforcement
+• Versioning is first-class — same discipline as Prompt agents</a:t>
             </a:r>
             <a:endParaRPr lang="en-US" dirty="0"/>
           </a:p>
@@ -1980,11 +2077,10 @@
           <a:p>
             <a:r>
               <a:rPr lang="en-US" dirty="0"/>
-              <a:t>• Three tools attached — no custom code, no credentials in file
-• web_search + code_interpreter are Microsoft-managed
-• toolbox_search is the intent-based router — helps when many tools
-• First version becomes default automatically
-• The azd command is what attendees run in the lab</a:t>
+              <a:t>• Two paths — portal for learning, azd for production (Day 1's operating norm)
+• Two-step flow: connections first, THEN toolbox
+• This split is intentional — YAML is checkable into source; credentials aren't
+• azd ai is the same CLI attendees used for Day 1 Part B (Hosted agent deploy)</a:t>
             </a:r>
             <a:endParaRPr lang="en-US" dirty="0"/>
           </a:p>
@@ -2072,10 +2168,11 @@
           <a:p>
             <a:r>
               <a:rPr lang="en-US" dirty="0"/>
-              <a:t>• Two-step pattern: connection, then tool that references it
-• Managed identity = the toolbox has its own Entra identity
-• No API keys in YAML, no keys checked into source
-• This is the Day 1 IaC-first operating norm in action</a:t>
+              <a:t>• Three tools attached — no custom code, no credentials in file
+• web_search + code_interpreter are Microsoft-managed
+• toolbox_search is the intent-based router — helps when many tools
+• First version becomes default automatically
+• The azd command is what attendees run in the lab</a:t>
             </a:r>
             <a:endParaRPr lang="en-US" dirty="0"/>
           </a:p>
@@ -2728,7 +2825,7 @@
                 <a:ea typeface="Calibri" pitchFamily="34" charset="-122"/>
                 <a:cs typeface="Calibri" pitchFamily="34" charset="-120"/>
               </a:rPr>
-              <a:t>Attaching an MCP server as a Toolbox tool</a:t>
+              <a:t>Adding a tool that needs a connection</a:t>
             </a:r>
             <a:endParaRPr lang="en-US" sz="2800" dirty="0"/>
           </a:p>
@@ -2759,7 +2856,7 @@
               <a:buNone/>
             </a:pPr>
             <a:r>
-              <a:rPr lang="en-US" sz="1300" dirty="0">
+              <a:rPr lang="en-US" sz="1200" dirty="0">
                 <a:solidFill>
                   <a:srgbClr val="212121"/>
                 </a:solidFill>
@@ -2767,9 +2864,9 @@
                 <a:ea typeface="Calibri" pitchFamily="34" charset="-122"/>
                 <a:cs typeface="Calibri" pitchFamily="34" charset="-120"/>
               </a:rPr>
-              <a:t>Any MCP server (public URL or your own) can be a toolbox tool:</a:t>
-            </a:r>
-            <a:endParaRPr lang="en-US" sz="1300" dirty="0"/>
+              <a:t>For tools that reach external systems, register a connection first:</a:t>
+            </a:r>
+            <a:endParaRPr lang="en-US" sz="1200" dirty="0"/>
           </a:p>
         </p:txBody>
       </p:sp>
@@ -2782,7 +2879,7 @@
         <p:spPr>
           <a:xfrm>
             <a:off x="365760" y="1463040"/>
-            <a:ext cx="8412480" cy="1645920"/>
+            <a:ext cx="8412480" cy="1188720"/>
           </a:xfrm>
           <a:prstGeom prst="rect">
             <a:avLst/>
@@ -2807,7 +2904,7 @@
         <p:spPr>
           <a:xfrm>
             <a:off x="502920" y="1554480"/>
-            <a:ext cx="8138160" cy="1463040"/>
+            <a:ext cx="8138160" cy="1005840"/>
           </a:xfrm>
           <a:prstGeom prst="rect">
             <a:avLst/>
@@ -2831,7 +2928,7 @@
                 <a:ea typeface="Consolas" pitchFamily="34" charset="-122"/>
                 <a:cs typeface="Consolas" pitchFamily="34" charset="-120"/>
               </a:rPr>
-              <a:t>tools:</a:t>
+              <a:t>azd ai connection create my-search-conn \</a:t>
             </a:r>
             <a:endParaRPr lang="en-US" sz="1200" dirty="0"/>
           </a:p>
@@ -2848,7 +2945,7 @@
                 <a:ea typeface="Consolas" pitchFamily="34" charset="-122"/>
                 <a:cs typeface="Consolas" pitchFamily="34" charset="-120"/>
               </a:rPr>
-              <a:t>  - type: mcp</a:t>
+              <a:t>  --kind cognitive-search \</a:t>
             </a:r>
             <a:endParaRPr lang="en-US" sz="1200" dirty="0"/>
           </a:p>
@@ -2865,7 +2962,7 @@
                 <a:ea typeface="Consolas" pitchFamily="34" charset="-122"/>
                 <a:cs typeface="Consolas" pitchFamily="34" charset="-120"/>
               </a:rPr>
-              <a:t>    server_label: myserver</a:t>
+              <a:t>  --target https://&lt;search&gt;.search.windows.net \</a:t>
             </a:r>
             <a:endParaRPr lang="en-US" sz="1200" dirty="0"/>
           </a:p>
@@ -2882,41 +2979,7 @@
                 <a:ea typeface="Consolas" pitchFamily="34" charset="-122"/>
                 <a:cs typeface="Consolas" pitchFamily="34" charset="-120"/>
               </a:rPr>
-              <a:t>    server_url: https://your-mcp-server.example.com</a:t>
-            </a:r>
-            <a:endParaRPr lang="en-US" sz="1200" dirty="0"/>
-          </a:p>
-          <a:p>
-            <a:pPr indent="0" marL="0">
-              <a:buNone/>
-            </a:pPr>
-            <a:r>
-              <a:rPr lang="en-US" sz="1200" dirty="0">
-                <a:solidFill>
-                  <a:srgbClr val="212121"/>
-                </a:solidFill>
-                <a:latin typeface="Consolas" pitchFamily="34" charset="0"/>
-                <a:ea typeface="Consolas" pitchFamily="34" charset="-122"/>
-                <a:cs typeface="Consolas" pitchFamily="34" charset="-120"/>
-              </a:rPr>
-              <a:t>    require_approval: never</a:t>
-            </a:r>
-            <a:endParaRPr lang="en-US" sz="1200" dirty="0"/>
-          </a:p>
-          <a:p>
-            <a:pPr indent="0" marL="0">
-              <a:buNone/>
-            </a:pPr>
-            <a:r>
-              <a:rPr lang="en-US" sz="1200" dirty="0">
-                <a:solidFill>
-                  <a:srgbClr val="212121"/>
-                </a:solidFill>
-                <a:latin typeface="Consolas" pitchFamily="34" charset="0"/>
-                <a:ea typeface="Consolas" pitchFamily="34" charset="-122"/>
-                <a:cs typeface="Consolas" pitchFamily="34" charset="-120"/>
-              </a:rPr>
-              <a:t>    project_connection_id: my-mcp-conn</a:t>
+              <a:t>  --auth-type project-managed-identity</a:t>
             </a:r>
             <a:endParaRPr lang="en-US" sz="1200" dirty="0"/>
           </a:p>
@@ -2930,8 +2993,8 @@
         </p:nvSpPr>
         <p:spPr>
           <a:xfrm>
-            <a:off x="365760" y="3246120"/>
-            <a:ext cx="8412480" cy="1097280"/>
+            <a:off x="365760" y="2743200"/>
+            <a:ext cx="8412480" cy="274320"/>
           </a:xfrm>
           <a:prstGeom prst="rect">
             <a:avLst/>
@@ -2943,12 +3006,8 @@
           <a:bodyPr wrap="square" rtlCol="0" anchor="ctr"/>
           <a:lstStyle/>
           <a:p>
-            <a:pPr marL="342900" indent="-342900">
-              <a:spcAft>
-                <a:spcPts val="600"/>
-              </a:spcAft>
-              <a:buSzPct val="100000"/>
-              <a:buChar char="•"/>
+            <a:pPr indent="0" marL="0">
+              <a:buNone/>
             </a:pPr>
             <a:r>
               <a:rPr lang="en-US" sz="1200" dirty="0">
@@ -2959,42 +3018,187 @@
                 <a:ea typeface="Calibri" pitchFamily="34" charset="-122"/>
                 <a:cs typeface="Calibri" pitchFamily="34" charset="-120"/>
               </a:rPr>
-              <a:t>Auth flows through the connection — keys, OAuth, Entra tokens all supported</a:t>
+              <a:t>Then reference by name in the toolbox YAML:</a:t>
             </a:r>
             <a:endParaRPr lang="en-US" sz="1200" dirty="0"/>
           </a:p>
-          <a:p>
-            <a:pPr marL="342900" indent="-342900">
-              <a:spcAft>
-                <a:spcPts val="600"/>
-              </a:spcAft>
-              <a:buSzPct val="100000"/>
-              <a:buChar char="•"/>
-            </a:pPr>
-            <a:r>
-              <a:rPr lang="en-US" sz="1200" dirty="0">
-                <a:solidFill>
-                  <a:srgbClr val="212121"/>
-                </a:solidFill>
-                <a:latin typeface="Calibri" pitchFamily="34" charset="0"/>
-                <a:ea typeface="Calibri" pitchFamily="34" charset="-122"/>
-                <a:cs typeface="Calibri" pitchFamily="34" charset="-120"/>
-              </a:rPr>
-              <a:t>Same MCP protocol as Day 3 — Toolbox is one way to wire an MCP server in</a:t>
-            </a:r>
-            <a:endParaRPr lang="en-US" sz="1200" dirty="0"/>
-          </a:p>
-        </p:txBody>
-      </p:sp>
-      <p:sp>
-        <p:nvSpPr>
-          <p:cNvPr id="9" name="Text 7"/>
+        </p:txBody>
+      </p:sp>
+      <p:sp>
+        <p:nvSpPr>
+          <p:cNvPr id="9" name="Shape 7"/>
           <p:cNvSpPr/>
           <p:nvPr/>
         </p:nvSpPr>
         <p:spPr>
           <a:xfrm>
-            <a:off x="365760" y="4434840"/>
+            <a:off x="365760" y="3063240"/>
+            <a:ext cx="8412480" cy="1371600"/>
+          </a:xfrm>
+          <a:prstGeom prst="rect">
+            <a:avLst/>
+          </a:prstGeom>
+          <a:solidFill>
+            <a:srgbClr val="F3F4F6"/>
+          </a:solidFill>
+          <a:ln w="6350">
+            <a:solidFill>
+              <a:srgbClr val="D1D5DB"/>
+            </a:solidFill>
+            <a:prstDash val="solid"/>
+          </a:ln>
+        </p:spPr>
+      </p:sp>
+      <p:sp>
+        <p:nvSpPr>
+          <p:cNvPr id="10" name="Text 8"/>
+          <p:cNvSpPr/>
+          <p:nvPr/>
+        </p:nvSpPr>
+        <p:spPr>
+          <a:xfrm>
+            <a:off x="502920" y="3154680"/>
+            <a:ext cx="8138160" cy="1188720"/>
+          </a:xfrm>
+          <a:prstGeom prst="rect">
+            <a:avLst/>
+          </a:prstGeom>
+          <a:noFill/>
+          <a:ln/>
+        </p:spPr>
+        <p:txBody>
+          <a:bodyPr wrap="square" lIns="0" tIns="0" rIns="0" bIns="0" rtlCol="0" anchor="t"/>
+          <a:lstStyle/>
+          <a:p>
+            <a:pPr indent="0" marL="0">
+              <a:buNone/>
+            </a:pPr>
+            <a:r>
+              <a:rPr lang="en-US" sz="1200" dirty="0">
+                <a:solidFill>
+                  <a:srgbClr val="212121"/>
+                </a:solidFill>
+                <a:latin typeface="Consolas" pitchFamily="34" charset="0"/>
+                <a:ea typeface="Consolas" pitchFamily="34" charset="-122"/>
+                <a:cs typeface="Consolas" pitchFamily="34" charset="-120"/>
+              </a:rPr>
+              <a:t>tools:</a:t>
+            </a:r>
+            <a:endParaRPr lang="en-US" sz="1200" dirty="0"/>
+          </a:p>
+          <a:p>
+            <a:pPr indent="0" marL="0">
+              <a:buNone/>
+            </a:pPr>
+            <a:r>
+              <a:rPr lang="en-US" sz="1200" dirty="0">
+                <a:solidFill>
+                  <a:srgbClr val="212121"/>
+                </a:solidFill>
+                <a:latin typeface="Consolas" pitchFamily="34" charset="0"/>
+                <a:ea typeface="Consolas" pitchFamily="34" charset="-122"/>
+                <a:cs typeface="Consolas" pitchFamily="34" charset="-120"/>
+              </a:rPr>
+              <a:t>  - type: azure_ai_search</a:t>
+            </a:r>
+            <a:endParaRPr lang="en-US" sz="1200" dirty="0"/>
+          </a:p>
+          <a:p>
+            <a:pPr indent="0" marL="0">
+              <a:buNone/>
+            </a:pPr>
+            <a:r>
+              <a:rPr lang="en-US" sz="1200" dirty="0">
+                <a:solidFill>
+                  <a:srgbClr val="212121"/>
+                </a:solidFill>
+                <a:latin typeface="Consolas" pitchFamily="34" charset="0"/>
+                <a:ea typeface="Consolas" pitchFamily="34" charset="-122"/>
+                <a:cs typeface="Consolas" pitchFamily="34" charset="-120"/>
+              </a:rPr>
+              <a:t>    name: search</a:t>
+            </a:r>
+            <a:endParaRPr lang="en-US" sz="1200" dirty="0"/>
+          </a:p>
+          <a:p>
+            <a:pPr indent="0" marL="0">
+              <a:buNone/>
+            </a:pPr>
+            <a:r>
+              <a:rPr lang="en-US" sz="1200" dirty="0">
+                <a:solidFill>
+                  <a:srgbClr val="212121"/>
+                </a:solidFill>
+                <a:latin typeface="Consolas" pitchFamily="34" charset="0"/>
+                <a:ea typeface="Consolas" pitchFamily="34" charset="-122"/>
+                <a:cs typeface="Consolas" pitchFamily="34" charset="-120"/>
+              </a:rPr>
+              <a:t>    azure_ai_search:</a:t>
+            </a:r>
+            <a:endParaRPr lang="en-US" sz="1200" dirty="0"/>
+          </a:p>
+          <a:p>
+            <a:pPr indent="0" marL="0">
+              <a:buNone/>
+            </a:pPr>
+            <a:r>
+              <a:rPr lang="en-US" sz="1200" dirty="0">
+                <a:solidFill>
+                  <a:srgbClr val="212121"/>
+                </a:solidFill>
+                <a:latin typeface="Consolas" pitchFamily="34" charset="0"/>
+                <a:ea typeface="Consolas" pitchFamily="34" charset="-122"/>
+                <a:cs typeface="Consolas" pitchFamily="34" charset="-120"/>
+              </a:rPr>
+              <a:t>      indexes:</a:t>
+            </a:r>
+            <a:endParaRPr lang="en-US" sz="1200" dirty="0"/>
+          </a:p>
+          <a:p>
+            <a:pPr indent="0" marL="0">
+              <a:buNone/>
+            </a:pPr>
+            <a:r>
+              <a:rPr lang="en-US" sz="1200" dirty="0">
+                <a:solidFill>
+                  <a:srgbClr val="212121"/>
+                </a:solidFill>
+                <a:latin typeface="Consolas" pitchFamily="34" charset="0"/>
+                <a:ea typeface="Consolas" pitchFamily="34" charset="-122"/>
+                <a:cs typeface="Consolas" pitchFamily="34" charset="-120"/>
+              </a:rPr>
+              <a:t>        - project_connection_id: my-search-conn</a:t>
+            </a:r>
+            <a:endParaRPr lang="en-US" sz="1200" dirty="0"/>
+          </a:p>
+          <a:p>
+            <a:pPr indent="0" marL="0">
+              <a:buNone/>
+            </a:pPr>
+            <a:r>
+              <a:rPr lang="en-US" sz="1200" dirty="0">
+                <a:solidFill>
+                  <a:srgbClr val="212121"/>
+                </a:solidFill>
+                <a:latin typeface="Consolas" pitchFamily="34" charset="0"/>
+                <a:ea typeface="Consolas" pitchFamily="34" charset="-122"/>
+                <a:cs typeface="Consolas" pitchFamily="34" charset="-120"/>
+              </a:rPr>
+              <a:t>          index_name: docs-index</a:t>
+            </a:r>
+            <a:endParaRPr lang="en-US" sz="1200" dirty="0"/>
+          </a:p>
+        </p:txBody>
+      </p:sp>
+      <p:sp>
+        <p:nvSpPr>
+          <p:cNvPr id="11" name="Text 9"/>
+          <p:cNvSpPr/>
+          <p:nvPr/>
+        </p:nvSpPr>
+        <p:spPr>
+          <a:xfrm>
+            <a:off x="365760" y="4480560"/>
             <a:ext cx="8412480" cy="365760"/>
           </a:xfrm>
           <a:prstGeom prst="rect">
@@ -3019,7 +3223,7 @@
                 <a:ea typeface="Calibri" pitchFamily="34" charset="-122"/>
                 <a:cs typeface="Calibri" pitchFamily="34" charset="-120"/>
               </a:rPr>
-              <a:t>Day 3 wires the Azure DevOps MCP server directly (not through Toolbox) — same protocol, different attachment.</a:t>
+              <a:t>Managed identity means the toolbox authenticates as itself — no long-lived keys.</a:t>
             </a:r>
             <a:endParaRPr lang="en-US" sz="1100" dirty="0"/>
           </a:p>
@@ -3149,6 +3353,427 @@
                 <a:ea typeface="Calibri" pitchFamily="34" charset="-122"/>
                 <a:cs typeface="Calibri" pitchFamily="34" charset="-120"/>
               </a:rPr>
+              <a:t>Attaching an MCP server as a Toolbox tool</a:t>
+            </a:r>
+            <a:endParaRPr lang="en-US" sz="2800" dirty="0"/>
+          </a:p>
+        </p:txBody>
+      </p:sp>
+      <p:sp>
+        <p:nvSpPr>
+          <p:cNvPr id="5" name="Text 3"/>
+          <p:cNvSpPr/>
+          <p:nvPr/>
+        </p:nvSpPr>
+        <p:spPr>
+          <a:xfrm>
+            <a:off x="365760" y="1051560"/>
+            <a:ext cx="8412480" cy="365760"/>
+          </a:xfrm>
+          <a:prstGeom prst="rect">
+            <a:avLst/>
+          </a:prstGeom>
+          <a:noFill/>
+          <a:ln/>
+        </p:spPr>
+        <p:txBody>
+          <a:bodyPr wrap="square" rtlCol="0" anchor="ctr"/>
+          <a:lstStyle/>
+          <a:p>
+            <a:pPr indent="0" marL="0">
+              <a:buNone/>
+            </a:pPr>
+            <a:r>
+              <a:rPr lang="en-US" sz="1300" dirty="0">
+                <a:solidFill>
+                  <a:srgbClr val="212121"/>
+                </a:solidFill>
+                <a:latin typeface="Calibri" pitchFamily="34" charset="0"/>
+                <a:ea typeface="Calibri" pitchFamily="34" charset="-122"/>
+                <a:cs typeface="Calibri" pitchFamily="34" charset="-120"/>
+              </a:rPr>
+              <a:t>Any MCP server (public URL or your own) can be a toolbox tool:</a:t>
+            </a:r>
+            <a:endParaRPr lang="en-US" sz="1300" dirty="0"/>
+          </a:p>
+        </p:txBody>
+      </p:sp>
+      <p:sp>
+        <p:nvSpPr>
+          <p:cNvPr id="6" name="Shape 4"/>
+          <p:cNvSpPr/>
+          <p:nvPr/>
+        </p:nvSpPr>
+        <p:spPr>
+          <a:xfrm>
+            <a:off x="365760" y="1463040"/>
+            <a:ext cx="8412480" cy="1645920"/>
+          </a:xfrm>
+          <a:prstGeom prst="rect">
+            <a:avLst/>
+          </a:prstGeom>
+          <a:solidFill>
+            <a:srgbClr val="F3F4F6"/>
+          </a:solidFill>
+          <a:ln w="6350">
+            <a:solidFill>
+              <a:srgbClr val="D1D5DB"/>
+            </a:solidFill>
+            <a:prstDash val="solid"/>
+          </a:ln>
+        </p:spPr>
+      </p:sp>
+      <p:sp>
+        <p:nvSpPr>
+          <p:cNvPr id="7" name="Text 5"/>
+          <p:cNvSpPr/>
+          <p:nvPr/>
+        </p:nvSpPr>
+        <p:spPr>
+          <a:xfrm>
+            <a:off x="502920" y="1554480"/>
+            <a:ext cx="8138160" cy="1463040"/>
+          </a:xfrm>
+          <a:prstGeom prst="rect">
+            <a:avLst/>
+          </a:prstGeom>
+          <a:noFill/>
+          <a:ln/>
+        </p:spPr>
+        <p:txBody>
+          <a:bodyPr wrap="square" lIns="0" tIns="0" rIns="0" bIns="0" rtlCol="0" anchor="t"/>
+          <a:lstStyle/>
+          <a:p>
+            <a:pPr indent="0" marL="0">
+              <a:buNone/>
+            </a:pPr>
+            <a:r>
+              <a:rPr lang="en-US" sz="1200" dirty="0">
+                <a:solidFill>
+                  <a:srgbClr val="212121"/>
+                </a:solidFill>
+                <a:latin typeface="Consolas" pitchFamily="34" charset="0"/>
+                <a:ea typeface="Consolas" pitchFamily="34" charset="-122"/>
+                <a:cs typeface="Consolas" pitchFamily="34" charset="-120"/>
+              </a:rPr>
+              <a:t>tools:</a:t>
+            </a:r>
+            <a:endParaRPr lang="en-US" sz="1200" dirty="0"/>
+          </a:p>
+          <a:p>
+            <a:pPr indent="0" marL="0">
+              <a:buNone/>
+            </a:pPr>
+            <a:r>
+              <a:rPr lang="en-US" sz="1200" dirty="0">
+                <a:solidFill>
+                  <a:srgbClr val="212121"/>
+                </a:solidFill>
+                <a:latin typeface="Consolas" pitchFamily="34" charset="0"/>
+                <a:ea typeface="Consolas" pitchFamily="34" charset="-122"/>
+                <a:cs typeface="Consolas" pitchFamily="34" charset="-120"/>
+              </a:rPr>
+              <a:t>  - type: mcp</a:t>
+            </a:r>
+            <a:endParaRPr lang="en-US" sz="1200" dirty="0"/>
+          </a:p>
+          <a:p>
+            <a:pPr indent="0" marL="0">
+              <a:buNone/>
+            </a:pPr>
+            <a:r>
+              <a:rPr lang="en-US" sz="1200" dirty="0">
+                <a:solidFill>
+                  <a:srgbClr val="212121"/>
+                </a:solidFill>
+                <a:latin typeface="Consolas" pitchFamily="34" charset="0"/>
+                <a:ea typeface="Consolas" pitchFamily="34" charset="-122"/>
+                <a:cs typeface="Consolas" pitchFamily="34" charset="-120"/>
+              </a:rPr>
+              <a:t>    server_label: myserver</a:t>
+            </a:r>
+            <a:endParaRPr lang="en-US" sz="1200" dirty="0"/>
+          </a:p>
+          <a:p>
+            <a:pPr indent="0" marL="0">
+              <a:buNone/>
+            </a:pPr>
+            <a:r>
+              <a:rPr lang="en-US" sz="1200" dirty="0">
+                <a:solidFill>
+                  <a:srgbClr val="212121"/>
+                </a:solidFill>
+                <a:latin typeface="Consolas" pitchFamily="34" charset="0"/>
+                <a:ea typeface="Consolas" pitchFamily="34" charset="-122"/>
+                <a:cs typeface="Consolas" pitchFamily="34" charset="-120"/>
+              </a:rPr>
+              <a:t>    server_url: https://your-mcp-server.example.com</a:t>
+            </a:r>
+            <a:endParaRPr lang="en-US" sz="1200" dirty="0"/>
+          </a:p>
+          <a:p>
+            <a:pPr indent="0" marL="0">
+              <a:buNone/>
+            </a:pPr>
+            <a:r>
+              <a:rPr lang="en-US" sz="1200" dirty="0">
+                <a:solidFill>
+                  <a:srgbClr val="212121"/>
+                </a:solidFill>
+                <a:latin typeface="Consolas" pitchFamily="34" charset="0"/>
+                <a:ea typeface="Consolas" pitchFamily="34" charset="-122"/>
+                <a:cs typeface="Consolas" pitchFamily="34" charset="-120"/>
+              </a:rPr>
+              <a:t>    require_approval: never</a:t>
+            </a:r>
+            <a:endParaRPr lang="en-US" sz="1200" dirty="0"/>
+          </a:p>
+          <a:p>
+            <a:pPr indent="0" marL="0">
+              <a:buNone/>
+            </a:pPr>
+            <a:r>
+              <a:rPr lang="en-US" sz="1200" dirty="0">
+                <a:solidFill>
+                  <a:srgbClr val="212121"/>
+                </a:solidFill>
+                <a:latin typeface="Consolas" pitchFamily="34" charset="0"/>
+                <a:ea typeface="Consolas" pitchFamily="34" charset="-122"/>
+                <a:cs typeface="Consolas" pitchFamily="34" charset="-120"/>
+              </a:rPr>
+              <a:t>    project_connection_id: my-mcp-conn</a:t>
+            </a:r>
+            <a:endParaRPr lang="en-US" sz="1200" dirty="0"/>
+          </a:p>
+        </p:txBody>
+      </p:sp>
+      <p:sp>
+        <p:nvSpPr>
+          <p:cNvPr id="8" name="Text 6"/>
+          <p:cNvSpPr/>
+          <p:nvPr/>
+        </p:nvSpPr>
+        <p:spPr>
+          <a:xfrm>
+            <a:off x="365760" y="3246120"/>
+            <a:ext cx="8412480" cy="1097280"/>
+          </a:xfrm>
+          <a:prstGeom prst="rect">
+            <a:avLst/>
+          </a:prstGeom>
+          <a:noFill/>
+          <a:ln/>
+        </p:spPr>
+        <p:txBody>
+          <a:bodyPr wrap="square" rtlCol="0" anchor="ctr"/>
+          <a:lstStyle/>
+          <a:p>
+            <a:pPr marL="342900" indent="-342900">
+              <a:spcAft>
+                <a:spcPts val="600"/>
+              </a:spcAft>
+              <a:buSzPct val="100000"/>
+              <a:buChar char="•"/>
+            </a:pPr>
+            <a:r>
+              <a:rPr lang="en-US" sz="1200" dirty="0">
+                <a:solidFill>
+                  <a:srgbClr val="212121"/>
+                </a:solidFill>
+                <a:latin typeface="Calibri" pitchFamily="34" charset="0"/>
+                <a:ea typeface="Calibri" pitchFamily="34" charset="-122"/>
+                <a:cs typeface="Calibri" pitchFamily="34" charset="-120"/>
+              </a:rPr>
+              <a:t>Auth flows through the connection — keys, OAuth, Entra tokens all supported</a:t>
+            </a:r>
+            <a:endParaRPr lang="en-US" sz="1200" dirty="0"/>
+          </a:p>
+          <a:p>
+            <a:pPr marL="342900" indent="-342900">
+              <a:spcAft>
+                <a:spcPts val="600"/>
+              </a:spcAft>
+              <a:buSzPct val="100000"/>
+              <a:buChar char="•"/>
+            </a:pPr>
+            <a:r>
+              <a:rPr lang="en-US" sz="1200" dirty="0">
+                <a:solidFill>
+                  <a:srgbClr val="212121"/>
+                </a:solidFill>
+                <a:latin typeface="Calibri" pitchFamily="34" charset="0"/>
+                <a:ea typeface="Calibri" pitchFamily="34" charset="-122"/>
+                <a:cs typeface="Calibri" pitchFamily="34" charset="-120"/>
+              </a:rPr>
+              <a:t>Same MCP protocol as Day 3 — Toolbox is one way to wire an MCP server in</a:t>
+            </a:r>
+            <a:endParaRPr lang="en-US" sz="1200" dirty="0"/>
+          </a:p>
+        </p:txBody>
+      </p:sp>
+      <p:sp>
+        <p:nvSpPr>
+          <p:cNvPr id="9" name="Text 7"/>
+          <p:cNvSpPr/>
+          <p:nvPr/>
+        </p:nvSpPr>
+        <p:spPr>
+          <a:xfrm>
+            <a:off x="365760" y="4434840"/>
+            <a:ext cx="8412480" cy="365760"/>
+          </a:xfrm>
+          <a:prstGeom prst="rect">
+            <a:avLst/>
+          </a:prstGeom>
+          <a:noFill/>
+          <a:ln/>
+        </p:spPr>
+        <p:txBody>
+          <a:bodyPr wrap="square" rtlCol="0" anchor="ctr"/>
+          <a:lstStyle/>
+          <a:p>
+            <a:pPr indent="0" marL="0">
+              <a:buNone/>
+            </a:pPr>
+            <a:r>
+              <a:rPr lang="en-US" sz="1100" i="1" dirty="0">
+                <a:solidFill>
+                  <a:srgbClr val="6B7280"/>
+                </a:solidFill>
+                <a:latin typeface="Calibri" pitchFamily="34" charset="0"/>
+                <a:ea typeface="Calibri" pitchFamily="34" charset="-122"/>
+                <a:cs typeface="Calibri" pitchFamily="34" charset="-120"/>
+              </a:rPr>
+              <a:t>Day 3 wires the Azure DevOps MCP server directly (not through Toolbox) — same protocol, different attachment.</a:t>
+            </a:r>
+            <a:endParaRPr lang="en-US" sz="1100" dirty="0"/>
+          </a:p>
+        </p:txBody>
+      </p:sp>
+    </p:spTree>
+  </p:cSld>
+  <p:clrMapOvr>
+    <a:masterClrMapping/>
+  </p:clrMapOvr>
+</p:sld>
+</file>
+
+<file path=ppt/slides/slide12.xml><?xml version="1.0" encoding="utf-8"?>
+<p:sld xmlns:a="http://schemas.openxmlformats.org/drawingml/2006/main" xmlns:r="http://schemas.openxmlformats.org/officeDocument/2006/relationships" xmlns:p="http://schemas.openxmlformats.org/presentationml/2006/main">
+  <p:cSld name="Slide 12">
+    <p:bg>
+      <p:bgPr>
+        <a:solidFill>
+          <a:srgbClr val="FFFFFF"/>
+        </a:solidFill>
+      </p:bgPr>
+    </p:bg>
+    <p:spTree>
+      <p:nvGrpSpPr>
+        <p:cNvPr id="1" name=""/>
+        <p:cNvGrpSpPr/>
+        <p:nvPr/>
+      </p:nvGrpSpPr>
+      <p:grpSpPr>
+        <a:xfrm>
+          <a:off x="0" y="0"/>
+          <a:ext cx="0" cy="0"/>
+          <a:chOff x="0" y="0"/>
+          <a:chExt cx="0" cy="0"/>
+        </a:xfrm>
+      </p:grpSpPr>
+      <p:sp>
+        <p:nvSpPr>
+          <p:cNvPr id="2" name="Shape 0"/>
+          <p:cNvSpPr/>
+          <p:nvPr/>
+        </p:nvSpPr>
+        <p:spPr>
+          <a:xfrm>
+            <a:off x="0" y="0"/>
+            <a:ext cx="54864" cy="5143500"/>
+          </a:xfrm>
+          <a:prstGeom prst="rect">
+            <a:avLst/>
+          </a:prstGeom>
+          <a:solidFill>
+            <a:srgbClr val="1E2761"/>
+          </a:solidFill>
+          <a:ln/>
+        </p:spPr>
+      </p:sp>
+      <p:sp>
+        <p:nvSpPr>
+          <p:cNvPr id="3" name="Text 1"/>
+          <p:cNvSpPr/>
+          <p:nvPr/>
+        </p:nvSpPr>
+        <p:spPr>
+          <a:xfrm>
+            <a:off x="5669280" y="274320"/>
+            <a:ext cx="3291840" cy="274320"/>
+          </a:xfrm>
+          <a:prstGeom prst="rect">
+            <a:avLst/>
+          </a:prstGeom>
+          <a:noFill/>
+          <a:ln/>
+        </p:spPr>
+        <p:txBody>
+          <a:bodyPr wrap="square" lIns="0" tIns="0" rIns="0" bIns="0" rtlCol="0" anchor="ctr"/>
+          <a:lstStyle/>
+          <a:p>
+            <a:pPr algn="r" indent="0" marL="0">
+              <a:buNone/>
+            </a:pPr>
+            <a:r>
+              <a:rPr lang="en-US" sz="1000" dirty="0">
+                <a:solidFill>
+                  <a:srgbClr val="6B7280"/>
+                </a:solidFill>
+                <a:latin typeface="Calibri" pitchFamily="34" charset="0"/>
+                <a:ea typeface="Calibri" pitchFamily="34" charset="-122"/>
+                <a:cs typeface="Calibri" pitchFamily="34" charset="-120"/>
+              </a:rPr>
+              <a:t>Day 2 · Module 5</a:t>
+            </a:r>
+            <a:endParaRPr lang="en-US" sz="1000" dirty="0"/>
+          </a:p>
+        </p:txBody>
+      </p:sp>
+      <p:sp>
+        <p:nvSpPr>
+          <p:cNvPr id="4" name="Text 2"/>
+          <p:cNvSpPr/>
+          <p:nvPr/>
+        </p:nvSpPr>
+        <p:spPr>
+          <a:xfrm>
+            <a:off x="365760" y="320040"/>
+            <a:ext cx="6217920" cy="640080"/>
+          </a:xfrm>
+          <a:prstGeom prst="rect">
+            <a:avLst/>
+          </a:prstGeom>
+          <a:noFill/>
+          <a:ln/>
+        </p:spPr>
+        <p:txBody>
+          <a:bodyPr wrap="square" lIns="0" tIns="0" rIns="0" bIns="0" rtlCol="0" anchor="ctr"/>
+          <a:lstStyle/>
+          <a:p>
+            <a:pPr indent="0" marL="0">
+              <a:buNone/>
+            </a:pPr>
+            <a:r>
+              <a:rPr lang="en-US" sz="2800" b="1" dirty="0">
+                <a:solidFill>
+                  <a:srgbClr val="1E2761"/>
+                </a:solidFill>
+                <a:latin typeface="Calibri" pitchFamily="34" charset="0"/>
+                <a:ea typeface="Calibri" pitchFamily="34" charset="-122"/>
+                <a:cs typeface="Calibri" pitchFamily="34" charset="-120"/>
+              </a:rPr>
               <a:t>Consuming a toolbox — the two endpoints</a:t>
             </a:r>
             <a:endParaRPr lang="en-US" sz="2800" dirty="0"/>
@@ -3196,7 +3821,7 @@
       </p:sp>
       <p:graphicFrame>
         <p:nvGraphicFramePr>
-          <p:cNvPr id="12" name="Table 0"/>
+          <p:cNvPr id="13" name="Table 0"/>
           <p:cNvGraphicFramePr>
             <a:graphicFrameLocks noGrp="1"/>
           </p:cNvGraphicFramePr>
@@ -3890,489 +4515,6 @@
 </p:sld>
 </file>
 
-<file path=ppt/slides/slide12.xml><?xml version="1.0" encoding="utf-8"?>
-<p:sld xmlns:a="http://schemas.openxmlformats.org/drawingml/2006/main" xmlns:r="http://schemas.openxmlformats.org/officeDocument/2006/relationships" xmlns:p="http://schemas.openxmlformats.org/presentationml/2006/main">
-  <p:cSld name="Slide 12">
-    <p:bg>
-      <p:bgPr>
-        <a:solidFill>
-          <a:srgbClr val="FFFFFF"/>
-        </a:solidFill>
-      </p:bgPr>
-    </p:bg>
-    <p:spTree>
-      <p:nvGrpSpPr>
-        <p:cNvPr id="1" name=""/>
-        <p:cNvGrpSpPr/>
-        <p:nvPr/>
-      </p:nvGrpSpPr>
-      <p:grpSpPr>
-        <a:xfrm>
-          <a:off x="0" y="0"/>
-          <a:ext cx="0" cy="0"/>
-          <a:chOff x="0" y="0"/>
-          <a:chExt cx="0" cy="0"/>
-        </a:xfrm>
-      </p:grpSpPr>
-      <p:sp>
-        <p:nvSpPr>
-          <p:cNvPr id="2" name="Shape 0"/>
-          <p:cNvSpPr/>
-          <p:nvPr/>
-        </p:nvSpPr>
-        <p:spPr>
-          <a:xfrm>
-            <a:off x="0" y="0"/>
-            <a:ext cx="54864" cy="5143500"/>
-          </a:xfrm>
-          <a:prstGeom prst="rect">
-            <a:avLst/>
-          </a:prstGeom>
-          <a:solidFill>
-            <a:srgbClr val="1E2761"/>
-          </a:solidFill>
-          <a:ln/>
-        </p:spPr>
-      </p:sp>
-      <p:sp>
-        <p:nvSpPr>
-          <p:cNvPr id="3" name="Text 1"/>
-          <p:cNvSpPr/>
-          <p:nvPr/>
-        </p:nvSpPr>
-        <p:spPr>
-          <a:xfrm>
-            <a:off x="5669280" y="274320"/>
-            <a:ext cx="3291840" cy="274320"/>
-          </a:xfrm>
-          <a:prstGeom prst="rect">
-            <a:avLst/>
-          </a:prstGeom>
-          <a:noFill/>
-          <a:ln/>
-        </p:spPr>
-        <p:txBody>
-          <a:bodyPr wrap="square" lIns="0" tIns="0" rIns="0" bIns="0" rtlCol="0" anchor="ctr"/>
-          <a:lstStyle/>
-          <a:p>
-            <a:pPr algn="r" indent="0" marL="0">
-              <a:buNone/>
-            </a:pPr>
-            <a:r>
-              <a:rPr lang="en-US" sz="1000" dirty="0">
-                <a:solidFill>
-                  <a:srgbClr val="6B7280"/>
-                </a:solidFill>
-                <a:latin typeface="Calibri" pitchFamily="34" charset="0"/>
-                <a:ea typeface="Calibri" pitchFamily="34" charset="-122"/>
-                <a:cs typeface="Calibri" pitchFamily="34" charset="-120"/>
-              </a:rPr>
-              <a:t>Day 2 · Module 5</a:t>
-            </a:r>
-            <a:endParaRPr lang="en-US" sz="1000" dirty="0"/>
-          </a:p>
-        </p:txBody>
-      </p:sp>
-      <p:sp>
-        <p:nvSpPr>
-          <p:cNvPr id="4" name="Text 2"/>
-          <p:cNvSpPr/>
-          <p:nvPr/>
-        </p:nvSpPr>
-        <p:spPr>
-          <a:xfrm>
-            <a:off x="365760" y="320040"/>
-            <a:ext cx="6217920" cy="640080"/>
-          </a:xfrm>
-          <a:prstGeom prst="rect">
-            <a:avLst/>
-          </a:prstGeom>
-          <a:noFill/>
-          <a:ln/>
-        </p:spPr>
-        <p:txBody>
-          <a:bodyPr wrap="square" lIns="0" tIns="0" rIns="0" bIns="0" rtlCol="0" anchor="ctr"/>
-          <a:lstStyle/>
-          <a:p>
-            <a:pPr indent="0" marL="0">
-              <a:buNone/>
-            </a:pPr>
-            <a:r>
-              <a:rPr lang="en-US" sz="2800" b="1" dirty="0">
-                <a:solidFill>
-                  <a:srgbClr val="1E2761"/>
-                </a:solidFill>
-                <a:latin typeface="Calibri" pitchFamily="34" charset="0"/>
-                <a:ea typeface="Calibri" pitchFamily="34" charset="-122"/>
-                <a:cs typeface="Calibri" pitchFamily="34" charset="-120"/>
-              </a:rPr>
-              <a:t>Attaching a toolbox to an agent (MAF, Python)</a:t>
-            </a:r>
-            <a:endParaRPr lang="en-US" sz="2800" dirty="0"/>
-          </a:p>
-        </p:txBody>
-      </p:sp>
-      <p:sp>
-        <p:nvSpPr>
-          <p:cNvPr id="5" name="Shape 3"/>
-          <p:cNvSpPr/>
-          <p:nvPr/>
-        </p:nvSpPr>
-        <p:spPr>
-          <a:xfrm>
-            <a:off x="365760" y="1097280"/>
-            <a:ext cx="8412480" cy="3200400"/>
-          </a:xfrm>
-          <a:prstGeom prst="rect">
-            <a:avLst/>
-          </a:prstGeom>
-          <a:solidFill>
-            <a:srgbClr val="F3F4F6"/>
-          </a:solidFill>
-          <a:ln w="6350">
-            <a:solidFill>
-              <a:srgbClr val="D1D5DB"/>
-            </a:solidFill>
-            <a:prstDash val="solid"/>
-          </a:ln>
-        </p:spPr>
-      </p:sp>
-      <p:sp>
-        <p:nvSpPr>
-          <p:cNvPr id="6" name="Text 4"/>
-          <p:cNvSpPr/>
-          <p:nvPr/>
-        </p:nvSpPr>
-        <p:spPr>
-          <a:xfrm>
-            <a:off x="502920" y="1188720"/>
-            <a:ext cx="8138160" cy="3017520"/>
-          </a:xfrm>
-          <a:prstGeom prst="rect">
-            <a:avLst/>
-          </a:prstGeom>
-          <a:noFill/>
-          <a:ln/>
-        </p:spPr>
-        <p:txBody>
-          <a:bodyPr wrap="square" lIns="0" tIns="0" rIns="0" bIns="0" rtlCol="0" anchor="t"/>
-          <a:lstStyle/>
-          <a:p>
-            <a:pPr indent="0" marL="0">
-              <a:buNone/>
-            </a:pPr>
-            <a:r>
-              <a:rPr lang="en-US" sz="1100" dirty="0">
-                <a:solidFill>
-                  <a:srgbClr val="212121"/>
-                </a:solidFill>
-                <a:latin typeface="Consolas" pitchFamily="34" charset="0"/>
-                <a:ea typeface="Consolas" pitchFamily="34" charset="-122"/>
-                <a:cs typeface="Consolas" pitchFamily="34" charset="-120"/>
-              </a:rPr>
-              <a:t>from agent_framework import Agent</a:t>
-            </a:r>
-            <a:endParaRPr lang="en-US" sz="1100" dirty="0"/>
-          </a:p>
-          <a:p>
-            <a:pPr indent="0" marL="0">
-              <a:buNone/>
-            </a:pPr>
-            <a:r>
-              <a:rPr lang="en-US" sz="1100" dirty="0">
-                <a:solidFill>
-                  <a:srgbClr val="212121"/>
-                </a:solidFill>
-                <a:latin typeface="Consolas" pitchFamily="34" charset="0"/>
-                <a:ea typeface="Consolas" pitchFamily="34" charset="-122"/>
-                <a:cs typeface="Consolas" pitchFamily="34" charset="-120"/>
-              </a:rPr>
-              <a:t>from agent_framework.foundry import FoundryChatClient</a:t>
-            </a:r>
-            <a:endParaRPr lang="en-US" sz="1100" dirty="0"/>
-          </a:p>
-          <a:p>
-            <a:pPr indent="0" marL="0">
-              <a:buNone/>
-            </a:pPr>
-            <a:r>
-              <a:rPr lang="en-US" sz="1100" dirty="0">
-                <a:solidFill>
-                  <a:srgbClr val="212121"/>
-                </a:solidFill>
-                <a:latin typeface="Consolas" pitchFamily="34" charset="0"/>
-                <a:ea typeface="Consolas" pitchFamily="34" charset="-122"/>
-                <a:cs typeface="Consolas" pitchFamily="34" charset="-120"/>
-              </a:rPr>
-              <a:t>from agent_framework.foundry.toolbox import FoundryToolbox</a:t>
-            </a:r>
-            <a:endParaRPr lang="en-US" sz="1100" dirty="0"/>
-          </a:p>
-          <a:p>
-            <a:pPr indent="0" marL="0">
-              <a:buNone/>
-            </a:pPr>
-            <a:r>
-              <a:rPr lang="en-US" sz="1100" dirty="0">
-                <a:solidFill>
-                  <a:srgbClr val="212121"/>
-                </a:solidFill>
-                <a:latin typeface="Consolas" pitchFamily="34" charset="0"/>
-                <a:ea typeface="Consolas" pitchFamily="34" charset="-122"/>
-                <a:cs typeface="Consolas" pitchFamily="34" charset="-120"/>
-              </a:rPr>
-              <a:t>from azure.identity import AzureCliCredential</a:t>
-            </a:r>
-            <a:endParaRPr lang="en-US" sz="1100" dirty="0"/>
-          </a:p>
-          <a:p>
-            <a:pPr indent="0" marL="0">
-              <a:buNone/>
-            </a:pPr>
-            <a:endParaRPr lang="en-US" sz="1100" dirty="0"/>
-          </a:p>
-          <a:p>
-            <a:pPr indent="0" marL="0">
-              <a:buNone/>
-            </a:pPr>
-            <a:r>
-              <a:rPr lang="en-US" sz="1100" dirty="0">
-                <a:solidFill>
-                  <a:srgbClr val="212121"/>
-                </a:solidFill>
-                <a:latin typeface="Consolas" pitchFamily="34" charset="0"/>
-                <a:ea typeface="Consolas" pitchFamily="34" charset="-122"/>
-                <a:cs typeface="Consolas" pitchFamily="34" charset="-120"/>
-              </a:rPr>
-              <a:t>toolbox = FoundryToolbox(</a:t>
-            </a:r>
-            <a:endParaRPr lang="en-US" sz="1100" dirty="0"/>
-          </a:p>
-          <a:p>
-            <a:pPr indent="0" marL="0">
-              <a:buNone/>
-            </a:pPr>
-            <a:r>
-              <a:rPr lang="en-US" sz="1100" dirty="0">
-                <a:solidFill>
-                  <a:srgbClr val="212121"/>
-                </a:solidFill>
-                <a:latin typeface="Consolas" pitchFamily="34" charset="0"/>
-                <a:ea typeface="Consolas" pitchFamily="34" charset="-122"/>
-                <a:cs typeface="Consolas" pitchFamily="34" charset="-120"/>
-              </a:rPr>
-              <a:t>    project_endpoint="https://&lt;foundry-resource&gt;.services.ai.azure.com/api/projects/&lt;your-project&gt;",</a:t>
-            </a:r>
-            <a:endParaRPr lang="en-US" sz="1100" dirty="0"/>
-          </a:p>
-          <a:p>
-            <a:pPr indent="0" marL="0">
-              <a:buNone/>
-            </a:pPr>
-            <a:r>
-              <a:rPr lang="en-US" sz="1100" dirty="0">
-                <a:solidFill>
-                  <a:srgbClr val="212121"/>
-                </a:solidFill>
-                <a:latin typeface="Consolas" pitchFamily="34" charset="0"/>
-                <a:ea typeface="Consolas" pitchFamily="34" charset="-122"/>
-                <a:cs typeface="Consolas" pitchFamily="34" charset="-120"/>
-              </a:rPr>
-              <a:t>    name="my-toolbox",</a:t>
-            </a:r>
-            <a:endParaRPr lang="en-US" sz="1100" dirty="0"/>
-          </a:p>
-          <a:p>
-            <a:pPr indent="0" marL="0">
-              <a:buNone/>
-            </a:pPr>
-            <a:r>
-              <a:rPr lang="en-US" sz="1100" dirty="0">
-                <a:solidFill>
-                  <a:srgbClr val="212121"/>
-                </a:solidFill>
-                <a:latin typeface="Consolas" pitchFamily="34" charset="0"/>
-                <a:ea typeface="Consolas" pitchFamily="34" charset="-122"/>
-                <a:cs typeface="Consolas" pitchFamily="34" charset="-120"/>
-              </a:rPr>
-              <a:t>    credential=AzureCliCredential(),</a:t>
-            </a:r>
-            <a:endParaRPr lang="en-US" sz="1100" dirty="0"/>
-          </a:p>
-          <a:p>
-            <a:pPr indent="0" marL="0">
-              <a:buNone/>
-            </a:pPr>
-            <a:r>
-              <a:rPr lang="en-US" sz="1100" dirty="0">
-                <a:solidFill>
-                  <a:srgbClr val="212121"/>
-                </a:solidFill>
-                <a:latin typeface="Consolas" pitchFamily="34" charset="0"/>
-                <a:ea typeface="Consolas" pitchFamily="34" charset="-122"/>
-                <a:cs typeface="Consolas" pitchFamily="34" charset="-120"/>
-              </a:rPr>
-              <a:t>)</a:t>
-            </a:r>
-            <a:endParaRPr lang="en-US" sz="1100" dirty="0"/>
-          </a:p>
-          <a:p>
-            <a:pPr indent="0" marL="0">
-              <a:buNone/>
-            </a:pPr>
-            <a:endParaRPr lang="en-US" sz="1100" dirty="0"/>
-          </a:p>
-          <a:p>
-            <a:pPr indent="0" marL="0">
-              <a:buNone/>
-            </a:pPr>
-            <a:r>
-              <a:rPr lang="en-US" sz="1100" dirty="0">
-                <a:solidFill>
-                  <a:srgbClr val="212121"/>
-                </a:solidFill>
-                <a:latin typeface="Consolas" pitchFamily="34" charset="0"/>
-                <a:ea typeface="Consolas" pitchFamily="34" charset="-122"/>
-                <a:cs typeface="Consolas" pitchFamily="34" charset="-120"/>
-              </a:rPr>
-              <a:t>agent = Agent(</a:t>
-            </a:r>
-            <a:endParaRPr lang="en-US" sz="1100" dirty="0"/>
-          </a:p>
-          <a:p>
-            <a:pPr indent="0" marL="0">
-              <a:buNone/>
-            </a:pPr>
-            <a:r>
-              <a:rPr lang="en-US" sz="1100" dirty="0">
-                <a:solidFill>
-                  <a:srgbClr val="212121"/>
-                </a:solidFill>
-                <a:latin typeface="Consolas" pitchFamily="34" charset="0"/>
-                <a:ea typeface="Consolas" pitchFamily="34" charset="-122"/>
-                <a:cs typeface="Consolas" pitchFamily="34" charset="-120"/>
-              </a:rPr>
-              <a:t>    client=FoundryChatClient(credential=AzureCliCredential()),</a:t>
-            </a:r>
-            <a:endParaRPr lang="en-US" sz="1100" dirty="0"/>
-          </a:p>
-          <a:p>
-            <a:pPr indent="0" marL="0">
-              <a:buNone/>
-            </a:pPr>
-            <a:r>
-              <a:rPr lang="en-US" sz="1100" dirty="0">
-                <a:solidFill>
-                  <a:srgbClr val="212121"/>
-                </a:solidFill>
-                <a:latin typeface="Consolas" pitchFamily="34" charset="0"/>
-                <a:ea typeface="Consolas" pitchFamily="34" charset="-122"/>
-                <a:cs typeface="Consolas" pitchFamily="34" charset="-120"/>
-              </a:rPr>
-              <a:t>    name="DocsAssistant",</a:t>
-            </a:r>
-            <a:endParaRPr lang="en-US" sz="1100" dirty="0"/>
-          </a:p>
-          <a:p>
-            <a:pPr indent="0" marL="0">
-              <a:buNone/>
-            </a:pPr>
-            <a:r>
-              <a:rPr lang="en-US" sz="1100" dirty="0">
-                <a:solidFill>
-                  <a:srgbClr val="212121"/>
-                </a:solidFill>
-                <a:latin typeface="Consolas" pitchFamily="34" charset="0"/>
-                <a:ea typeface="Consolas" pitchFamily="34" charset="-122"/>
-                <a:cs typeface="Consolas" pitchFamily="34" charset="-120"/>
-              </a:rPr>
-              <a:t>    instructions="Use the toolbox tools to answer questions and cite sources.",</a:t>
-            </a:r>
-            <a:endParaRPr lang="en-US" sz="1100" dirty="0"/>
-          </a:p>
-          <a:p>
-            <a:pPr indent="0" marL="0">
-              <a:buNone/>
-            </a:pPr>
-            <a:r>
-              <a:rPr lang="en-US" sz="1100" dirty="0">
-                <a:solidFill>
-                  <a:srgbClr val="212121"/>
-                </a:solidFill>
-                <a:latin typeface="Consolas" pitchFamily="34" charset="0"/>
-                <a:ea typeface="Consolas" pitchFamily="34" charset="-122"/>
-                <a:cs typeface="Consolas" pitchFamily="34" charset="-120"/>
-              </a:rPr>
-              <a:t>    tools=[toolbox],   # ← one line to attach all toolbox tools</a:t>
-            </a:r>
-            <a:endParaRPr lang="en-US" sz="1100" dirty="0"/>
-          </a:p>
-          <a:p>
-            <a:pPr indent="0" marL="0">
-              <a:buNone/>
-            </a:pPr>
-            <a:r>
-              <a:rPr lang="en-US" sz="1100" dirty="0">
-                <a:solidFill>
-                  <a:srgbClr val="212121"/>
-                </a:solidFill>
-                <a:latin typeface="Consolas" pitchFamily="34" charset="0"/>
-                <a:ea typeface="Consolas" pitchFamily="34" charset="-122"/>
-                <a:cs typeface="Consolas" pitchFamily="34" charset="-120"/>
-              </a:rPr>
-              <a:t>)</a:t>
-            </a:r>
-            <a:endParaRPr lang="en-US" sz="1100" dirty="0"/>
-          </a:p>
-        </p:txBody>
-      </p:sp>
-      <p:sp>
-        <p:nvSpPr>
-          <p:cNvPr id="7" name="Text 5"/>
-          <p:cNvSpPr/>
-          <p:nvPr/>
-        </p:nvSpPr>
-        <p:spPr>
-          <a:xfrm>
-            <a:off x="365760" y="4434840"/>
-            <a:ext cx="8412480" cy="457200"/>
-          </a:xfrm>
-          <a:prstGeom prst="rect">
-            <a:avLst/>
-          </a:prstGeom>
-          <a:noFill/>
-          <a:ln/>
-        </p:spPr>
-        <p:txBody>
-          <a:bodyPr wrap="square" rtlCol="0" anchor="ctr"/>
-          <a:lstStyle/>
-          <a:p>
-            <a:pPr indent="0" marL="0">
-              <a:buNone/>
-            </a:pPr>
-            <a:r>
-              <a:rPr lang="en-US" sz="1200" i="1" dirty="0">
-                <a:solidFill>
-                  <a:srgbClr val="6B7280"/>
-                </a:solidFill>
-                <a:latin typeface="Calibri" pitchFamily="34" charset="0"/>
-                <a:ea typeface="Calibri" pitchFamily="34" charset="-122"/>
-                <a:cs typeface="Calibri" pitchFamily="34" charset="-120"/>
-              </a:rPr>
-              <a:t>toolbox behaves as a tool collection. All its tools become available via the Module 4 function-calling contract.</a:t>
-            </a:r>
-            <a:endParaRPr lang="en-US" sz="1200" dirty="0"/>
-          </a:p>
-        </p:txBody>
-      </p:sp>
-    </p:spTree>
-  </p:cSld>
-  <p:clrMapOvr>
-    <a:masterClrMapping/>
-  </p:clrMapOvr>
-</p:sld>
-</file>
-
 <file path=ppt/slides/slide13.xml><?xml version="1.0" encoding="utf-8"?>
 <p:sld xmlns:a="http://schemas.openxmlformats.org/drawingml/2006/main" xmlns:r="http://schemas.openxmlformats.org/officeDocument/2006/relationships" xmlns:p="http://schemas.openxmlformats.org/presentationml/2006/main">
   <p:cSld name="Slide 13">
@@ -4489,7 +4631,7 @@
                 <a:ea typeface="Calibri" pitchFamily="34" charset="-122"/>
                 <a:cs typeface="Calibri" pitchFamily="34" charset="-120"/>
               </a:rPr>
-              <a:t>Attaching a toolbox to a Prompt agent</a:t>
+              <a:t>Attaching a toolbox to an agent (MAF, Python)</a:t>
             </a:r>
             <a:endParaRPr lang="en-US" sz="2800" dirty="0"/>
           </a:p>
@@ -4497,14 +4639,39 @@
       </p:sp>
       <p:sp>
         <p:nvSpPr>
-          <p:cNvPr id="5" name="Text 3"/>
+          <p:cNvPr id="5" name="Shape 3"/>
           <p:cNvSpPr/>
           <p:nvPr/>
         </p:nvSpPr>
         <p:spPr>
           <a:xfrm>
             <a:off x="365760" y="1097280"/>
-            <a:ext cx="8412480" cy="502920"/>
+            <a:ext cx="8412480" cy="3200400"/>
+          </a:xfrm>
+          <a:prstGeom prst="rect">
+            <a:avLst/>
+          </a:prstGeom>
+          <a:solidFill>
+            <a:srgbClr val="F3F4F6"/>
+          </a:solidFill>
+          <a:ln w="6350">
+            <a:solidFill>
+              <a:srgbClr val="D1D5DB"/>
+            </a:solidFill>
+            <a:prstDash val="solid"/>
+          </a:ln>
+        </p:spPr>
+      </p:sp>
+      <p:sp>
+        <p:nvSpPr>
+          <p:cNvPr id="6" name="Text 4"/>
+          <p:cNvSpPr/>
+          <p:nvPr/>
+        </p:nvSpPr>
+        <p:spPr>
+          <a:xfrm>
+            <a:off x="502920" y="1188720"/>
+            <a:ext cx="8138160" cy="3017520"/>
           </a:xfrm>
           <a:prstGeom prst="rect">
             <a:avLst/>
@@ -4513,37 +4680,287 @@
           <a:ln/>
         </p:spPr>
         <p:txBody>
-          <a:bodyPr wrap="square" rtlCol="0" anchor="ctr"/>
+          <a:bodyPr wrap="square" lIns="0" tIns="0" rIns="0" bIns="0" rtlCol="0" anchor="t"/>
           <a:lstStyle/>
           <a:p>
             <a:pPr indent="0" marL="0">
               <a:buNone/>
             </a:pPr>
             <a:r>
-              <a:rPr lang="en-US" sz="1300" dirty="0">
+              <a:rPr lang="en-US" sz="1100" dirty="0">
                 <a:solidFill>
                   <a:srgbClr val="212121"/>
                 </a:solidFill>
-                <a:latin typeface="Calibri" pitchFamily="34" charset="0"/>
-                <a:ea typeface="Calibri" pitchFamily="34" charset="-122"/>
-                <a:cs typeface="Calibri" pitchFamily="34" charset="-120"/>
-              </a:rPr>
-              <a:t>For Prompt agents, the toolbox is attached in the agent configuration, not from code:</a:t>
-            </a:r>
-            <a:endParaRPr lang="en-US" sz="1300" dirty="0"/>
-          </a:p>
-        </p:txBody>
-      </p:sp>
-      <p:sp>
-        <p:nvSpPr>
-          <p:cNvPr id="6" name="Text 4"/>
+                <a:latin typeface="Consolas" pitchFamily="34" charset="0"/>
+                <a:ea typeface="Consolas" pitchFamily="34" charset="-122"/>
+                <a:cs typeface="Consolas" pitchFamily="34" charset="-120"/>
+              </a:rPr>
+              <a:t>from agent_framework import Agent</a:t>
+            </a:r>
+            <a:endParaRPr lang="en-US" sz="1100" dirty="0"/>
+          </a:p>
+          <a:p>
+            <a:pPr indent="0" marL="0">
+              <a:buNone/>
+            </a:pPr>
+            <a:r>
+              <a:rPr lang="en-US" sz="1100" dirty="0">
+                <a:solidFill>
+                  <a:srgbClr val="212121"/>
+                </a:solidFill>
+                <a:latin typeface="Consolas" pitchFamily="34" charset="0"/>
+                <a:ea typeface="Consolas" pitchFamily="34" charset="-122"/>
+                <a:cs typeface="Consolas" pitchFamily="34" charset="-120"/>
+              </a:rPr>
+              <a:t>from agent_framework.foundry import FoundryChatClient</a:t>
+            </a:r>
+            <a:endParaRPr lang="en-US" sz="1100" dirty="0"/>
+          </a:p>
+          <a:p>
+            <a:pPr indent="0" marL="0">
+              <a:buNone/>
+            </a:pPr>
+            <a:r>
+              <a:rPr lang="en-US" sz="1100" dirty="0">
+                <a:solidFill>
+                  <a:srgbClr val="212121"/>
+                </a:solidFill>
+                <a:latin typeface="Consolas" pitchFamily="34" charset="0"/>
+                <a:ea typeface="Consolas" pitchFamily="34" charset="-122"/>
+                <a:cs typeface="Consolas" pitchFamily="34" charset="-120"/>
+              </a:rPr>
+              <a:t>from agent_framework.foundry.toolbox import FoundryToolbox</a:t>
+            </a:r>
+            <a:endParaRPr lang="en-US" sz="1100" dirty="0"/>
+          </a:p>
+          <a:p>
+            <a:pPr indent="0" marL="0">
+              <a:buNone/>
+            </a:pPr>
+            <a:r>
+              <a:rPr lang="en-US" sz="1100" dirty="0">
+                <a:solidFill>
+                  <a:srgbClr val="212121"/>
+                </a:solidFill>
+                <a:latin typeface="Consolas" pitchFamily="34" charset="0"/>
+                <a:ea typeface="Consolas" pitchFamily="34" charset="-122"/>
+                <a:cs typeface="Consolas" pitchFamily="34" charset="-120"/>
+              </a:rPr>
+              <a:t>from azure.identity import AzureCliCredential</a:t>
+            </a:r>
+            <a:endParaRPr lang="en-US" sz="1100" dirty="0"/>
+          </a:p>
+          <a:p>
+            <a:pPr indent="0" marL="0">
+              <a:buNone/>
+            </a:pPr>
+            <a:endParaRPr lang="en-US" sz="1100" dirty="0"/>
+          </a:p>
+          <a:p>
+            <a:pPr indent="0" marL="0">
+              <a:buNone/>
+            </a:pPr>
+            <a:r>
+              <a:rPr lang="en-US" sz="1100" dirty="0">
+                <a:solidFill>
+                  <a:srgbClr val="212121"/>
+                </a:solidFill>
+                <a:latin typeface="Consolas" pitchFamily="34" charset="0"/>
+                <a:ea typeface="Consolas" pitchFamily="34" charset="-122"/>
+                <a:cs typeface="Consolas" pitchFamily="34" charset="-120"/>
+              </a:rPr>
+              <a:t>toolbox = FoundryToolbox(</a:t>
+            </a:r>
+            <a:endParaRPr lang="en-US" sz="1100" dirty="0"/>
+          </a:p>
+          <a:p>
+            <a:pPr indent="0" marL="0">
+              <a:buNone/>
+            </a:pPr>
+            <a:r>
+              <a:rPr lang="en-US" sz="1100" dirty="0">
+                <a:solidFill>
+                  <a:srgbClr val="212121"/>
+                </a:solidFill>
+                <a:latin typeface="Consolas" pitchFamily="34" charset="0"/>
+                <a:ea typeface="Consolas" pitchFamily="34" charset="-122"/>
+                <a:cs typeface="Consolas" pitchFamily="34" charset="-120"/>
+              </a:rPr>
+              <a:t>    project_endpoint="https://&lt;foundry-resource&gt;.services.ai.azure.com/api/projects/&lt;your-project&gt;",</a:t>
+            </a:r>
+            <a:endParaRPr lang="en-US" sz="1100" dirty="0"/>
+          </a:p>
+          <a:p>
+            <a:pPr indent="0" marL="0">
+              <a:buNone/>
+            </a:pPr>
+            <a:r>
+              <a:rPr lang="en-US" sz="1100" dirty="0">
+                <a:solidFill>
+                  <a:srgbClr val="212121"/>
+                </a:solidFill>
+                <a:latin typeface="Consolas" pitchFamily="34" charset="0"/>
+                <a:ea typeface="Consolas" pitchFamily="34" charset="-122"/>
+                <a:cs typeface="Consolas" pitchFamily="34" charset="-120"/>
+              </a:rPr>
+              <a:t>    name="my-toolbox",</a:t>
+            </a:r>
+            <a:endParaRPr lang="en-US" sz="1100" dirty="0"/>
+          </a:p>
+          <a:p>
+            <a:pPr indent="0" marL="0">
+              <a:buNone/>
+            </a:pPr>
+            <a:r>
+              <a:rPr lang="en-US" sz="1100" dirty="0">
+                <a:solidFill>
+                  <a:srgbClr val="212121"/>
+                </a:solidFill>
+                <a:latin typeface="Consolas" pitchFamily="34" charset="0"/>
+                <a:ea typeface="Consolas" pitchFamily="34" charset="-122"/>
+                <a:cs typeface="Consolas" pitchFamily="34" charset="-120"/>
+              </a:rPr>
+              <a:t>    credential=AzureCliCredential(),</a:t>
+            </a:r>
+            <a:endParaRPr lang="en-US" sz="1100" dirty="0"/>
+          </a:p>
+          <a:p>
+            <a:pPr indent="0" marL="0">
+              <a:buNone/>
+            </a:pPr>
+            <a:r>
+              <a:rPr lang="en-US" sz="1100" dirty="0">
+                <a:solidFill>
+                  <a:srgbClr val="212121"/>
+                </a:solidFill>
+                <a:latin typeface="Consolas" pitchFamily="34" charset="0"/>
+                <a:ea typeface="Consolas" pitchFamily="34" charset="-122"/>
+                <a:cs typeface="Consolas" pitchFamily="34" charset="-120"/>
+              </a:rPr>
+              <a:t>)</a:t>
+            </a:r>
+            <a:endParaRPr lang="en-US" sz="1100" dirty="0"/>
+          </a:p>
+          <a:p>
+            <a:pPr indent="0" marL="0">
+              <a:buNone/>
+            </a:pPr>
+            <a:endParaRPr lang="en-US" sz="1100" dirty="0"/>
+          </a:p>
+          <a:p>
+            <a:pPr indent="0" marL="0">
+              <a:buNone/>
+            </a:pPr>
+            <a:r>
+              <a:rPr lang="en-US" sz="1100" dirty="0">
+                <a:solidFill>
+                  <a:srgbClr val="212121"/>
+                </a:solidFill>
+                <a:latin typeface="Consolas" pitchFamily="34" charset="0"/>
+                <a:ea typeface="Consolas" pitchFamily="34" charset="-122"/>
+                <a:cs typeface="Consolas" pitchFamily="34" charset="-120"/>
+              </a:rPr>
+              <a:t>agent = Agent(</a:t>
+            </a:r>
+            <a:endParaRPr lang="en-US" sz="1100" dirty="0"/>
+          </a:p>
+          <a:p>
+            <a:pPr indent="0" marL="0">
+              <a:buNone/>
+            </a:pPr>
+            <a:r>
+              <a:rPr lang="en-US" sz="1100" dirty="0">
+                <a:solidFill>
+                  <a:srgbClr val="212121"/>
+                </a:solidFill>
+                <a:latin typeface="Consolas" pitchFamily="34" charset="0"/>
+                <a:ea typeface="Consolas" pitchFamily="34" charset="-122"/>
+                <a:cs typeface="Consolas" pitchFamily="34" charset="-120"/>
+              </a:rPr>
+              <a:t>    client=FoundryChatClient(credential=AzureCliCredential()),</a:t>
+            </a:r>
+            <a:endParaRPr lang="en-US" sz="1100" dirty="0"/>
+          </a:p>
+          <a:p>
+            <a:pPr indent="0" marL="0">
+              <a:buNone/>
+            </a:pPr>
+            <a:r>
+              <a:rPr lang="en-US" sz="1100" dirty="0">
+                <a:solidFill>
+                  <a:srgbClr val="212121"/>
+                </a:solidFill>
+                <a:latin typeface="Consolas" pitchFamily="34" charset="0"/>
+                <a:ea typeface="Consolas" pitchFamily="34" charset="-122"/>
+                <a:cs typeface="Consolas" pitchFamily="34" charset="-120"/>
+              </a:rPr>
+              <a:t>    name="DocsAssistant",</a:t>
+            </a:r>
+            <a:endParaRPr lang="en-US" sz="1100" dirty="0"/>
+          </a:p>
+          <a:p>
+            <a:pPr indent="0" marL="0">
+              <a:buNone/>
+            </a:pPr>
+            <a:r>
+              <a:rPr lang="en-US" sz="1100" dirty="0">
+                <a:solidFill>
+                  <a:srgbClr val="212121"/>
+                </a:solidFill>
+                <a:latin typeface="Consolas" pitchFamily="34" charset="0"/>
+                <a:ea typeface="Consolas" pitchFamily="34" charset="-122"/>
+                <a:cs typeface="Consolas" pitchFamily="34" charset="-120"/>
+              </a:rPr>
+              <a:t>    instructions="Use the toolbox tools to answer questions and cite sources.",</a:t>
+            </a:r>
+            <a:endParaRPr lang="en-US" sz="1100" dirty="0"/>
+          </a:p>
+          <a:p>
+            <a:pPr indent="0" marL="0">
+              <a:buNone/>
+            </a:pPr>
+            <a:r>
+              <a:rPr lang="en-US" sz="1100" dirty="0">
+                <a:solidFill>
+                  <a:srgbClr val="212121"/>
+                </a:solidFill>
+                <a:latin typeface="Consolas" pitchFamily="34" charset="0"/>
+                <a:ea typeface="Consolas" pitchFamily="34" charset="-122"/>
+                <a:cs typeface="Consolas" pitchFamily="34" charset="-120"/>
+              </a:rPr>
+              <a:t>    tools=[toolbox],   # ← one line to attach all toolbox tools</a:t>
+            </a:r>
+            <a:endParaRPr lang="en-US" sz="1100" dirty="0"/>
+          </a:p>
+          <a:p>
+            <a:pPr indent="0" marL="0">
+              <a:buNone/>
+            </a:pPr>
+            <a:r>
+              <a:rPr lang="en-US" sz="1100" dirty="0">
+                <a:solidFill>
+                  <a:srgbClr val="212121"/>
+                </a:solidFill>
+                <a:latin typeface="Consolas" pitchFamily="34" charset="0"/>
+                <a:ea typeface="Consolas" pitchFamily="34" charset="-122"/>
+                <a:cs typeface="Consolas" pitchFamily="34" charset="-120"/>
+              </a:rPr>
+              <a:t>)</a:t>
+            </a:r>
+            <a:endParaRPr lang="en-US" sz="1100" dirty="0"/>
+          </a:p>
+        </p:txBody>
+      </p:sp>
+      <p:sp>
+        <p:nvSpPr>
+          <p:cNvPr id="7" name="Text 5"/>
           <p:cNvSpPr/>
           <p:nvPr/>
         </p:nvSpPr>
         <p:spPr>
           <a:xfrm>
-            <a:off x="365760" y="1691640"/>
-            <a:ext cx="8412480" cy="1828800"/>
+            <a:off x="365760" y="4434840"/>
+            <a:ext cx="8412480" cy="457200"/>
           </a:xfrm>
           <a:prstGeom prst="rect">
             <a:avLst/>
@@ -4555,91 +4972,6 @@
           <a:bodyPr wrap="square" rtlCol="0" anchor="ctr"/>
           <a:lstStyle/>
           <a:p>
-            <a:pPr marL="342900" indent="-342900">
-              <a:spcAft>
-                <a:spcPts val="600"/>
-              </a:spcAft>
-              <a:buSzPct val="100000"/>
-              <a:buChar char="•"/>
-            </a:pPr>
-            <a:r>
-              <a:rPr lang="en-US" sz="1200" dirty="0">
-                <a:solidFill>
-                  <a:srgbClr val="212121"/>
-                </a:solidFill>
-                <a:latin typeface="Calibri" pitchFamily="34" charset="0"/>
-                <a:ea typeface="Calibri" pitchFamily="34" charset="-122"/>
-                <a:cs typeface="Calibri" pitchFamily="34" charset="-120"/>
-              </a:rPr>
-              <a:t>Portal: Agents → your agent → Tools → Add Toolbox → select → save</a:t>
-            </a:r>
-            <a:endParaRPr lang="en-US" sz="1200" dirty="0"/>
-          </a:p>
-          <a:p>
-            <a:pPr marL="342900" indent="-342900">
-              <a:spcAft>
-                <a:spcPts val="600"/>
-              </a:spcAft>
-              <a:buSzPct val="100000"/>
-              <a:buChar char="•"/>
-            </a:pPr>
-            <a:r>
-              <a:rPr lang="en-US" sz="1200" dirty="0">
-                <a:solidFill>
-                  <a:srgbClr val="212121"/>
-                </a:solidFill>
-                <a:latin typeface="Calibri" pitchFamily="34" charset="0"/>
-                <a:ea typeface="Calibri" pitchFamily="34" charset="-122"/>
-                <a:cs typeface="Calibri" pitchFamily="34" charset="-120"/>
-              </a:rPr>
-              <a:t>SDK: pass toolbox reference in PromptAgentDefinition(..., toolbox=...)</a:t>
-            </a:r>
-            <a:endParaRPr lang="en-US" sz="1200" dirty="0"/>
-          </a:p>
-          <a:p>
-            <a:pPr marL="342900" indent="-342900">
-              <a:spcAft>
-                <a:spcPts val="600"/>
-              </a:spcAft>
-              <a:buSzPct val="100000"/>
-              <a:buChar char="•"/>
-            </a:pPr>
-            <a:r>
-              <a:rPr lang="en-US" sz="1200" dirty="0">
-                <a:solidFill>
-                  <a:srgbClr val="212121"/>
-                </a:solidFill>
-                <a:latin typeface="Calibri" pitchFamily="34" charset="0"/>
-                <a:ea typeface="Calibri" pitchFamily="34" charset="-122"/>
-                <a:cs typeface="Calibri" pitchFamily="34" charset="-120"/>
-              </a:rPr>
-              <a:t>YAML: reference the toolbox in the agent's declarative definition</a:t>
-            </a:r>
-            <a:endParaRPr lang="en-US" sz="1200" dirty="0"/>
-          </a:p>
-        </p:txBody>
-      </p:sp>
-      <p:sp>
-        <p:nvSpPr>
-          <p:cNvPr id="7" name="Text 5"/>
-          <p:cNvSpPr/>
-          <p:nvPr/>
-        </p:nvSpPr>
-        <p:spPr>
-          <a:xfrm>
-            <a:off x="365760" y="3657600"/>
-            <a:ext cx="8412480" cy="640080"/>
-          </a:xfrm>
-          <a:prstGeom prst="rect">
-            <a:avLst/>
-          </a:prstGeom>
-          <a:noFill/>
-          <a:ln/>
-        </p:spPr>
-        <p:txBody>
-          <a:bodyPr wrap="square" rtlCol="0" anchor="ctr"/>
-          <a:lstStyle/>
-          <a:p>
             <a:pPr indent="0" marL="0">
               <a:buNone/>
             </a:pPr>
@@ -4652,46 +4984,7 @@
                 <a:ea typeface="Calibri" pitchFamily="34" charset="-122"/>
                 <a:cs typeface="Calibri" pitchFamily="34" charset="-120"/>
               </a:rPr>
-              <a:t>Consuming agent code (FoundryAgent(agent_name=..., agent_version=...)) stays the same. All Prompt-agent version consumers automatically get the new tools.</a:t>
-            </a:r>
-            <a:endParaRPr lang="en-US" sz="1200" dirty="0"/>
-          </a:p>
-        </p:txBody>
-      </p:sp>
-      <p:sp>
-        <p:nvSpPr>
-          <p:cNvPr id="8" name="Text 6"/>
-          <p:cNvSpPr/>
-          <p:nvPr/>
-        </p:nvSpPr>
-        <p:spPr>
-          <a:xfrm>
-            <a:off x="365760" y="4434840"/>
-            <a:ext cx="8412480" cy="365760"/>
-          </a:xfrm>
-          <a:prstGeom prst="rect">
-            <a:avLst/>
-          </a:prstGeom>
-          <a:noFill/>
-          <a:ln/>
-        </p:spPr>
-        <p:txBody>
-          <a:bodyPr wrap="square" rtlCol="0" anchor="ctr"/>
-          <a:lstStyle/>
-          <a:p>
-            <a:pPr indent="0" marL="0">
-              <a:buNone/>
-            </a:pPr>
-            <a:r>
-              <a:rPr lang="en-US" sz="1200" b="1" i="1" dirty="0">
-                <a:solidFill>
-                  <a:srgbClr val="1E2761"/>
-                </a:solidFill>
-                <a:latin typeface="Calibri" pitchFamily="34" charset="0"/>
-                <a:ea typeface="Calibri" pitchFamily="34" charset="-122"/>
-                <a:cs typeface="Calibri" pitchFamily="34" charset="-120"/>
-              </a:rPr>
-              <a:t>Same pattern for Hosted agents — configuration, not code.</a:t>
+              <a:t>toolbox behaves as a tool collection. All its tools become available via the Module 4 function-calling contract.</a:t>
             </a:r>
             <a:endParaRPr lang="en-US" sz="1200" dirty="0"/>
           </a:p>
@@ -4821,7 +5114,7 @@
                 <a:ea typeface="Calibri" pitchFamily="34" charset="-122"/>
                 <a:cs typeface="Calibri" pitchFamily="34" charset="-120"/>
               </a:rPr>
-              <a:t>Governance you get from toolbox</a:t>
+              <a:t>Attaching a toolbox to a Prompt agent</a:t>
             </a:r>
             <a:endParaRPr lang="en-US" sz="2800" dirty="0"/>
           </a:p>
@@ -4836,6 +5129,169 @@
         <p:spPr>
           <a:xfrm>
             <a:off x="365760" y="1097280"/>
+            <a:ext cx="8412480" cy="502920"/>
+          </a:xfrm>
+          <a:prstGeom prst="rect">
+            <a:avLst/>
+          </a:prstGeom>
+          <a:noFill/>
+          <a:ln/>
+        </p:spPr>
+        <p:txBody>
+          <a:bodyPr wrap="square" rtlCol="0" anchor="ctr"/>
+          <a:lstStyle/>
+          <a:p>
+            <a:pPr indent="0" marL="0">
+              <a:buNone/>
+            </a:pPr>
+            <a:r>
+              <a:rPr lang="en-US" sz="1300" dirty="0">
+                <a:solidFill>
+                  <a:srgbClr val="212121"/>
+                </a:solidFill>
+                <a:latin typeface="Calibri" pitchFamily="34" charset="0"/>
+                <a:ea typeface="Calibri" pitchFamily="34" charset="-122"/>
+                <a:cs typeface="Calibri" pitchFamily="34" charset="-120"/>
+              </a:rPr>
+              <a:t>For Prompt agents, the toolbox is attached in the agent configuration, not from code:</a:t>
+            </a:r>
+            <a:endParaRPr lang="en-US" sz="1300" dirty="0"/>
+          </a:p>
+        </p:txBody>
+      </p:sp>
+      <p:sp>
+        <p:nvSpPr>
+          <p:cNvPr id="6" name="Text 4"/>
+          <p:cNvSpPr/>
+          <p:nvPr/>
+        </p:nvSpPr>
+        <p:spPr>
+          <a:xfrm>
+            <a:off x="365760" y="1691640"/>
+            <a:ext cx="8412480" cy="1828800"/>
+          </a:xfrm>
+          <a:prstGeom prst="rect">
+            <a:avLst/>
+          </a:prstGeom>
+          <a:noFill/>
+          <a:ln/>
+        </p:spPr>
+        <p:txBody>
+          <a:bodyPr wrap="square" rtlCol="0" anchor="ctr"/>
+          <a:lstStyle/>
+          <a:p>
+            <a:pPr marL="342900" indent="-342900">
+              <a:spcAft>
+                <a:spcPts val="600"/>
+              </a:spcAft>
+              <a:buSzPct val="100000"/>
+              <a:buChar char="•"/>
+            </a:pPr>
+            <a:r>
+              <a:rPr lang="en-US" sz="1200" dirty="0">
+                <a:solidFill>
+                  <a:srgbClr val="212121"/>
+                </a:solidFill>
+                <a:latin typeface="Calibri" pitchFamily="34" charset="0"/>
+                <a:ea typeface="Calibri" pitchFamily="34" charset="-122"/>
+                <a:cs typeface="Calibri" pitchFamily="34" charset="-120"/>
+              </a:rPr>
+              <a:t>Portal: Agents → your agent → Tools → Add Toolbox → select → save</a:t>
+            </a:r>
+            <a:endParaRPr lang="en-US" sz="1200" dirty="0"/>
+          </a:p>
+          <a:p>
+            <a:pPr marL="342900" indent="-342900">
+              <a:spcAft>
+                <a:spcPts val="600"/>
+              </a:spcAft>
+              <a:buSzPct val="100000"/>
+              <a:buChar char="•"/>
+            </a:pPr>
+            <a:r>
+              <a:rPr lang="en-US" sz="1200" dirty="0">
+                <a:solidFill>
+                  <a:srgbClr val="212121"/>
+                </a:solidFill>
+                <a:latin typeface="Calibri" pitchFamily="34" charset="0"/>
+                <a:ea typeface="Calibri" pitchFamily="34" charset="-122"/>
+                <a:cs typeface="Calibri" pitchFamily="34" charset="-120"/>
+              </a:rPr>
+              <a:t>SDK: pass toolbox reference in PromptAgentDefinition(..., toolbox=...)</a:t>
+            </a:r>
+            <a:endParaRPr lang="en-US" sz="1200" dirty="0"/>
+          </a:p>
+          <a:p>
+            <a:pPr marL="342900" indent="-342900">
+              <a:spcAft>
+                <a:spcPts val="600"/>
+              </a:spcAft>
+              <a:buSzPct val="100000"/>
+              <a:buChar char="•"/>
+            </a:pPr>
+            <a:r>
+              <a:rPr lang="en-US" sz="1200" dirty="0">
+                <a:solidFill>
+                  <a:srgbClr val="212121"/>
+                </a:solidFill>
+                <a:latin typeface="Calibri" pitchFamily="34" charset="0"/>
+                <a:ea typeface="Calibri" pitchFamily="34" charset="-122"/>
+                <a:cs typeface="Calibri" pitchFamily="34" charset="-120"/>
+              </a:rPr>
+              <a:t>YAML: reference the toolbox in the agent's declarative definition</a:t>
+            </a:r>
+            <a:endParaRPr lang="en-US" sz="1200" dirty="0"/>
+          </a:p>
+        </p:txBody>
+      </p:sp>
+      <p:sp>
+        <p:nvSpPr>
+          <p:cNvPr id="7" name="Text 5"/>
+          <p:cNvSpPr/>
+          <p:nvPr/>
+        </p:nvSpPr>
+        <p:spPr>
+          <a:xfrm>
+            <a:off x="365760" y="3657600"/>
+            <a:ext cx="8412480" cy="640080"/>
+          </a:xfrm>
+          <a:prstGeom prst="rect">
+            <a:avLst/>
+          </a:prstGeom>
+          <a:noFill/>
+          <a:ln/>
+        </p:spPr>
+        <p:txBody>
+          <a:bodyPr wrap="square" rtlCol="0" anchor="ctr"/>
+          <a:lstStyle/>
+          <a:p>
+            <a:pPr indent="0" marL="0">
+              <a:buNone/>
+            </a:pPr>
+            <a:r>
+              <a:rPr lang="en-US" sz="1200" i="1" dirty="0">
+                <a:solidFill>
+                  <a:srgbClr val="6B7280"/>
+                </a:solidFill>
+                <a:latin typeface="Calibri" pitchFamily="34" charset="0"/>
+                <a:ea typeface="Calibri" pitchFamily="34" charset="-122"/>
+                <a:cs typeface="Calibri" pitchFamily="34" charset="-120"/>
+              </a:rPr>
+              <a:t>Consuming agent code (FoundryAgent(agent_name=..., agent_version=...)) stays the same. All Prompt-agent version consumers automatically get the new tools.</a:t>
+            </a:r>
+            <a:endParaRPr lang="en-US" sz="1200" dirty="0"/>
+          </a:p>
+        </p:txBody>
+      </p:sp>
+      <p:sp>
+        <p:nvSpPr>
+          <p:cNvPr id="8" name="Text 6"/>
+          <p:cNvSpPr/>
+          <p:nvPr/>
+        </p:nvSpPr>
+        <p:spPr>
+          <a:xfrm>
+            <a:off x="365760" y="4434840"/>
             <a:ext cx="8412480" cy="365760"/>
           </a:xfrm>
           <a:prstGeom prst="rect">
@@ -4852,162 +5308,17 @@
               <a:buNone/>
             </a:pPr>
             <a:r>
-              <a:rPr lang="en-US" sz="1400" dirty="0">
-                <a:solidFill>
-                  <a:srgbClr val="212121"/>
-                </a:solidFill>
-                <a:latin typeface="Calibri" pitchFamily="34" charset="0"/>
-                <a:ea typeface="Calibri" pitchFamily="34" charset="-122"/>
-                <a:cs typeface="Calibri" pitchFamily="34" charset="-120"/>
-              </a:rPr>
-              <a:t>Because toolboxes are a first-class Foundry resource:</a:t>
-            </a:r>
-            <a:endParaRPr lang="en-US" sz="1400" dirty="0"/>
-          </a:p>
-        </p:txBody>
-      </p:sp>
-      <p:sp>
-        <p:nvSpPr>
-          <p:cNvPr id="6" name="Text 4"/>
-          <p:cNvSpPr/>
-          <p:nvPr/>
-        </p:nvSpPr>
-        <p:spPr>
-          <a:xfrm>
-            <a:off x="365760" y="1417320"/>
-            <a:ext cx="8412480" cy="2377440"/>
-          </a:xfrm>
-          <a:prstGeom prst="rect">
-            <a:avLst/>
-          </a:prstGeom>
-          <a:noFill/>
-          <a:ln/>
-        </p:spPr>
-        <p:txBody>
-          <a:bodyPr wrap="square" rtlCol="0" anchor="ctr"/>
-          <a:lstStyle/>
-          <a:p>
-            <a:pPr marL="342900" indent="-342900">
-              <a:spcAft>
-                <a:spcPts val="600"/>
-              </a:spcAft>
-              <a:buSzPct val="100000"/>
-              <a:buChar char="•"/>
-            </a:pPr>
-            <a:r>
-              <a:rPr lang="en-US" sz="1200" dirty="0">
-                <a:solidFill>
-                  <a:srgbClr val="212121"/>
-                </a:solidFill>
-                <a:latin typeface="Calibri" pitchFamily="34" charset="0"/>
-                <a:ea typeface="Calibri" pitchFamily="34" charset="-122"/>
-                <a:cs typeface="Calibri" pitchFamily="34" charset="-120"/>
-              </a:rPr>
-              <a:t>RBAC — who can create, update, and consume a toolbox is Entra-controlled</a:t>
+              <a:rPr lang="en-US" sz="1200" b="1" i="1" dirty="0">
+                <a:solidFill>
+                  <a:srgbClr val="1E2761"/>
+                </a:solidFill>
+                <a:latin typeface="Calibri" pitchFamily="34" charset="0"/>
+                <a:ea typeface="Calibri" pitchFamily="34" charset="-122"/>
+                <a:cs typeface="Calibri" pitchFamily="34" charset="-120"/>
+              </a:rPr>
+              <a:t>Same pattern for Hosted agents — configuration, not code.</a:t>
             </a:r>
             <a:endParaRPr lang="en-US" sz="1200" dirty="0"/>
-          </a:p>
-          <a:p>
-            <a:pPr marL="342900" indent="-342900">
-              <a:spcAft>
-                <a:spcPts val="600"/>
-              </a:spcAft>
-              <a:buSzPct val="100000"/>
-              <a:buChar char="•"/>
-            </a:pPr>
-            <a:r>
-              <a:rPr lang="en-US" sz="1200" dirty="0">
-                <a:solidFill>
-                  <a:srgbClr val="212121"/>
-                </a:solidFill>
-                <a:latin typeface="Calibri" pitchFamily="34" charset="0"/>
-                <a:ea typeface="Calibri" pitchFamily="34" charset="-122"/>
-                <a:cs typeface="Calibri" pitchFamily="34" charset="-120"/>
-              </a:rPr>
-              <a:t>Audit — toolbox versions and consumption tracked centrally</a:t>
-            </a:r>
-            <a:endParaRPr lang="en-US" sz="1200" dirty="0"/>
-          </a:p>
-          <a:p>
-            <a:pPr marL="342900" indent="-342900">
-              <a:spcAft>
-                <a:spcPts val="600"/>
-              </a:spcAft>
-              <a:buSzPct val="100000"/>
-              <a:buChar char="•"/>
-            </a:pPr>
-            <a:r>
-              <a:rPr lang="en-US" sz="1200" dirty="0">
-                <a:solidFill>
-                  <a:srgbClr val="212121"/>
-                </a:solidFill>
-                <a:latin typeface="Calibri" pitchFamily="34" charset="0"/>
-                <a:ea typeface="Calibri" pitchFamily="34" charset="-122"/>
-                <a:cs typeface="Calibri" pitchFamily="34" charset="-120"/>
-              </a:rPr>
-              <a:t>RAI policy — apply a Responsible AI policy at the toolbox level (policies.rai_config)</a:t>
-            </a:r>
-            <a:endParaRPr lang="en-US" sz="1200" dirty="0"/>
-          </a:p>
-          <a:p>
-            <a:pPr marL="342900" indent="-342900">
-              <a:spcAft>
-                <a:spcPts val="600"/>
-              </a:spcAft>
-              <a:buSzPct val="100000"/>
-              <a:buChar char="•"/>
-            </a:pPr>
-            <a:r>
-              <a:rPr lang="en-US" sz="1200" dirty="0">
-                <a:solidFill>
-                  <a:srgbClr val="212121"/>
-                </a:solidFill>
-                <a:latin typeface="Calibri" pitchFamily="34" charset="0"/>
-                <a:ea typeface="Calibri" pitchFamily="34" charset="-122"/>
-                <a:cs typeface="Calibri" pitchFamily="34" charset="-120"/>
-              </a:rPr>
-              <a:t>Central catalog — one place to see every managed tool in the project</a:t>
-            </a:r>
-            <a:endParaRPr lang="en-US" sz="1200" dirty="0"/>
-          </a:p>
-        </p:txBody>
-      </p:sp>
-      <p:sp>
-        <p:nvSpPr>
-          <p:cNvPr id="7" name="Text 5"/>
-          <p:cNvSpPr/>
-          <p:nvPr/>
-        </p:nvSpPr>
-        <p:spPr>
-          <a:xfrm>
-            <a:off x="365760" y="3977640"/>
-            <a:ext cx="8412480" cy="502920"/>
-          </a:xfrm>
-          <a:prstGeom prst="rect">
-            <a:avLst/>
-          </a:prstGeom>
-          <a:noFill/>
-          <a:ln/>
-        </p:spPr>
-        <p:txBody>
-          <a:bodyPr wrap="square" rtlCol="0" anchor="ctr"/>
-          <a:lstStyle/>
-          <a:p>
-            <a:pPr indent="0" marL="0">
-              <a:buNone/>
-            </a:pPr>
-            <a:r>
-              <a:rPr lang="en-US" sz="1300" b="1" i="1" dirty="0">
-                <a:solidFill>
-                  <a:srgbClr val="1E2761"/>
-                </a:solidFill>
-                <a:latin typeface="Calibri" pitchFamily="34" charset="0"/>
-                <a:ea typeface="Calibri" pitchFamily="34" charset="-122"/>
-                <a:cs typeface="Calibri" pitchFamily="34" charset="-120"/>
-              </a:rPr>
-              <a:t>The platform answer to: 'how do we stop developers from wiring random tools into production agents?'</a:t>
-            </a:r>
-            <a:endParaRPr lang="en-US" sz="1300" dirty="0"/>
           </a:p>
         </p:txBody>
       </p:sp>
@@ -5135,7 +5446,7 @@
                 <a:ea typeface="Calibri" pitchFamily="34" charset="-122"/>
                 <a:cs typeface="Calibri" pitchFamily="34" charset="-120"/>
               </a:rPr>
-              <a:t>Versioning workflow</a:t>
+              <a:t>Governance you get from toolbox</a:t>
             </a:r>
             <a:endParaRPr lang="en-US" sz="2800" dirty="0"/>
           </a:p>
@@ -5174,7 +5485,7 @@
                 <a:ea typeface="Calibri" pitchFamily="34" charset="-122"/>
                 <a:cs typeface="Calibri" pitchFamily="34" charset="-120"/>
               </a:rPr>
-              <a:t>Standard workflow you'll use:</a:t>
+              <a:t>Because toolboxes are a first-class Foundry resource:</a:t>
             </a:r>
             <a:endParaRPr lang="en-US" sz="1400" dirty="0"/>
           </a:p>
@@ -5217,7 +5528,7 @@
                 <a:ea typeface="Calibri" pitchFamily="34" charset="-122"/>
                 <a:cs typeface="Calibri" pitchFamily="34" charset="-120"/>
               </a:rPr>
-              <a:t>Create v1 → automatically the default → agents consume via the consumer endpoint</a:t>
+              <a:t>RBAC — who can create, update, and consume a toolbox is Entra-controlled</a:t>
             </a:r>
             <a:endParaRPr lang="en-US" sz="1200" dirty="0"/>
           </a:p>
@@ -5238,7 +5549,7 @@
                 <a:ea typeface="Calibri" pitchFamily="34" charset="-122"/>
                 <a:cs typeface="Calibri" pitchFamily="34" charset="-120"/>
               </a:rPr>
-              <a:t>Author v2 (add a tool, tighten a description, swap an MCP connection)</a:t>
+              <a:t>Audit — toolbox versions and consumption tracked centrally</a:t>
             </a:r>
             <a:endParaRPr lang="en-US" sz="1200" dirty="0"/>
           </a:p>
@@ -5259,7 +5570,7 @@
                 <a:ea typeface="Calibri" pitchFamily="34" charset="-122"/>
                 <a:cs typeface="Calibri" pitchFamily="34" charset="-120"/>
               </a:rPr>
-              <a:t>Test against the developer endpoint (/versions/2/mcp) before promotion</a:t>
+              <a:t>RAI policy — apply a Responsible AI policy at the toolbox level (policies.rai_config)</a:t>
             </a:r>
             <a:endParaRPr lang="en-US" sz="1200" dirty="0"/>
           </a:p>
@@ -5280,7 +5591,7 @@
                 <a:ea typeface="Calibri" pitchFamily="34" charset="-122"/>
                 <a:cs typeface="Calibri" pitchFamily="34" charset="-120"/>
               </a:rPr>
-              <a:t>Promote v2 to default when validated → agents pick it up on their next call, no code change</a:t>
+              <a:t>Central catalog — one place to see every managed tool in the project</a:t>
             </a:r>
             <a:endParaRPr lang="en-US" sz="1200" dirty="0"/>
           </a:p>
@@ -5294,8 +5605,8 @@
         </p:nvSpPr>
         <p:spPr>
           <a:xfrm>
-            <a:off x="365760" y="4069080"/>
-            <a:ext cx="8412480" cy="457200"/>
+            <a:off x="365760" y="3977640"/>
+            <a:ext cx="8412480" cy="502920"/>
           </a:xfrm>
           <a:prstGeom prst="rect">
             <a:avLst/>
@@ -5311,17 +5622,17 @@
               <a:buNone/>
             </a:pPr>
             <a:r>
-              <a:rPr lang="en-US" sz="1200" i="1" dirty="0">
-                <a:solidFill>
-                  <a:srgbClr val="6B7280"/>
-                </a:solidFill>
-                <a:latin typeface="Calibri" pitchFamily="34" charset="0"/>
-                <a:ea typeface="Calibri" pitchFamily="34" charset="-122"/>
-                <a:cs typeface="Calibri" pitchFamily="34" charset="-120"/>
-              </a:rPr>
-              <a:t>The promote step is the 'ship' moment. Same discipline as Prompt agent versioning from Day 1.</a:t>
-            </a:r>
-            <a:endParaRPr lang="en-US" sz="1200" dirty="0"/>
+              <a:rPr lang="en-US" sz="1300" b="1" i="1" dirty="0">
+                <a:solidFill>
+                  <a:srgbClr val="1E2761"/>
+                </a:solidFill>
+                <a:latin typeface="Calibri" pitchFamily="34" charset="0"/>
+                <a:ea typeface="Calibri" pitchFamily="34" charset="-122"/>
+                <a:cs typeface="Calibri" pitchFamily="34" charset="-120"/>
+              </a:rPr>
+              <a:t>The platform answer to: 'how do we stop developers from wiring random tools into production agents?'</a:t>
+            </a:r>
+            <a:endParaRPr lang="en-US" sz="1300" dirty="0"/>
           </a:p>
         </p:txBody>
       </p:sp>
@@ -5449,7 +5760,7 @@
                 <a:ea typeface="Calibri" pitchFamily="34" charset="-122"/>
                 <a:cs typeface="Calibri" pitchFamily="34" charset="-120"/>
               </a:rPr>
-              <a:t>When to build a function tool instead</a:t>
+              <a:t>Versioning workflow</a:t>
             </a:r>
             <a:endParaRPr lang="en-US" sz="2800" dirty="0"/>
           </a:p>
@@ -5464,296 +5775,6 @@
         <p:spPr>
           <a:xfrm>
             <a:off x="365760" y="1097280"/>
-            <a:ext cx="4069080" cy="365760"/>
-          </a:xfrm>
-          <a:prstGeom prst="rect">
-            <a:avLst/>
-          </a:prstGeom>
-          <a:noFill/>
-          <a:ln/>
-        </p:spPr>
-        <p:txBody>
-          <a:bodyPr wrap="square" lIns="0" tIns="0" rIns="0" bIns="0" rtlCol="0" anchor="ctr"/>
-          <a:lstStyle/>
-          <a:p>
-            <a:pPr indent="0" marL="0">
-              <a:buNone/>
-            </a:pPr>
-            <a:r>
-              <a:rPr lang="en-US" sz="2000" b="1" dirty="0">
-                <a:solidFill>
-                  <a:srgbClr val="1E2761"/>
-                </a:solidFill>
-                <a:latin typeface="Calibri" pitchFamily="34" charset="0"/>
-                <a:ea typeface="Calibri" pitchFamily="34" charset="-122"/>
-                <a:cs typeface="Calibri" pitchFamily="34" charset="-120"/>
-              </a:rPr>
-              <a:t>Custom function tool (Module 6)</a:t>
-            </a:r>
-            <a:endParaRPr lang="en-US" sz="2000" dirty="0"/>
-          </a:p>
-        </p:txBody>
-      </p:sp>
-      <p:sp>
-        <p:nvSpPr>
-          <p:cNvPr id="6" name="Text 4"/>
-          <p:cNvSpPr/>
-          <p:nvPr/>
-        </p:nvSpPr>
-        <p:spPr>
-          <a:xfrm>
-            <a:off x="4709160" y="1097280"/>
-            <a:ext cx="4069080" cy="365760"/>
-          </a:xfrm>
-          <a:prstGeom prst="rect">
-            <a:avLst/>
-          </a:prstGeom>
-          <a:noFill/>
-          <a:ln/>
-        </p:spPr>
-        <p:txBody>
-          <a:bodyPr wrap="square" lIns="0" tIns="0" rIns="0" bIns="0" rtlCol="0" anchor="ctr"/>
-          <a:lstStyle/>
-          <a:p>
-            <a:pPr indent="0" marL="0">
-              <a:buNone/>
-            </a:pPr>
-            <a:r>
-              <a:rPr lang="en-US" sz="2000" b="1" dirty="0">
-                <a:solidFill>
-                  <a:srgbClr val="1E2761"/>
-                </a:solidFill>
-                <a:latin typeface="Calibri" pitchFamily="34" charset="0"/>
-                <a:ea typeface="Calibri" pitchFamily="34" charset="-122"/>
-                <a:cs typeface="Calibri" pitchFamily="34" charset="-120"/>
-              </a:rPr>
-              <a:t>Foundry Toolbox</a:t>
-            </a:r>
-            <a:endParaRPr lang="en-US" sz="2000" dirty="0"/>
-          </a:p>
-        </p:txBody>
-      </p:sp>
-      <p:sp>
-        <p:nvSpPr>
-          <p:cNvPr id="7" name="Text 5"/>
-          <p:cNvSpPr/>
-          <p:nvPr/>
-        </p:nvSpPr>
-        <p:spPr>
-          <a:xfrm>
-            <a:off x="365760" y="1554480"/>
-            <a:ext cx="4069080" cy="3291840"/>
-          </a:xfrm>
-          <a:prstGeom prst="rect">
-            <a:avLst/>
-          </a:prstGeom>
-          <a:noFill/>
-          <a:ln/>
-        </p:spPr>
-        <p:txBody>
-          <a:bodyPr wrap="square" rtlCol="0" anchor="ctr"/>
-          <a:lstStyle/>
-          <a:p>
-            <a:pPr marL="342900" indent="-342900">
-              <a:spcAft>
-                <a:spcPts val="600"/>
-              </a:spcAft>
-              <a:buSzPct val="100000"/>
-              <a:buChar char="•"/>
-            </a:pPr>
-            <a:r>
-              <a:rPr lang="en-US" sz="1500" dirty="0">
-                <a:solidFill>
-                  <a:srgbClr val="212121"/>
-                </a:solidFill>
-                <a:latin typeface="Calibri" pitchFamily="34" charset="0"/>
-                <a:ea typeface="Calibri" pitchFamily="34" charset="-122"/>
-                <a:cs typeface="Calibri" pitchFamily="34" charset="-120"/>
-              </a:rPr>
-              <a:t>Logic doesn't fit any Toolbox catalog entry</a:t>
-            </a:r>
-            <a:endParaRPr lang="en-US" sz="1500" dirty="0"/>
-          </a:p>
-          <a:p>
-            <a:pPr marL="342900" indent="-342900">
-              <a:spcAft>
-                <a:spcPts val="600"/>
-              </a:spcAft>
-              <a:buSzPct val="100000"/>
-              <a:buChar char="•"/>
-            </a:pPr>
-            <a:r>
-              <a:rPr lang="en-US" sz="1500" dirty="0">
-                <a:solidFill>
-                  <a:srgbClr val="212121"/>
-                </a:solidFill>
-                <a:latin typeface="Calibri" pitchFamily="34" charset="0"/>
-                <a:ea typeface="Calibri" pitchFamily="34" charset="-122"/>
-                <a:cs typeface="Calibri" pitchFamily="34" charset="-120"/>
-              </a:rPr>
-              <a:t>Runtime context Toolbox model can't express (per-user filtering, session state)</a:t>
-            </a:r>
-            <a:endParaRPr lang="en-US" sz="1500" dirty="0"/>
-          </a:p>
-          <a:p>
-            <a:pPr marL="342900" indent="-342900">
-              <a:spcAft>
-                <a:spcPts val="600"/>
-              </a:spcAft>
-              <a:buSzPct val="100000"/>
-              <a:buChar char="•"/>
-            </a:pPr>
-            <a:r>
-              <a:rPr lang="en-US" sz="1500" dirty="0">
-                <a:solidFill>
-                  <a:srgbClr val="212121"/>
-                </a:solidFill>
-                <a:latin typeface="Calibri" pitchFamily="34" charset="0"/>
-                <a:ea typeface="Calibri" pitchFamily="34" charset="-122"/>
-                <a:cs typeface="Calibri" pitchFamily="34" charset="-120"/>
-              </a:rPr>
-              <a:t>Prototyping fast — don't want to publish a toolbox yet</a:t>
-            </a:r>
-            <a:endParaRPr lang="en-US" sz="1500" dirty="0"/>
-          </a:p>
-          <a:p>
-            <a:pPr marL="342900" indent="-342900">
-              <a:spcAft>
-                <a:spcPts val="600"/>
-              </a:spcAft>
-              <a:buSzPct val="100000"/>
-              <a:buChar char="•"/>
-            </a:pPr>
-            <a:r>
-              <a:rPr lang="en-US" sz="1500" dirty="0">
-                <a:solidFill>
-                  <a:srgbClr val="212121"/>
-                </a:solidFill>
-                <a:latin typeface="Calibri" pitchFamily="34" charset="0"/>
-                <a:ea typeface="Calibri" pitchFamily="34" charset="-122"/>
-                <a:cs typeface="Calibri" pitchFamily="34" charset="-120"/>
-              </a:rPr>
-              <a:t>Tool talks to something inside your app's process (in-memory cache, local model)</a:t>
-            </a:r>
-            <a:endParaRPr lang="en-US" sz="1500" dirty="0"/>
-          </a:p>
-        </p:txBody>
-      </p:sp>
-      <p:sp>
-        <p:nvSpPr>
-          <p:cNvPr id="8" name="Text 6"/>
-          <p:cNvSpPr/>
-          <p:nvPr/>
-        </p:nvSpPr>
-        <p:spPr>
-          <a:xfrm>
-            <a:off x="4709160" y="1554480"/>
-            <a:ext cx="4069080" cy="3291840"/>
-          </a:xfrm>
-          <a:prstGeom prst="rect">
-            <a:avLst/>
-          </a:prstGeom>
-          <a:noFill/>
-          <a:ln/>
-        </p:spPr>
-        <p:txBody>
-          <a:bodyPr wrap="square" rtlCol="0" anchor="ctr"/>
-          <a:lstStyle/>
-          <a:p>
-            <a:pPr marL="342900" indent="-342900">
-              <a:spcAft>
-                <a:spcPts val="600"/>
-              </a:spcAft>
-              <a:buSzPct val="100000"/>
-              <a:buChar char="•"/>
-            </a:pPr>
-            <a:r>
-              <a:rPr lang="en-US" sz="1500" dirty="0">
-                <a:solidFill>
-                  <a:srgbClr val="212121"/>
-                </a:solidFill>
-                <a:latin typeface="Calibri" pitchFamily="34" charset="0"/>
-                <a:ea typeface="Calibri" pitchFamily="34" charset="-122"/>
-                <a:cs typeface="Calibri" pitchFamily="34" charset="-120"/>
-              </a:rPr>
-              <a:t>Tool is a shared capability across agents</a:t>
-            </a:r>
-            <a:endParaRPr lang="en-US" sz="1500" dirty="0"/>
-          </a:p>
-          <a:p>
-            <a:pPr marL="342900" indent="-342900">
-              <a:spcAft>
-                <a:spcPts val="600"/>
-              </a:spcAft>
-              <a:buSzPct val="100000"/>
-              <a:buChar char="•"/>
-            </a:pPr>
-            <a:r>
-              <a:rPr lang="en-US" sz="1500" dirty="0">
-                <a:solidFill>
-                  <a:srgbClr val="212121"/>
-                </a:solidFill>
-                <a:latin typeface="Calibri" pitchFamily="34" charset="0"/>
-                <a:ea typeface="Calibri" pitchFamily="34" charset="-122"/>
-                <a:cs typeface="Calibri" pitchFamily="34" charset="-120"/>
-              </a:rPr>
-              <a:t>Want central governance, RBAC, and audit</a:t>
-            </a:r>
-            <a:endParaRPr lang="en-US" sz="1500" dirty="0"/>
-          </a:p>
-          <a:p>
-            <a:pPr marL="342900" indent="-342900">
-              <a:spcAft>
-                <a:spcPts val="600"/>
-              </a:spcAft>
-              <a:buSzPct val="100000"/>
-              <a:buChar char="•"/>
-            </a:pPr>
-            <a:r>
-              <a:rPr lang="en-US" sz="1500" dirty="0">
-                <a:solidFill>
-                  <a:srgbClr val="212121"/>
-                </a:solidFill>
-                <a:latin typeface="Calibri" pitchFamily="34" charset="0"/>
-                <a:ea typeface="Calibri" pitchFamily="34" charset="-122"/>
-                <a:cs typeface="Calibri" pitchFamily="34" charset="-120"/>
-              </a:rPr>
-              <a:t>Integrates with a supported enterprise system (SharePoint, Fabric, Bing, AI Search, MCP)</a:t>
-            </a:r>
-            <a:endParaRPr lang="en-US" sz="1500" dirty="0"/>
-          </a:p>
-          <a:p>
-            <a:pPr marL="342900" indent="-342900">
-              <a:spcAft>
-                <a:spcPts val="600"/>
-              </a:spcAft>
-              <a:buSzPct val="100000"/>
-              <a:buChar char="•"/>
-            </a:pPr>
-            <a:r>
-              <a:rPr lang="en-US" sz="1500" dirty="0">
-                <a:solidFill>
-                  <a:srgbClr val="212121"/>
-                </a:solidFill>
-                <a:latin typeface="Calibri" pitchFamily="34" charset="0"/>
-                <a:ea typeface="Calibri" pitchFamily="34" charset="-122"/>
-                <a:cs typeface="Calibri" pitchFamily="34" charset="-120"/>
-              </a:rPr>
-              <a:t>Want versioning as a first-class concern</a:t>
-            </a:r>
-            <a:endParaRPr lang="en-US" sz="1500" dirty="0"/>
-          </a:p>
-        </p:txBody>
-      </p:sp>
-      <p:sp>
-        <p:nvSpPr>
-          <p:cNvPr id="9" name="Text 7"/>
-          <p:cNvSpPr/>
-          <p:nvPr/>
-        </p:nvSpPr>
-        <p:spPr>
-          <a:xfrm>
-            <a:off x="365760" y="4434840"/>
             <a:ext cx="8412480" cy="365760"/>
           </a:xfrm>
           <a:prstGeom prst="rect">
@@ -5770,17 +5791,162 @@
               <a:buNone/>
             </a:pPr>
             <a:r>
-              <a:rPr lang="en-US" sz="1300" b="1" i="1" dirty="0">
-                <a:solidFill>
-                  <a:srgbClr val="1E2761"/>
-                </a:solidFill>
-                <a:latin typeface="Calibri" pitchFamily="34" charset="0"/>
-                <a:ea typeface="Calibri" pitchFamily="34" charset="-122"/>
-                <a:cs typeface="Calibri" pitchFamily="34" charset="-120"/>
-              </a:rPr>
-              <a:t>Mix both. Real agents often have tools=[my_function_tool, my_toolbox].</a:t>
-            </a:r>
-            <a:endParaRPr lang="en-US" sz="1300" dirty="0"/>
+              <a:rPr lang="en-US" sz="1400" dirty="0">
+                <a:solidFill>
+                  <a:srgbClr val="212121"/>
+                </a:solidFill>
+                <a:latin typeface="Calibri" pitchFamily="34" charset="0"/>
+                <a:ea typeface="Calibri" pitchFamily="34" charset="-122"/>
+                <a:cs typeface="Calibri" pitchFamily="34" charset="-120"/>
+              </a:rPr>
+              <a:t>Standard workflow you'll use:</a:t>
+            </a:r>
+            <a:endParaRPr lang="en-US" sz="1400" dirty="0"/>
+          </a:p>
+        </p:txBody>
+      </p:sp>
+      <p:sp>
+        <p:nvSpPr>
+          <p:cNvPr id="6" name="Text 4"/>
+          <p:cNvSpPr/>
+          <p:nvPr/>
+        </p:nvSpPr>
+        <p:spPr>
+          <a:xfrm>
+            <a:off x="365760" y="1417320"/>
+            <a:ext cx="8412480" cy="2377440"/>
+          </a:xfrm>
+          <a:prstGeom prst="rect">
+            <a:avLst/>
+          </a:prstGeom>
+          <a:noFill/>
+          <a:ln/>
+        </p:spPr>
+        <p:txBody>
+          <a:bodyPr wrap="square" rtlCol="0" anchor="ctr"/>
+          <a:lstStyle/>
+          <a:p>
+            <a:pPr marL="342900" indent="-342900">
+              <a:spcAft>
+                <a:spcPts val="600"/>
+              </a:spcAft>
+              <a:buSzPct val="100000"/>
+              <a:buChar char="•"/>
+            </a:pPr>
+            <a:r>
+              <a:rPr lang="en-US" sz="1200" dirty="0">
+                <a:solidFill>
+                  <a:srgbClr val="212121"/>
+                </a:solidFill>
+                <a:latin typeface="Calibri" pitchFamily="34" charset="0"/>
+                <a:ea typeface="Calibri" pitchFamily="34" charset="-122"/>
+                <a:cs typeface="Calibri" pitchFamily="34" charset="-120"/>
+              </a:rPr>
+              <a:t>Create v1 → automatically the default → agents consume via the consumer endpoint</a:t>
+            </a:r>
+            <a:endParaRPr lang="en-US" sz="1200" dirty="0"/>
+          </a:p>
+          <a:p>
+            <a:pPr marL="342900" indent="-342900">
+              <a:spcAft>
+                <a:spcPts val="600"/>
+              </a:spcAft>
+              <a:buSzPct val="100000"/>
+              <a:buChar char="•"/>
+            </a:pPr>
+            <a:r>
+              <a:rPr lang="en-US" sz="1200" dirty="0">
+                <a:solidFill>
+                  <a:srgbClr val="212121"/>
+                </a:solidFill>
+                <a:latin typeface="Calibri" pitchFamily="34" charset="0"/>
+                <a:ea typeface="Calibri" pitchFamily="34" charset="-122"/>
+                <a:cs typeface="Calibri" pitchFamily="34" charset="-120"/>
+              </a:rPr>
+              <a:t>Author v2 (add a tool, tighten a description, swap an MCP connection)</a:t>
+            </a:r>
+            <a:endParaRPr lang="en-US" sz="1200" dirty="0"/>
+          </a:p>
+          <a:p>
+            <a:pPr marL="342900" indent="-342900">
+              <a:spcAft>
+                <a:spcPts val="600"/>
+              </a:spcAft>
+              <a:buSzPct val="100000"/>
+              <a:buChar char="•"/>
+            </a:pPr>
+            <a:r>
+              <a:rPr lang="en-US" sz="1200" dirty="0">
+                <a:solidFill>
+                  <a:srgbClr val="212121"/>
+                </a:solidFill>
+                <a:latin typeface="Calibri" pitchFamily="34" charset="0"/>
+                <a:ea typeface="Calibri" pitchFamily="34" charset="-122"/>
+                <a:cs typeface="Calibri" pitchFamily="34" charset="-120"/>
+              </a:rPr>
+              <a:t>Test against the developer endpoint (/versions/2/mcp) before promotion</a:t>
+            </a:r>
+            <a:endParaRPr lang="en-US" sz="1200" dirty="0"/>
+          </a:p>
+          <a:p>
+            <a:pPr marL="342900" indent="-342900">
+              <a:spcAft>
+                <a:spcPts val="600"/>
+              </a:spcAft>
+              <a:buSzPct val="100000"/>
+              <a:buChar char="•"/>
+            </a:pPr>
+            <a:r>
+              <a:rPr lang="en-US" sz="1200" dirty="0">
+                <a:solidFill>
+                  <a:srgbClr val="212121"/>
+                </a:solidFill>
+                <a:latin typeface="Calibri" pitchFamily="34" charset="0"/>
+                <a:ea typeface="Calibri" pitchFamily="34" charset="-122"/>
+                <a:cs typeface="Calibri" pitchFamily="34" charset="-120"/>
+              </a:rPr>
+              <a:t>Promote v2 to default when validated → agents pick it up on their next call, no code change</a:t>
+            </a:r>
+            <a:endParaRPr lang="en-US" sz="1200" dirty="0"/>
+          </a:p>
+        </p:txBody>
+      </p:sp>
+      <p:sp>
+        <p:nvSpPr>
+          <p:cNvPr id="7" name="Text 5"/>
+          <p:cNvSpPr/>
+          <p:nvPr/>
+        </p:nvSpPr>
+        <p:spPr>
+          <a:xfrm>
+            <a:off x="365760" y="4069080"/>
+            <a:ext cx="8412480" cy="457200"/>
+          </a:xfrm>
+          <a:prstGeom prst="rect">
+            <a:avLst/>
+          </a:prstGeom>
+          <a:noFill/>
+          <a:ln/>
+        </p:spPr>
+        <p:txBody>
+          <a:bodyPr wrap="square" rtlCol="0" anchor="ctr"/>
+          <a:lstStyle/>
+          <a:p>
+            <a:pPr indent="0" marL="0">
+              <a:buNone/>
+            </a:pPr>
+            <a:r>
+              <a:rPr lang="en-US" sz="1200" i="1" dirty="0">
+                <a:solidFill>
+                  <a:srgbClr val="6B7280"/>
+                </a:solidFill>
+                <a:latin typeface="Calibri" pitchFamily="34" charset="0"/>
+                <a:ea typeface="Calibri" pitchFamily="34" charset="-122"/>
+                <a:cs typeface="Calibri" pitchFamily="34" charset="-120"/>
+              </a:rPr>
+              <a:t>The promote step is the 'ship' moment. Same discipline as Prompt agent versioning from Day 1.</a:t>
+            </a:r>
+            <a:endParaRPr lang="en-US" sz="1200" dirty="0"/>
           </a:p>
         </p:txBody>
       </p:sp>
@@ -5908,6 +6074,465 @@
                 <a:ea typeface="Calibri" pitchFamily="34" charset="-122"/>
                 <a:cs typeface="Calibri" pitchFamily="34" charset="-120"/>
               </a:rPr>
+              <a:t>When to build a function tool instead</a:t>
+            </a:r>
+            <a:endParaRPr lang="en-US" sz="2800" dirty="0"/>
+          </a:p>
+        </p:txBody>
+      </p:sp>
+      <p:sp>
+        <p:nvSpPr>
+          <p:cNvPr id="5" name="Text 3"/>
+          <p:cNvSpPr/>
+          <p:nvPr/>
+        </p:nvSpPr>
+        <p:spPr>
+          <a:xfrm>
+            <a:off x="365760" y="1097280"/>
+            <a:ext cx="4069080" cy="365760"/>
+          </a:xfrm>
+          <a:prstGeom prst="rect">
+            <a:avLst/>
+          </a:prstGeom>
+          <a:noFill/>
+          <a:ln/>
+        </p:spPr>
+        <p:txBody>
+          <a:bodyPr wrap="square" lIns="0" tIns="0" rIns="0" bIns="0" rtlCol="0" anchor="ctr"/>
+          <a:lstStyle/>
+          <a:p>
+            <a:pPr indent="0" marL="0">
+              <a:buNone/>
+            </a:pPr>
+            <a:r>
+              <a:rPr lang="en-US" sz="2000" b="1" dirty="0">
+                <a:solidFill>
+                  <a:srgbClr val="1E2761"/>
+                </a:solidFill>
+                <a:latin typeface="Calibri" pitchFamily="34" charset="0"/>
+                <a:ea typeface="Calibri" pitchFamily="34" charset="-122"/>
+                <a:cs typeface="Calibri" pitchFamily="34" charset="-120"/>
+              </a:rPr>
+              <a:t>Custom function tool (Module 6)</a:t>
+            </a:r>
+            <a:endParaRPr lang="en-US" sz="2000" dirty="0"/>
+          </a:p>
+        </p:txBody>
+      </p:sp>
+      <p:sp>
+        <p:nvSpPr>
+          <p:cNvPr id="6" name="Text 4"/>
+          <p:cNvSpPr/>
+          <p:nvPr/>
+        </p:nvSpPr>
+        <p:spPr>
+          <a:xfrm>
+            <a:off x="4709160" y="1097280"/>
+            <a:ext cx="4069080" cy="365760"/>
+          </a:xfrm>
+          <a:prstGeom prst="rect">
+            <a:avLst/>
+          </a:prstGeom>
+          <a:noFill/>
+          <a:ln/>
+        </p:spPr>
+        <p:txBody>
+          <a:bodyPr wrap="square" lIns="0" tIns="0" rIns="0" bIns="0" rtlCol="0" anchor="ctr"/>
+          <a:lstStyle/>
+          <a:p>
+            <a:pPr indent="0" marL="0">
+              <a:buNone/>
+            </a:pPr>
+            <a:r>
+              <a:rPr lang="en-US" sz="2000" b="1" dirty="0">
+                <a:solidFill>
+                  <a:srgbClr val="1E2761"/>
+                </a:solidFill>
+                <a:latin typeface="Calibri" pitchFamily="34" charset="0"/>
+                <a:ea typeface="Calibri" pitchFamily="34" charset="-122"/>
+                <a:cs typeface="Calibri" pitchFamily="34" charset="-120"/>
+              </a:rPr>
+              <a:t>Foundry Toolbox</a:t>
+            </a:r>
+            <a:endParaRPr lang="en-US" sz="2000" dirty="0"/>
+          </a:p>
+        </p:txBody>
+      </p:sp>
+      <p:sp>
+        <p:nvSpPr>
+          <p:cNvPr id="7" name="Text 5"/>
+          <p:cNvSpPr/>
+          <p:nvPr/>
+        </p:nvSpPr>
+        <p:spPr>
+          <a:xfrm>
+            <a:off x="365760" y="1554480"/>
+            <a:ext cx="4069080" cy="3291840"/>
+          </a:xfrm>
+          <a:prstGeom prst="rect">
+            <a:avLst/>
+          </a:prstGeom>
+          <a:noFill/>
+          <a:ln/>
+        </p:spPr>
+        <p:txBody>
+          <a:bodyPr wrap="square" rtlCol="0" anchor="ctr"/>
+          <a:lstStyle/>
+          <a:p>
+            <a:pPr marL="342900" indent="-342900">
+              <a:spcAft>
+                <a:spcPts val="600"/>
+              </a:spcAft>
+              <a:buSzPct val="100000"/>
+              <a:buChar char="•"/>
+            </a:pPr>
+            <a:r>
+              <a:rPr lang="en-US" sz="1500" dirty="0">
+                <a:solidFill>
+                  <a:srgbClr val="212121"/>
+                </a:solidFill>
+                <a:latin typeface="Calibri" pitchFamily="34" charset="0"/>
+                <a:ea typeface="Calibri" pitchFamily="34" charset="-122"/>
+                <a:cs typeface="Calibri" pitchFamily="34" charset="-120"/>
+              </a:rPr>
+              <a:t>Logic doesn't fit any Toolbox catalog entry</a:t>
+            </a:r>
+            <a:endParaRPr lang="en-US" sz="1500" dirty="0"/>
+          </a:p>
+          <a:p>
+            <a:pPr marL="342900" indent="-342900">
+              <a:spcAft>
+                <a:spcPts val="600"/>
+              </a:spcAft>
+              <a:buSzPct val="100000"/>
+              <a:buChar char="•"/>
+            </a:pPr>
+            <a:r>
+              <a:rPr lang="en-US" sz="1500" dirty="0">
+                <a:solidFill>
+                  <a:srgbClr val="212121"/>
+                </a:solidFill>
+                <a:latin typeface="Calibri" pitchFamily="34" charset="0"/>
+                <a:ea typeface="Calibri" pitchFamily="34" charset="-122"/>
+                <a:cs typeface="Calibri" pitchFamily="34" charset="-120"/>
+              </a:rPr>
+              <a:t>Runtime context Toolbox model can't express (per-user filtering, session state)</a:t>
+            </a:r>
+            <a:endParaRPr lang="en-US" sz="1500" dirty="0"/>
+          </a:p>
+          <a:p>
+            <a:pPr marL="342900" indent="-342900">
+              <a:spcAft>
+                <a:spcPts val="600"/>
+              </a:spcAft>
+              <a:buSzPct val="100000"/>
+              <a:buChar char="•"/>
+            </a:pPr>
+            <a:r>
+              <a:rPr lang="en-US" sz="1500" dirty="0">
+                <a:solidFill>
+                  <a:srgbClr val="212121"/>
+                </a:solidFill>
+                <a:latin typeface="Calibri" pitchFamily="34" charset="0"/>
+                <a:ea typeface="Calibri" pitchFamily="34" charset="-122"/>
+                <a:cs typeface="Calibri" pitchFamily="34" charset="-120"/>
+              </a:rPr>
+              <a:t>Prototyping fast — don't want to publish a toolbox yet</a:t>
+            </a:r>
+            <a:endParaRPr lang="en-US" sz="1500" dirty="0"/>
+          </a:p>
+          <a:p>
+            <a:pPr marL="342900" indent="-342900">
+              <a:spcAft>
+                <a:spcPts val="600"/>
+              </a:spcAft>
+              <a:buSzPct val="100000"/>
+              <a:buChar char="•"/>
+            </a:pPr>
+            <a:r>
+              <a:rPr lang="en-US" sz="1500" dirty="0">
+                <a:solidFill>
+                  <a:srgbClr val="212121"/>
+                </a:solidFill>
+                <a:latin typeface="Calibri" pitchFamily="34" charset="0"/>
+                <a:ea typeface="Calibri" pitchFamily="34" charset="-122"/>
+                <a:cs typeface="Calibri" pitchFamily="34" charset="-120"/>
+              </a:rPr>
+              <a:t>Tool talks to something inside your app's process (in-memory cache, local model)</a:t>
+            </a:r>
+            <a:endParaRPr lang="en-US" sz="1500" dirty="0"/>
+          </a:p>
+        </p:txBody>
+      </p:sp>
+      <p:sp>
+        <p:nvSpPr>
+          <p:cNvPr id="8" name="Text 6"/>
+          <p:cNvSpPr/>
+          <p:nvPr/>
+        </p:nvSpPr>
+        <p:spPr>
+          <a:xfrm>
+            <a:off x="4709160" y="1554480"/>
+            <a:ext cx="4069080" cy="3291840"/>
+          </a:xfrm>
+          <a:prstGeom prst="rect">
+            <a:avLst/>
+          </a:prstGeom>
+          <a:noFill/>
+          <a:ln/>
+        </p:spPr>
+        <p:txBody>
+          <a:bodyPr wrap="square" rtlCol="0" anchor="ctr"/>
+          <a:lstStyle/>
+          <a:p>
+            <a:pPr marL="342900" indent="-342900">
+              <a:spcAft>
+                <a:spcPts val="600"/>
+              </a:spcAft>
+              <a:buSzPct val="100000"/>
+              <a:buChar char="•"/>
+            </a:pPr>
+            <a:r>
+              <a:rPr lang="en-US" sz="1500" dirty="0">
+                <a:solidFill>
+                  <a:srgbClr val="212121"/>
+                </a:solidFill>
+                <a:latin typeface="Calibri" pitchFamily="34" charset="0"/>
+                <a:ea typeface="Calibri" pitchFamily="34" charset="-122"/>
+                <a:cs typeface="Calibri" pitchFamily="34" charset="-120"/>
+              </a:rPr>
+              <a:t>Tool is a shared capability across agents</a:t>
+            </a:r>
+            <a:endParaRPr lang="en-US" sz="1500" dirty="0"/>
+          </a:p>
+          <a:p>
+            <a:pPr marL="342900" indent="-342900">
+              <a:spcAft>
+                <a:spcPts val="600"/>
+              </a:spcAft>
+              <a:buSzPct val="100000"/>
+              <a:buChar char="•"/>
+            </a:pPr>
+            <a:r>
+              <a:rPr lang="en-US" sz="1500" dirty="0">
+                <a:solidFill>
+                  <a:srgbClr val="212121"/>
+                </a:solidFill>
+                <a:latin typeface="Calibri" pitchFamily="34" charset="0"/>
+                <a:ea typeface="Calibri" pitchFamily="34" charset="-122"/>
+                <a:cs typeface="Calibri" pitchFamily="34" charset="-120"/>
+              </a:rPr>
+              <a:t>Want central governance, RBAC, and audit</a:t>
+            </a:r>
+            <a:endParaRPr lang="en-US" sz="1500" dirty="0"/>
+          </a:p>
+          <a:p>
+            <a:pPr marL="342900" indent="-342900">
+              <a:spcAft>
+                <a:spcPts val="600"/>
+              </a:spcAft>
+              <a:buSzPct val="100000"/>
+              <a:buChar char="•"/>
+            </a:pPr>
+            <a:r>
+              <a:rPr lang="en-US" sz="1500" dirty="0">
+                <a:solidFill>
+                  <a:srgbClr val="212121"/>
+                </a:solidFill>
+                <a:latin typeface="Calibri" pitchFamily="34" charset="0"/>
+                <a:ea typeface="Calibri" pitchFamily="34" charset="-122"/>
+                <a:cs typeface="Calibri" pitchFamily="34" charset="-120"/>
+              </a:rPr>
+              <a:t>Integrates with a supported enterprise system (SharePoint, Fabric, Bing, AI Search, MCP)</a:t>
+            </a:r>
+            <a:endParaRPr lang="en-US" sz="1500" dirty="0"/>
+          </a:p>
+          <a:p>
+            <a:pPr marL="342900" indent="-342900">
+              <a:spcAft>
+                <a:spcPts val="600"/>
+              </a:spcAft>
+              <a:buSzPct val="100000"/>
+              <a:buChar char="•"/>
+            </a:pPr>
+            <a:r>
+              <a:rPr lang="en-US" sz="1500" dirty="0">
+                <a:solidFill>
+                  <a:srgbClr val="212121"/>
+                </a:solidFill>
+                <a:latin typeface="Calibri" pitchFamily="34" charset="0"/>
+                <a:ea typeface="Calibri" pitchFamily="34" charset="-122"/>
+                <a:cs typeface="Calibri" pitchFamily="34" charset="-120"/>
+              </a:rPr>
+              <a:t>Want versioning as a first-class concern</a:t>
+            </a:r>
+            <a:endParaRPr lang="en-US" sz="1500" dirty="0"/>
+          </a:p>
+        </p:txBody>
+      </p:sp>
+      <p:sp>
+        <p:nvSpPr>
+          <p:cNvPr id="9" name="Text 7"/>
+          <p:cNvSpPr/>
+          <p:nvPr/>
+        </p:nvSpPr>
+        <p:spPr>
+          <a:xfrm>
+            <a:off x="365760" y="4434840"/>
+            <a:ext cx="8412480" cy="365760"/>
+          </a:xfrm>
+          <a:prstGeom prst="rect">
+            <a:avLst/>
+          </a:prstGeom>
+          <a:noFill/>
+          <a:ln/>
+        </p:spPr>
+        <p:txBody>
+          <a:bodyPr wrap="square" rtlCol="0" anchor="ctr"/>
+          <a:lstStyle/>
+          <a:p>
+            <a:pPr indent="0" marL="0">
+              <a:buNone/>
+            </a:pPr>
+            <a:r>
+              <a:rPr lang="en-US" sz="1300" b="1" i="1" dirty="0">
+                <a:solidFill>
+                  <a:srgbClr val="1E2761"/>
+                </a:solidFill>
+                <a:latin typeface="Calibri" pitchFamily="34" charset="0"/>
+                <a:ea typeface="Calibri" pitchFamily="34" charset="-122"/>
+                <a:cs typeface="Calibri" pitchFamily="34" charset="-120"/>
+              </a:rPr>
+              <a:t>Mix both. Real agents often have tools=[my_function_tool, my_toolbox].</a:t>
+            </a:r>
+            <a:endParaRPr lang="en-US" sz="1300" dirty="0"/>
+          </a:p>
+        </p:txBody>
+      </p:sp>
+    </p:spTree>
+  </p:cSld>
+  <p:clrMapOvr>
+    <a:masterClrMapping/>
+  </p:clrMapOvr>
+</p:sld>
+</file>
+
+<file path=ppt/slides/slide18.xml><?xml version="1.0" encoding="utf-8"?>
+<p:sld xmlns:a="http://schemas.openxmlformats.org/drawingml/2006/main" xmlns:r="http://schemas.openxmlformats.org/officeDocument/2006/relationships" xmlns:p="http://schemas.openxmlformats.org/presentationml/2006/main">
+  <p:cSld name="Slide 18">
+    <p:bg>
+      <p:bgPr>
+        <a:solidFill>
+          <a:srgbClr val="FFFFFF"/>
+        </a:solidFill>
+      </p:bgPr>
+    </p:bg>
+    <p:spTree>
+      <p:nvGrpSpPr>
+        <p:cNvPr id="1" name=""/>
+        <p:cNvGrpSpPr/>
+        <p:nvPr/>
+      </p:nvGrpSpPr>
+      <p:grpSpPr>
+        <a:xfrm>
+          <a:off x="0" y="0"/>
+          <a:ext cx="0" cy="0"/>
+          <a:chOff x="0" y="0"/>
+          <a:chExt cx="0" cy="0"/>
+        </a:xfrm>
+      </p:grpSpPr>
+      <p:sp>
+        <p:nvSpPr>
+          <p:cNvPr id="2" name="Shape 0"/>
+          <p:cNvSpPr/>
+          <p:nvPr/>
+        </p:nvSpPr>
+        <p:spPr>
+          <a:xfrm>
+            <a:off x="0" y="0"/>
+            <a:ext cx="54864" cy="5143500"/>
+          </a:xfrm>
+          <a:prstGeom prst="rect">
+            <a:avLst/>
+          </a:prstGeom>
+          <a:solidFill>
+            <a:srgbClr val="1E2761"/>
+          </a:solidFill>
+          <a:ln/>
+        </p:spPr>
+      </p:sp>
+      <p:sp>
+        <p:nvSpPr>
+          <p:cNvPr id="3" name="Text 1"/>
+          <p:cNvSpPr/>
+          <p:nvPr/>
+        </p:nvSpPr>
+        <p:spPr>
+          <a:xfrm>
+            <a:off x="5669280" y="274320"/>
+            <a:ext cx="3291840" cy="274320"/>
+          </a:xfrm>
+          <a:prstGeom prst="rect">
+            <a:avLst/>
+          </a:prstGeom>
+          <a:noFill/>
+          <a:ln/>
+        </p:spPr>
+        <p:txBody>
+          <a:bodyPr wrap="square" lIns="0" tIns="0" rIns="0" bIns="0" rtlCol="0" anchor="ctr"/>
+          <a:lstStyle/>
+          <a:p>
+            <a:pPr algn="r" indent="0" marL="0">
+              <a:buNone/>
+            </a:pPr>
+            <a:r>
+              <a:rPr lang="en-US" sz="1000" dirty="0">
+                <a:solidFill>
+                  <a:srgbClr val="6B7280"/>
+                </a:solidFill>
+                <a:latin typeface="Calibri" pitchFamily="34" charset="0"/>
+                <a:ea typeface="Calibri" pitchFamily="34" charset="-122"/>
+                <a:cs typeface="Calibri" pitchFamily="34" charset="-120"/>
+              </a:rPr>
+              <a:t>Day 2 · Module 5</a:t>
+            </a:r>
+            <a:endParaRPr lang="en-US" sz="1000" dirty="0"/>
+          </a:p>
+        </p:txBody>
+      </p:sp>
+      <p:sp>
+        <p:nvSpPr>
+          <p:cNvPr id="4" name="Text 2"/>
+          <p:cNvSpPr/>
+          <p:nvPr/>
+        </p:nvSpPr>
+        <p:spPr>
+          <a:xfrm>
+            <a:off x="365760" y="320040"/>
+            <a:ext cx="6217920" cy="640080"/>
+          </a:xfrm>
+          <a:prstGeom prst="rect">
+            <a:avLst/>
+          </a:prstGeom>
+          <a:noFill/>
+          <a:ln/>
+        </p:spPr>
+        <p:txBody>
+          <a:bodyPr wrap="square" lIns="0" tIns="0" rIns="0" bIns="0" rtlCol="0" anchor="ctr"/>
+          <a:lstStyle/>
+          <a:p>
+            <a:pPr indent="0" marL="0">
+              <a:buNone/>
+            </a:pPr>
+            <a:r>
+              <a:rPr lang="en-US" sz="2800" b="1" dirty="0">
+                <a:solidFill>
+                  <a:srgbClr val="1E2761"/>
+                </a:solidFill>
+                <a:latin typeface="Calibri" pitchFamily="34" charset="0"/>
+                <a:ea typeface="Calibri" pitchFamily="34" charset="-122"/>
+                <a:cs typeface="Calibri" pitchFamily="34" charset="-120"/>
+              </a:rPr>
               <a:t>Common traps</a:t>
             </a:r>
             <a:endParaRPr lang="en-US" sz="2800" dirty="0"/>
@@ -6070,9 +6695,9 @@
 </p:sld>
 </file>
 
-<file path=ppt/slides/slide18.xml><?xml version="1.0" encoding="utf-8"?>
+<file path=ppt/slides/slide19.xml><?xml version="1.0" encoding="utf-8"?>
 <p:sld xmlns:a="http://schemas.openxmlformats.org/drawingml/2006/main" xmlns:r="http://schemas.openxmlformats.org/officeDocument/2006/relationships" xmlns:p="http://schemas.openxmlformats.org/presentationml/2006/main">
-  <p:cSld name="Slide 18">
+  <p:cSld name="Slide 19">
     <p:bg>
       <p:bgPr>
         <a:solidFill>
@@ -9841,7 +10466,7 @@
     <p:bg>
       <p:bgPr>
         <a:solidFill>
-          <a:srgbClr val="FFFFFF"/>
+          <a:srgbClr val="CADCFC"/>
         </a:solidFill>
       </p:bgPr>
     </p:bg>
@@ -9868,7 +10493,7 @@
         <p:spPr>
           <a:xfrm>
             <a:off x="0" y="0"/>
-            <a:ext cx="54864" cy="5143500"/>
+            <a:ext cx="146304" cy="5143500"/>
           </a:xfrm>
           <a:prstGeom prst="rect">
             <a:avLst/>
@@ -9912,7 +10537,7 @@
                 <a:ea typeface="Calibri" pitchFamily="34" charset="-122"/>
                 <a:cs typeface="Calibri" pitchFamily="34" charset="-120"/>
               </a:rPr>
-              <a:t>Day 2 · Module 5</a:t>
+              <a:t>Day 2 · Module 5 · Demo</a:t>
             </a:r>
             <a:endParaRPr lang="en-US" sz="1000" dirty="0"/>
           </a:p>
@@ -9926,8 +10551,8 @@
         </p:nvSpPr>
         <p:spPr>
           <a:xfrm>
-            <a:off x="365760" y="320040"/>
-            <a:ext cx="6217920" cy="640080"/>
+            <a:off x="548640" y="1051560"/>
+            <a:ext cx="5486400" cy="502920"/>
           </a:xfrm>
           <a:prstGeom prst="rect">
             <a:avLst/>
@@ -9943,7 +10568,7 @@
               <a:buNone/>
             </a:pPr>
             <a:r>
-              <a:rPr lang="en-US" sz="2800" b="1" dirty="0">
+              <a:rPr lang="en-US" sz="3200" b="1" spc="800" kern="0" dirty="0">
                 <a:solidFill>
                   <a:srgbClr val="1E2761"/>
                 </a:solidFill>
@@ -9951,9 +10576,9 @@
                 <a:ea typeface="Calibri" pitchFamily="34" charset="-122"/>
                 <a:cs typeface="Calibri" pitchFamily="34" charset="-120"/>
               </a:rPr>
-              <a:t>Toolbox anatomy</a:t>
-            </a:r>
-            <a:endParaRPr lang="en-US" sz="2800" dirty="0"/>
+              <a:t>DEMO</a:t>
+            </a:r>
+            <a:endParaRPr lang="en-US" sz="3200" dirty="0"/>
           </a:p>
         </p:txBody>
       </p:sp>
@@ -9965,8 +10590,8 @@
         </p:nvSpPr>
         <p:spPr>
           <a:xfrm>
-            <a:off x="365760" y="1097280"/>
-            <a:ext cx="8412480" cy="365760"/>
+            <a:off x="548640" y="1691640"/>
+            <a:ext cx="8046720" cy="914400"/>
           </a:xfrm>
           <a:prstGeom prst="rect">
             <a:avLst/>
@@ -9975,24 +10600,24 @@
           <a:ln/>
         </p:spPr>
         <p:txBody>
-          <a:bodyPr wrap="square" rtlCol="0" anchor="ctr"/>
+          <a:bodyPr wrap="square" lIns="0" tIns="0" rIns="0" bIns="0" rtlCol="0" anchor="ctr"/>
           <a:lstStyle/>
           <a:p>
             <a:pPr indent="0" marL="0">
               <a:buNone/>
             </a:pPr>
             <a:r>
-              <a:rPr lang="en-US" sz="1400" dirty="0">
-                <a:solidFill>
-                  <a:srgbClr val="212121"/>
-                </a:solidFill>
-                <a:latin typeface="Calibri" pitchFamily="34" charset="0"/>
-                <a:ea typeface="Calibri" pitchFamily="34" charset="-122"/>
-                <a:cs typeface="Calibri" pitchFamily="34" charset="-120"/>
-              </a:rPr>
-              <a:t>A toolbox is a project resource with:</a:t>
-            </a:r>
-            <a:endParaRPr lang="en-US" sz="1400" dirty="0"/>
+              <a:rPr lang="en-US" sz="3000" b="1" dirty="0">
+                <a:solidFill>
+                  <a:srgbClr val="1E2761"/>
+                </a:solidFill>
+                <a:latin typeface="Calibri" pitchFamily="34" charset="0"/>
+                <a:ea typeface="Calibri" pitchFamily="34" charset="-122"/>
+                <a:cs typeface="Calibri" pitchFamily="34" charset="-120"/>
+              </a:rPr>
+              <a:t>Consume a hosted toolbox from your agent</a:t>
+            </a:r>
+            <a:endParaRPr lang="en-US" sz="3000" dirty="0"/>
           </a:p>
         </p:txBody>
       </p:sp>
@@ -10004,8 +10629,8 @@
         </p:nvSpPr>
         <p:spPr>
           <a:xfrm>
-            <a:off x="365760" y="1554480"/>
-            <a:ext cx="8412480" cy="2926080"/>
+            <a:off x="6583680" y="1051560"/>
+            <a:ext cx="2194560" cy="502920"/>
           </a:xfrm>
           <a:prstGeom prst="rect">
             <a:avLst/>
@@ -10014,154 +10639,24 @@
           <a:ln/>
         </p:spPr>
         <p:txBody>
-          <a:bodyPr wrap="square" rtlCol="0" anchor="ctr"/>
-          <a:lstStyle/>
-          <a:p>
-            <a:pPr marL="342900" indent="-342900">
-              <a:spcAft>
-                <a:spcPts val="600"/>
-              </a:spcAft>
-              <a:buSzPct val="100000"/>
-              <a:buChar char="•"/>
-            </a:pPr>
-            <a:r>
-              <a:rPr lang="en-US" sz="1200" dirty="0">
-                <a:solidFill>
-                  <a:srgbClr val="212121"/>
-                </a:solidFill>
-                <a:latin typeface="Calibri" pitchFamily="34" charset="0"/>
-                <a:ea typeface="Calibri" pitchFamily="34" charset="-122"/>
-                <a:cs typeface="Calibri" pitchFamily="34" charset="-120"/>
-              </a:rPr>
-              <a:t>Name — identifier</a:t>
-            </a:r>
-            <a:endParaRPr lang="en-US" sz="1200" dirty="0"/>
-          </a:p>
-          <a:p>
-            <a:pPr marL="342900" indent="-342900">
-              <a:spcAft>
-                <a:spcPts val="600"/>
-              </a:spcAft>
-              <a:buSzPct val="100000"/>
-              <a:buChar char="•"/>
-            </a:pPr>
-            <a:r>
-              <a:rPr lang="en-US" sz="1200" dirty="0">
-                <a:solidFill>
-                  <a:srgbClr val="212121"/>
-                </a:solidFill>
-                <a:latin typeface="Calibri" pitchFamily="34" charset="0"/>
-                <a:ea typeface="Calibri" pitchFamily="34" charset="-122"/>
-                <a:cs typeface="Calibri" pitchFamily="34" charset="-120"/>
-              </a:rPr>
-              <a:t>Description — human-readable</a:t>
-            </a:r>
-            <a:endParaRPr lang="en-US" sz="1200" dirty="0"/>
-          </a:p>
-          <a:p>
-            <a:pPr marL="342900" indent="-342900">
-              <a:spcAft>
-                <a:spcPts val="600"/>
-              </a:spcAft>
-              <a:buSzPct val="100000"/>
-              <a:buChar char="•"/>
-            </a:pPr>
-            <a:r>
-              <a:rPr lang="en-US" sz="1200" dirty="0">
-                <a:solidFill>
-                  <a:srgbClr val="212121"/>
-                </a:solidFill>
-                <a:latin typeface="Calibri" pitchFamily="34" charset="0"/>
-                <a:ea typeface="Calibri" pitchFamily="34" charset="-122"/>
-                <a:cs typeface="Calibri" pitchFamily="34" charset="-120"/>
-              </a:rPr>
-              <a:t>Tools — a list of tool entries (each with its own config)</a:t>
-            </a:r>
-            <a:endParaRPr lang="en-US" sz="1200" dirty="0"/>
-          </a:p>
-          <a:p>
-            <a:pPr marL="342900" indent="-342900">
-              <a:spcAft>
-                <a:spcPts val="600"/>
-              </a:spcAft>
-              <a:buSzPct val="100000"/>
-              <a:buChar char="•"/>
-            </a:pPr>
-            <a:r>
-              <a:rPr lang="en-US" sz="1200" dirty="0">
-                <a:solidFill>
-                  <a:srgbClr val="212121"/>
-                </a:solidFill>
-                <a:latin typeface="Calibri" pitchFamily="34" charset="0"/>
-                <a:ea typeface="Calibri" pitchFamily="34" charset="-122"/>
-                <a:cs typeface="Calibri" pitchFamily="34" charset="-120"/>
-              </a:rPr>
-              <a:t>Connections — project connections the toolbox references (AI Search, MCP server, Bing…)</a:t>
-            </a:r>
-            <a:endParaRPr lang="en-US" sz="1200" dirty="0"/>
-          </a:p>
-          <a:p>
-            <a:pPr marL="342900" indent="-342900">
-              <a:spcAft>
-                <a:spcPts val="600"/>
-              </a:spcAft>
-              <a:buSzPct val="100000"/>
-              <a:buChar char="•"/>
-            </a:pPr>
-            <a:r>
-              <a:rPr lang="en-US" sz="1200" dirty="0">
-                <a:solidFill>
-                  <a:srgbClr val="212121"/>
-                </a:solidFill>
-                <a:latin typeface="Calibri" pitchFamily="34" charset="0"/>
-                <a:ea typeface="Calibri" pitchFamily="34" charset="-122"/>
-                <a:cs typeface="Calibri" pitchFamily="34" charset="-120"/>
-              </a:rPr>
-              <a:t>Skills — Foundry skills packaged as MCP resources</a:t>
-            </a:r>
-            <a:endParaRPr lang="en-US" sz="1200" dirty="0"/>
-          </a:p>
-          <a:p>
-            <a:pPr marL="342900" indent="-342900">
-              <a:spcAft>
-                <a:spcPts val="600"/>
-              </a:spcAft>
-              <a:buSzPct val="100000"/>
-              <a:buChar char="•"/>
-            </a:pPr>
-            <a:r>
-              <a:rPr lang="en-US" sz="1200" dirty="0">
-                <a:solidFill>
-                  <a:srgbClr val="212121"/>
-                </a:solidFill>
-                <a:latin typeface="Calibri" pitchFamily="34" charset="0"/>
-                <a:ea typeface="Calibri" pitchFamily="34" charset="-122"/>
-                <a:cs typeface="Calibri" pitchFamily="34" charset="-120"/>
-              </a:rPr>
-              <a:t>Policies — optional RAI policy applied at the toolbox level</a:t>
-            </a:r>
-            <a:endParaRPr lang="en-US" sz="1200" dirty="0"/>
-          </a:p>
-          <a:p>
-            <a:pPr marL="342900" indent="-342900">
-              <a:spcAft>
-                <a:spcPts val="600"/>
-              </a:spcAft>
-              <a:buSzPct val="100000"/>
-              <a:buChar char="•"/>
-            </a:pPr>
-            <a:r>
-              <a:rPr lang="en-US" sz="1200" dirty="0">
-                <a:solidFill>
-                  <a:srgbClr val="212121"/>
-                </a:solidFill>
-                <a:latin typeface="Calibri" pitchFamily="34" charset="0"/>
-                <a:ea typeface="Calibri" pitchFamily="34" charset="-122"/>
-                <a:cs typeface="Calibri" pitchFamily="34" charset="-120"/>
-              </a:rPr>
-              <a:t>Versions — the whole thing is versioned; one version is the default</a:t>
-            </a:r>
-            <a:endParaRPr lang="en-US" sz="1200" dirty="0"/>
+          <a:bodyPr wrap="square" lIns="0" tIns="0" rIns="0" bIns="0" rtlCol="0" anchor="ctr"/>
+          <a:lstStyle/>
+          <a:p>
+            <a:pPr algn="r" indent="0" marL="0">
+              <a:buNone/>
+            </a:pPr>
+            <a:r>
+              <a:rPr lang="en-US" sz="1800" i="1" dirty="0">
+                <a:solidFill>
+                  <a:srgbClr val="6B7280"/>
+                </a:solidFill>
+                <a:latin typeface="Calibri" pitchFamily="34" charset="0"/>
+                <a:ea typeface="Calibri" pitchFamily="34" charset="-122"/>
+                <a:cs typeface="Calibri" pitchFamily="34" charset="-120"/>
+              </a:rPr>
+              <a:t>~5 min</a:t>
+            </a:r>
+            <a:endParaRPr lang="en-US" sz="1800" dirty="0"/>
           </a:p>
         </p:txBody>
       </p:sp>
@@ -10173,8 +10668,8 @@
         </p:nvSpPr>
         <p:spPr>
           <a:xfrm>
-            <a:off x="365760" y="4434840"/>
-            <a:ext cx="8412480" cy="365760"/>
+            <a:off x="548640" y="2788920"/>
+            <a:ext cx="8046720" cy="1371600"/>
           </a:xfrm>
           <a:prstGeom prst="rect">
             <a:avLst/>
@@ -10183,14 +10678,56 @@
           <a:ln/>
         </p:spPr>
         <p:txBody>
-          <a:bodyPr wrap="square" rtlCol="0" anchor="ctr"/>
+          <a:bodyPr wrap="square" lIns="0" tIns="0" rIns="0" bIns="0" rtlCol="0" anchor="ctr"/>
+          <a:lstStyle/>
+          <a:p>
+            <a:pPr indent="0" marL="0">
+              <a:spcAft>
+                <a:spcPts val="600"/>
+              </a:spcAft>
+              <a:buNone/>
+            </a:pPr>
+            <a:r>
+              <a:rPr lang="en-US" sz="1600" dirty="0">
+                <a:solidFill>
+                  <a:srgbClr val="212121"/>
+                </a:solidFill>
+                <a:latin typeface="Calibri" pitchFamily="34" charset="0"/>
+                <a:ea typeface="Calibri" pitchFamily="34" charset="-122"/>
+                <a:cs typeface="Calibri" pitchFamily="34" charset="-120"/>
+              </a:rPr>
+              <a:t>Client-side MAF agent hitting a pre-published Foundry toolbox over MCP. Show the toolbox exists (portal or CLI), walk the ~15-line consumer pattern — DefaultAzureCredential + get_bearer_token_provider fed into MCPStreamableHTTPTool(header_provider=…), then tools=[toolbox_tool] on the agent. Run once with a question that exercises a tool. Point at the trace: MAF calls the tool exactly like a local function tool.</a:t>
+            </a:r>
+            <a:endParaRPr lang="en-US" sz="1600" dirty="0"/>
+          </a:p>
+        </p:txBody>
+      </p:sp>
+      <p:sp>
+        <p:nvSpPr>
+          <p:cNvPr id="8" name="Text 6"/>
+          <p:cNvSpPr/>
+          <p:nvPr/>
+        </p:nvSpPr>
+        <p:spPr>
+          <a:xfrm>
+            <a:off x="548640" y="4434840"/>
+            <a:ext cx="8046720" cy="320040"/>
+          </a:xfrm>
+          <a:prstGeom prst="rect">
+            <a:avLst/>
+          </a:prstGeom>
+          <a:noFill/>
+          <a:ln/>
+        </p:spPr>
+        <p:txBody>
+          <a:bodyPr wrap="square" lIns="0" tIns="0" rIns="0" bIns="0" rtlCol="0" anchor="ctr"/>
           <a:lstStyle/>
           <a:p>
             <a:pPr indent="0" marL="0">
               <a:buNone/>
             </a:pPr>
             <a:r>
-              <a:rPr lang="en-US" sz="1200" i="1" dirty="0">
+              <a:rPr lang="en-US" sz="1100" i="1" dirty="0">
                 <a:solidFill>
                   <a:srgbClr val="6B7280"/>
                 </a:solidFill>
@@ -10198,9 +10735,9 @@
                 <a:ea typeface="Calibri" pitchFamily="34" charset="-122"/>
                 <a:cs typeface="Calibri" pitchFamily="34" charset="-120"/>
               </a:rPr>
-              <a:t>Same 'publish version, consumers pin' pattern as Prompt agents from Day 1.</a:t>
-            </a:r>
-            <a:endParaRPr lang="en-US" sz="1200" dirty="0"/>
+              <a:t>Runbook: demos/day2/module-5-demo-1-attach-toolbox.md · Sample: demos/day2/module-5-demo-1-attach-toolbox/</a:t>
+            </a:r>
+            <a:endParaRPr lang="en-US" sz="1100" dirty="0"/>
           </a:p>
         </p:txBody>
       </p:sp>
@@ -10328,7 +10865,7 @@
                 <a:ea typeface="Calibri" pitchFamily="34" charset="-122"/>
                 <a:cs typeface="Calibri" pitchFamily="34" charset="-120"/>
               </a:rPr>
-              <a:t>Two authoring paths</a:t>
+              <a:t>Toolbox anatomy</a:t>
             </a:r>
             <a:endParaRPr lang="en-US" sz="2800" dirty="0"/>
           </a:p>
@@ -10343,7 +10880,7 @@
         <p:spPr>
           <a:xfrm>
             <a:off x="365760" y="1097280"/>
-            <a:ext cx="8412480" cy="2743200"/>
+            <a:ext cx="8412480" cy="365760"/>
           </a:xfrm>
           <a:prstGeom prst="rect">
             <a:avLst/>
@@ -10355,15 +10892,11 @@
           <a:bodyPr wrap="square" rtlCol="0" anchor="ctr"/>
           <a:lstStyle/>
           <a:p>
-            <a:pPr marL="342900" indent="-342900">
-              <a:spcAft>
-                <a:spcPts val="600"/>
-              </a:spcAft>
-              <a:buSzPct val="100000"/>
-              <a:buChar char="•"/>
-            </a:pPr>
-            <a:r>
-              <a:rPr lang="en-US" sz="1200" dirty="0">
+            <a:pPr indent="0" marL="0">
+              <a:buNone/>
+            </a:pPr>
+            <a:r>
+              <a:rPr lang="en-US" sz="1400" dirty="0">
                 <a:solidFill>
                   <a:srgbClr val="212121"/>
                 </a:solidFill>
@@ -10371,135 +10904,9 @@
                 <a:ea typeface="Calibri" pitchFamily="34" charset="-122"/>
                 <a:cs typeface="Calibri" pitchFamily="34" charset="-120"/>
               </a:rPr>
-              <a:t>Portal</a:t>
-            </a:r>
-            <a:endParaRPr lang="en-US" sz="1200" dirty="0"/>
-          </a:p>
-          <a:p>
-            <a:pPr lvl="1" marL="685800" indent="-342900">
-              <a:spcAft>
-                <a:spcPts val="600"/>
-              </a:spcAft>
-              <a:buSzPct val="100000"/>
-              <a:buChar char="•"/>
-            </a:pPr>
-            <a:r>
-              <a:rPr lang="en-US" sz="1200" dirty="0">
-                <a:solidFill>
-                  <a:srgbClr val="212121"/>
-                </a:solidFill>
-                <a:latin typeface="Calibri" pitchFamily="34" charset="0"/>
-                <a:ea typeface="Calibri" pitchFamily="34" charset="-122"/>
-                <a:cs typeface="Calibri" pitchFamily="34" charset="-120"/>
-              </a:rPr>
-              <a:t>Click-through UI in the Foundry portal for exploration</a:t>
-            </a:r>
-            <a:endParaRPr lang="en-US" sz="1200" dirty="0"/>
-          </a:p>
-          <a:p>
-            <a:pPr marL="342900" indent="-342900">
-              <a:spcAft>
-                <a:spcPts val="600"/>
-              </a:spcAft>
-              <a:buSzPct val="100000"/>
-              <a:buChar char="•"/>
-            </a:pPr>
-            <a:r>
-              <a:rPr lang="en-US" sz="1200" dirty="0">
-                <a:solidFill>
-                  <a:srgbClr val="212121"/>
-                </a:solidFill>
-                <a:latin typeface="Calibri" pitchFamily="34" charset="0"/>
-                <a:ea typeface="Calibri" pitchFamily="34" charset="-122"/>
-                <a:cs typeface="Calibri" pitchFamily="34" charset="-120"/>
-              </a:rPr>
-              <a:t>IaC-first (workshop path)</a:t>
-            </a:r>
-            <a:endParaRPr lang="en-US" sz="1200" dirty="0"/>
-          </a:p>
-          <a:p>
-            <a:pPr lvl="1" marL="685800" indent="-342900">
-              <a:spcAft>
-                <a:spcPts val="600"/>
-              </a:spcAft>
-              <a:buSzPct val="100000"/>
-              <a:buChar char="•"/>
-            </a:pPr>
-            <a:r>
-              <a:rPr lang="en-US" sz="1200" dirty="0">
-                <a:solidFill>
-                  <a:srgbClr val="212121"/>
-                </a:solidFill>
-                <a:latin typeface="Calibri" pitchFamily="34" charset="0"/>
-                <a:ea typeface="Calibri" pitchFamily="34" charset="-122"/>
-                <a:cs typeface="Calibri" pitchFamily="34" charset="-120"/>
-              </a:rPr>
-              <a:t>azd ai CLI or SDK</a:t>
-            </a:r>
-            <a:endParaRPr lang="en-US" sz="1200" dirty="0"/>
-          </a:p>
-          <a:p>
-            <a:pPr lvl="1" marL="685800" indent="-342900">
-              <a:spcAft>
-                <a:spcPts val="600"/>
-              </a:spcAft>
-              <a:buSzPct val="100000"/>
-              <a:buChar char="•"/>
-            </a:pPr>
-            <a:r>
-              <a:rPr lang="en-US" sz="1200" dirty="0">
-                <a:solidFill>
-                  <a:srgbClr val="212121"/>
-                </a:solidFill>
-                <a:latin typeface="Calibri" pitchFamily="34" charset="0"/>
-                <a:ea typeface="Calibri" pitchFamily="34" charset="-122"/>
-                <a:cs typeface="Calibri" pitchFamily="34" charset="-120"/>
-              </a:rPr>
-              <a:t>Two-step flow:</a:t>
-            </a:r>
-            <a:endParaRPr lang="en-US" sz="1200" dirty="0"/>
-          </a:p>
-          <a:p>
-            <a:pPr lvl="2" marL="1028700" indent="-342900">
-              <a:spcAft>
-                <a:spcPts val="600"/>
-              </a:spcAft>
-              <a:buSzPct val="100000"/>
-              <a:buChar char="•"/>
-            </a:pPr>
-            <a:r>
-              <a:rPr lang="en-US" sz="1200" dirty="0">
-                <a:solidFill>
-                  <a:srgbClr val="212121"/>
-                </a:solidFill>
-                <a:latin typeface="Calibri" pitchFamily="34" charset="0"/>
-                <a:ea typeface="Calibri" pitchFamily="34" charset="-122"/>
-                <a:cs typeface="Calibri" pitchFamily="34" charset="-120"/>
-              </a:rPr>
-              <a:t>1. Create the connections (one per credential record)</a:t>
-            </a:r>
-            <a:endParaRPr lang="en-US" sz="1200" dirty="0"/>
-          </a:p>
-          <a:p>
-            <a:pPr lvl="2" marL="1028700" indent="-342900">
-              <a:spcAft>
-                <a:spcPts val="600"/>
-              </a:spcAft>
-              <a:buSzPct val="100000"/>
-              <a:buChar char="•"/>
-            </a:pPr>
-            <a:r>
-              <a:rPr lang="en-US" sz="1200" dirty="0">
-                <a:solidFill>
-                  <a:srgbClr val="212121"/>
-                </a:solidFill>
-                <a:latin typeface="Calibri" pitchFamily="34" charset="0"/>
-                <a:ea typeface="Calibri" pitchFamily="34" charset="-122"/>
-                <a:cs typeface="Calibri" pitchFamily="34" charset="-120"/>
-              </a:rPr>
-              <a:t>2. Create the toolbox from a YAML file</a:t>
-            </a:r>
-            <a:endParaRPr lang="en-US" sz="1200" dirty="0"/>
+              <a:t>A toolbox is a project resource with:</a:t>
+            </a:r>
+            <a:endParaRPr lang="en-US" sz="1400" dirty="0"/>
           </a:p>
         </p:txBody>
       </p:sp>
@@ -10511,8 +10918,8 @@
         </p:nvSpPr>
         <p:spPr>
           <a:xfrm>
-            <a:off x="365760" y="4160520"/>
-            <a:ext cx="8412480" cy="457200"/>
+            <a:off x="365760" y="1554480"/>
+            <a:ext cx="8412480" cy="2926080"/>
           </a:xfrm>
           <a:prstGeom prst="rect">
             <a:avLst/>
@@ -10524,21 +10931,190 @@
           <a:bodyPr wrap="square" rtlCol="0" anchor="ctr"/>
           <a:lstStyle/>
           <a:p>
+            <a:pPr marL="342900" indent="-342900">
+              <a:spcAft>
+                <a:spcPts val="600"/>
+              </a:spcAft>
+              <a:buSzPct val="100000"/>
+              <a:buChar char="•"/>
+            </a:pPr>
+            <a:r>
+              <a:rPr lang="en-US" sz="1200" dirty="0">
+                <a:solidFill>
+                  <a:srgbClr val="212121"/>
+                </a:solidFill>
+                <a:latin typeface="Calibri" pitchFamily="34" charset="0"/>
+                <a:ea typeface="Calibri" pitchFamily="34" charset="-122"/>
+                <a:cs typeface="Calibri" pitchFamily="34" charset="-120"/>
+              </a:rPr>
+              <a:t>Name — identifier</a:t>
+            </a:r>
+            <a:endParaRPr lang="en-US" sz="1200" dirty="0"/>
+          </a:p>
+          <a:p>
+            <a:pPr marL="342900" indent="-342900">
+              <a:spcAft>
+                <a:spcPts val="600"/>
+              </a:spcAft>
+              <a:buSzPct val="100000"/>
+              <a:buChar char="•"/>
+            </a:pPr>
+            <a:r>
+              <a:rPr lang="en-US" sz="1200" dirty="0">
+                <a:solidFill>
+                  <a:srgbClr val="212121"/>
+                </a:solidFill>
+                <a:latin typeface="Calibri" pitchFamily="34" charset="0"/>
+                <a:ea typeface="Calibri" pitchFamily="34" charset="-122"/>
+                <a:cs typeface="Calibri" pitchFamily="34" charset="-120"/>
+              </a:rPr>
+              <a:t>Description — human-readable</a:t>
+            </a:r>
+            <a:endParaRPr lang="en-US" sz="1200" dirty="0"/>
+          </a:p>
+          <a:p>
+            <a:pPr marL="342900" indent="-342900">
+              <a:spcAft>
+                <a:spcPts val="600"/>
+              </a:spcAft>
+              <a:buSzPct val="100000"/>
+              <a:buChar char="•"/>
+            </a:pPr>
+            <a:r>
+              <a:rPr lang="en-US" sz="1200" dirty="0">
+                <a:solidFill>
+                  <a:srgbClr val="212121"/>
+                </a:solidFill>
+                <a:latin typeface="Calibri" pitchFamily="34" charset="0"/>
+                <a:ea typeface="Calibri" pitchFamily="34" charset="-122"/>
+                <a:cs typeface="Calibri" pitchFamily="34" charset="-120"/>
+              </a:rPr>
+              <a:t>Tools — a list of tool entries (each with its own config)</a:t>
+            </a:r>
+            <a:endParaRPr lang="en-US" sz="1200" dirty="0"/>
+          </a:p>
+          <a:p>
+            <a:pPr marL="342900" indent="-342900">
+              <a:spcAft>
+                <a:spcPts val="600"/>
+              </a:spcAft>
+              <a:buSzPct val="100000"/>
+              <a:buChar char="•"/>
+            </a:pPr>
+            <a:r>
+              <a:rPr lang="en-US" sz="1200" dirty="0">
+                <a:solidFill>
+                  <a:srgbClr val="212121"/>
+                </a:solidFill>
+                <a:latin typeface="Calibri" pitchFamily="34" charset="0"/>
+                <a:ea typeface="Calibri" pitchFamily="34" charset="-122"/>
+                <a:cs typeface="Calibri" pitchFamily="34" charset="-120"/>
+              </a:rPr>
+              <a:t>Connections — project connections the toolbox references (AI Search, MCP server, Bing…)</a:t>
+            </a:r>
+            <a:endParaRPr lang="en-US" sz="1200" dirty="0"/>
+          </a:p>
+          <a:p>
+            <a:pPr marL="342900" indent="-342900">
+              <a:spcAft>
+                <a:spcPts val="600"/>
+              </a:spcAft>
+              <a:buSzPct val="100000"/>
+              <a:buChar char="•"/>
+            </a:pPr>
+            <a:r>
+              <a:rPr lang="en-US" sz="1200" dirty="0">
+                <a:solidFill>
+                  <a:srgbClr val="212121"/>
+                </a:solidFill>
+                <a:latin typeface="Calibri" pitchFamily="34" charset="0"/>
+                <a:ea typeface="Calibri" pitchFamily="34" charset="-122"/>
+                <a:cs typeface="Calibri" pitchFamily="34" charset="-120"/>
+              </a:rPr>
+              <a:t>Skills — Foundry skills packaged as MCP resources</a:t>
+            </a:r>
+            <a:endParaRPr lang="en-US" sz="1200" dirty="0"/>
+          </a:p>
+          <a:p>
+            <a:pPr marL="342900" indent="-342900">
+              <a:spcAft>
+                <a:spcPts val="600"/>
+              </a:spcAft>
+              <a:buSzPct val="100000"/>
+              <a:buChar char="•"/>
+            </a:pPr>
+            <a:r>
+              <a:rPr lang="en-US" sz="1200" dirty="0">
+                <a:solidFill>
+                  <a:srgbClr val="212121"/>
+                </a:solidFill>
+                <a:latin typeface="Calibri" pitchFamily="34" charset="0"/>
+                <a:ea typeface="Calibri" pitchFamily="34" charset="-122"/>
+                <a:cs typeface="Calibri" pitchFamily="34" charset="-120"/>
+              </a:rPr>
+              <a:t>Policies — optional RAI policy applied at the toolbox level</a:t>
+            </a:r>
+            <a:endParaRPr lang="en-US" sz="1200" dirty="0"/>
+          </a:p>
+          <a:p>
+            <a:pPr marL="342900" indent="-342900">
+              <a:spcAft>
+                <a:spcPts val="600"/>
+              </a:spcAft>
+              <a:buSzPct val="100000"/>
+              <a:buChar char="•"/>
+            </a:pPr>
+            <a:r>
+              <a:rPr lang="en-US" sz="1200" dirty="0">
+                <a:solidFill>
+                  <a:srgbClr val="212121"/>
+                </a:solidFill>
+                <a:latin typeface="Calibri" pitchFamily="34" charset="0"/>
+                <a:ea typeface="Calibri" pitchFamily="34" charset="-122"/>
+                <a:cs typeface="Calibri" pitchFamily="34" charset="-120"/>
+              </a:rPr>
+              <a:t>Versions — the whole thing is versioned; one version is the default</a:t>
+            </a:r>
+            <a:endParaRPr lang="en-US" sz="1200" dirty="0"/>
+          </a:p>
+        </p:txBody>
+      </p:sp>
+      <p:sp>
+        <p:nvSpPr>
+          <p:cNvPr id="7" name="Text 5"/>
+          <p:cNvSpPr/>
+          <p:nvPr/>
+        </p:nvSpPr>
+        <p:spPr>
+          <a:xfrm>
+            <a:off x="365760" y="4434840"/>
+            <a:ext cx="8412480" cy="365760"/>
+          </a:xfrm>
+          <a:prstGeom prst="rect">
+            <a:avLst/>
+          </a:prstGeom>
+          <a:noFill/>
+          <a:ln/>
+        </p:spPr>
+        <p:txBody>
+          <a:bodyPr wrap="square" rtlCol="0" anchor="ctr"/>
+          <a:lstStyle/>
+          <a:p>
             <a:pPr indent="0" marL="0">
               <a:buNone/>
             </a:pPr>
             <a:r>
-              <a:rPr lang="en-US" sz="1300" b="1" i="1" dirty="0">
-                <a:solidFill>
-                  <a:srgbClr val="1E2761"/>
-                </a:solidFill>
-                <a:latin typeface="Calibri" pitchFamily="34" charset="0"/>
-                <a:ea typeface="Calibri" pitchFamily="34" charset="-122"/>
-                <a:cs typeface="Calibri" pitchFamily="34" charset="-120"/>
-              </a:rPr>
-              <a:t>YAML references connections by name. Credentials never live in YAML — they live in connections.</a:t>
-            </a:r>
-            <a:endParaRPr lang="en-US" sz="1300" dirty="0"/>
+              <a:rPr lang="en-US" sz="1200" i="1" dirty="0">
+                <a:solidFill>
+                  <a:srgbClr val="6B7280"/>
+                </a:solidFill>
+                <a:latin typeface="Calibri" pitchFamily="34" charset="0"/>
+                <a:ea typeface="Calibri" pitchFamily="34" charset="-122"/>
+                <a:cs typeface="Calibri" pitchFamily="34" charset="-120"/>
+              </a:rPr>
+              <a:t>Same 'publish version, consumers pin' pattern as Prompt agents from Day 1.</a:t>
+            </a:r>
+            <a:endParaRPr lang="en-US" sz="1200" dirty="0"/>
           </a:p>
         </p:txBody>
       </p:sp>
@@ -10666,7 +11242,7 @@
                 <a:ea typeface="Calibri" pitchFamily="34" charset="-122"/>
                 <a:cs typeface="Calibri" pitchFamily="34" charset="-120"/>
               </a:rPr>
-              <a:t>A minimal toolbox YAML</a:t>
+              <a:t>Two authoring paths</a:t>
             </a:r>
             <a:endParaRPr lang="en-US" sz="2800" dirty="0"/>
           </a:p>
@@ -10674,39 +11250,14 @@
       </p:sp>
       <p:sp>
         <p:nvSpPr>
-          <p:cNvPr id="5" name="Shape 3"/>
+          <p:cNvPr id="5" name="Text 3"/>
           <p:cNvSpPr/>
           <p:nvPr/>
         </p:nvSpPr>
         <p:spPr>
           <a:xfrm>
             <a:off x="365760" y="1097280"/>
-            <a:ext cx="8412480" cy="2377440"/>
-          </a:xfrm>
-          <a:prstGeom prst="rect">
-            <a:avLst/>
-          </a:prstGeom>
-          <a:solidFill>
-            <a:srgbClr val="F3F4F6"/>
-          </a:solidFill>
-          <a:ln w="6350">
-            <a:solidFill>
-              <a:srgbClr val="D1D5DB"/>
-            </a:solidFill>
-            <a:prstDash val="solid"/>
-          </a:ln>
-        </p:spPr>
-      </p:sp>
-      <p:sp>
-        <p:nvSpPr>
-          <p:cNvPr id="6" name="Text 4"/>
-          <p:cNvSpPr/>
-          <p:nvPr/>
-        </p:nvSpPr>
-        <p:spPr>
-          <a:xfrm>
-            <a:off x="502920" y="1188720"/>
-            <a:ext cx="8138160" cy="2194560"/>
+            <a:ext cx="8412480" cy="2743200"/>
           </a:xfrm>
           <a:prstGeom prst="rect">
             <a:avLst/>
@@ -10715,191 +11266,167 @@
           <a:ln/>
         </p:spPr>
         <p:txBody>
-          <a:bodyPr wrap="square" lIns="0" tIns="0" rIns="0" bIns="0" rtlCol="0" anchor="t"/>
-          <a:lstStyle/>
-          <a:p>
-            <a:pPr indent="0" marL="0">
-              <a:buNone/>
+          <a:bodyPr wrap="square" rtlCol="0" anchor="ctr"/>
+          <a:lstStyle/>
+          <a:p>
+            <a:pPr marL="342900" indent="-342900">
+              <a:spcAft>
+                <a:spcPts val="600"/>
+              </a:spcAft>
+              <a:buSzPct val="100000"/>
+              <a:buChar char="•"/>
             </a:pPr>
             <a:r>
               <a:rPr lang="en-US" sz="1200" dirty="0">
                 <a:solidFill>
                   <a:srgbClr val="212121"/>
                 </a:solidFill>
-                <a:latin typeface="Consolas" pitchFamily="34" charset="0"/>
-                <a:ea typeface="Consolas" pitchFamily="34" charset="-122"/>
-                <a:cs typeface="Consolas" pitchFamily="34" charset="-120"/>
-              </a:rPr>
-              <a:t># my-toolbox.yaml</a:t>
+                <a:latin typeface="Calibri" pitchFamily="34" charset="0"/>
+                <a:ea typeface="Calibri" pitchFamily="34" charset="-122"/>
+                <a:cs typeface="Calibri" pitchFamily="34" charset="-120"/>
+              </a:rPr>
+              <a:t>Portal</a:t>
             </a:r>
             <a:endParaRPr lang="en-US" sz="1200" dirty="0"/>
           </a:p>
           <a:p>
-            <a:pPr indent="0" marL="0">
-              <a:buNone/>
+            <a:pPr lvl="1" marL="685800" indent="-342900">
+              <a:spcAft>
+                <a:spcPts val="600"/>
+              </a:spcAft>
+              <a:buSzPct val="100000"/>
+              <a:buChar char="•"/>
             </a:pPr>
             <a:r>
               <a:rPr lang="en-US" sz="1200" dirty="0">
                 <a:solidFill>
                   <a:srgbClr val="212121"/>
                 </a:solidFill>
-                <a:latin typeface="Consolas" pitchFamily="34" charset="0"/>
-                <a:ea typeface="Consolas" pitchFamily="34" charset="-122"/>
-                <a:cs typeface="Consolas" pitchFamily="34" charset="-120"/>
-              </a:rPr>
-              <a:t>description: Docs assistant helper toolbox</a:t>
+                <a:latin typeface="Calibri" pitchFamily="34" charset="0"/>
+                <a:ea typeface="Calibri" pitchFamily="34" charset="-122"/>
+                <a:cs typeface="Calibri" pitchFamily="34" charset="-120"/>
+              </a:rPr>
+              <a:t>Click-through UI in the Foundry portal for exploration</a:t>
             </a:r>
             <a:endParaRPr lang="en-US" sz="1200" dirty="0"/>
           </a:p>
           <a:p>
-            <a:pPr indent="0" marL="0">
-              <a:buNone/>
-            </a:pPr>
+            <a:pPr marL="342900" indent="-342900">
+              <a:spcAft>
+                <a:spcPts val="600"/>
+              </a:spcAft>
+              <a:buSzPct val="100000"/>
+              <a:buChar char="•"/>
+            </a:pPr>
+            <a:r>
+              <a:rPr lang="en-US" sz="1200" dirty="0">
+                <a:solidFill>
+                  <a:srgbClr val="212121"/>
+                </a:solidFill>
+                <a:latin typeface="Calibri" pitchFamily="34" charset="0"/>
+                <a:ea typeface="Calibri" pitchFamily="34" charset="-122"/>
+                <a:cs typeface="Calibri" pitchFamily="34" charset="-120"/>
+              </a:rPr>
+              <a:t>IaC-first (workshop path)</a:t>
+            </a:r>
             <a:endParaRPr lang="en-US" sz="1200" dirty="0"/>
           </a:p>
           <a:p>
-            <a:pPr indent="0" marL="0">
-              <a:buNone/>
+            <a:pPr lvl="1" marL="685800" indent="-342900">
+              <a:spcAft>
+                <a:spcPts val="600"/>
+              </a:spcAft>
+              <a:buSzPct val="100000"/>
+              <a:buChar char="•"/>
             </a:pPr>
             <a:r>
               <a:rPr lang="en-US" sz="1200" dirty="0">
                 <a:solidFill>
                   <a:srgbClr val="212121"/>
                 </a:solidFill>
-                <a:latin typeface="Consolas" pitchFamily="34" charset="0"/>
-                <a:ea typeface="Consolas" pitchFamily="34" charset="-122"/>
-                <a:cs typeface="Consolas" pitchFamily="34" charset="-120"/>
-              </a:rPr>
-              <a:t>tools:</a:t>
+                <a:latin typeface="Calibri" pitchFamily="34" charset="0"/>
+                <a:ea typeface="Calibri" pitchFamily="34" charset="-122"/>
+                <a:cs typeface="Calibri" pitchFamily="34" charset="-120"/>
+              </a:rPr>
+              <a:t>azd ai CLI or SDK</a:t>
             </a:r>
             <a:endParaRPr lang="en-US" sz="1200" dirty="0"/>
           </a:p>
           <a:p>
-            <a:pPr indent="0" marL="0">
-              <a:buNone/>
+            <a:pPr lvl="1" marL="685800" indent="-342900">
+              <a:spcAft>
+                <a:spcPts val="600"/>
+              </a:spcAft>
+              <a:buSzPct val="100000"/>
+              <a:buChar char="•"/>
             </a:pPr>
             <a:r>
               <a:rPr lang="en-US" sz="1200" dirty="0">
                 <a:solidFill>
                   <a:srgbClr val="212121"/>
                 </a:solidFill>
-                <a:latin typeface="Consolas" pitchFamily="34" charset="0"/>
-                <a:ea typeface="Consolas" pitchFamily="34" charset="-122"/>
-                <a:cs typeface="Consolas" pitchFamily="34" charset="-120"/>
-              </a:rPr>
-              <a:t>  - type: web_search</a:t>
+                <a:latin typeface="Calibri" pitchFamily="34" charset="0"/>
+                <a:ea typeface="Calibri" pitchFamily="34" charset="-122"/>
+                <a:cs typeface="Calibri" pitchFamily="34" charset="-120"/>
+              </a:rPr>
+              <a:t>Two-step flow:</a:t>
             </a:r>
             <a:endParaRPr lang="en-US" sz="1200" dirty="0"/>
           </a:p>
           <a:p>
-            <a:pPr indent="0" marL="0">
-              <a:buNone/>
+            <a:pPr lvl="2" marL="1028700" indent="-342900">
+              <a:spcAft>
+                <a:spcPts val="600"/>
+              </a:spcAft>
+              <a:buSzPct val="100000"/>
+              <a:buChar char="•"/>
             </a:pPr>
             <a:r>
               <a:rPr lang="en-US" sz="1200" dirty="0">
                 <a:solidFill>
                   <a:srgbClr val="212121"/>
                 </a:solidFill>
-                <a:latin typeface="Consolas" pitchFamily="34" charset="0"/>
-                <a:ea typeface="Consolas" pitchFamily="34" charset="-122"/>
-                <a:cs typeface="Consolas" pitchFamily="34" charset="-120"/>
-              </a:rPr>
-              <a:t>    name: web</a:t>
+                <a:latin typeface="Calibri" pitchFamily="34" charset="0"/>
+                <a:ea typeface="Calibri" pitchFamily="34" charset="-122"/>
+                <a:cs typeface="Calibri" pitchFamily="34" charset="-120"/>
+              </a:rPr>
+              <a:t>1. Create the connections (one per credential record)</a:t>
             </a:r>
             <a:endParaRPr lang="en-US" sz="1200" dirty="0"/>
           </a:p>
           <a:p>
-            <a:pPr indent="0" marL="0">
-              <a:buNone/>
-            </a:pPr>
+            <a:pPr lvl="2" marL="1028700" indent="-342900">
+              <a:spcAft>
+                <a:spcPts val="600"/>
+              </a:spcAft>
+              <a:buSzPct val="100000"/>
+              <a:buChar char="•"/>
+            </a:pPr>
+            <a:r>
+              <a:rPr lang="en-US" sz="1200" dirty="0">
+                <a:solidFill>
+                  <a:srgbClr val="212121"/>
+                </a:solidFill>
+                <a:latin typeface="Calibri" pitchFamily="34" charset="0"/>
+                <a:ea typeface="Calibri" pitchFamily="34" charset="-122"/>
+                <a:cs typeface="Calibri" pitchFamily="34" charset="-120"/>
+              </a:rPr>
+              <a:t>2. Create the toolbox from a YAML file</a:t>
+            </a:r>
             <a:endParaRPr lang="en-US" sz="1200" dirty="0"/>
           </a:p>
-          <a:p>
-            <a:pPr indent="0" marL="0">
-              <a:buNone/>
-            </a:pPr>
-            <a:r>
-              <a:rPr lang="en-US" sz="1200" dirty="0">
-                <a:solidFill>
-                  <a:srgbClr val="212121"/>
-                </a:solidFill>
-                <a:latin typeface="Consolas" pitchFamily="34" charset="0"/>
-                <a:ea typeface="Consolas" pitchFamily="34" charset="-122"/>
-                <a:cs typeface="Consolas" pitchFamily="34" charset="-120"/>
-              </a:rPr>
-              <a:t>  - type: code_interpreter</a:t>
-            </a:r>
-            <a:endParaRPr lang="en-US" sz="1200" dirty="0"/>
-          </a:p>
-          <a:p>
-            <a:pPr indent="0" marL="0">
-              <a:buNone/>
-            </a:pPr>
-            <a:r>
-              <a:rPr lang="en-US" sz="1200" dirty="0">
-                <a:solidFill>
-                  <a:srgbClr val="212121"/>
-                </a:solidFill>
-                <a:latin typeface="Consolas" pitchFamily="34" charset="0"/>
-                <a:ea typeface="Consolas" pitchFamily="34" charset="-122"/>
-                <a:cs typeface="Consolas" pitchFamily="34" charset="-120"/>
-              </a:rPr>
-              <a:t>    container: { type: auto }</a:t>
-            </a:r>
-            <a:endParaRPr lang="en-US" sz="1200" dirty="0"/>
-          </a:p>
-          <a:p>
-            <a:pPr indent="0" marL="0">
-              <a:buNone/>
-            </a:pPr>
-            <a:r>
-              <a:rPr lang="en-US" sz="1200" dirty="0">
-                <a:solidFill>
-                  <a:srgbClr val="212121"/>
-                </a:solidFill>
-                <a:latin typeface="Consolas" pitchFamily="34" charset="0"/>
-                <a:ea typeface="Consolas" pitchFamily="34" charset="-122"/>
-                <a:cs typeface="Consolas" pitchFamily="34" charset="-120"/>
-              </a:rPr>
-              <a:t>    name: code</a:t>
-            </a:r>
-            <a:endParaRPr lang="en-US" sz="1200" dirty="0"/>
-          </a:p>
-          <a:p>
-            <a:pPr indent="0" marL="0">
-              <a:buNone/>
-            </a:pPr>
-            <a:endParaRPr lang="en-US" sz="1200" dirty="0"/>
-          </a:p>
-          <a:p>
-            <a:pPr indent="0" marL="0">
-              <a:buNone/>
-            </a:pPr>
-            <a:r>
-              <a:rPr lang="en-US" sz="1200" dirty="0">
-                <a:solidFill>
-                  <a:srgbClr val="212121"/>
-                </a:solidFill>
-                <a:latin typeface="Consolas" pitchFamily="34" charset="0"/>
-                <a:ea typeface="Consolas" pitchFamily="34" charset="-122"/>
-                <a:cs typeface="Consolas" pitchFamily="34" charset="-120"/>
-              </a:rPr>
-              <a:t>  - type: toolbox_search   # intent-based routing over the tools above</a:t>
-            </a:r>
-            <a:endParaRPr lang="en-US" sz="1200" dirty="0"/>
-          </a:p>
-        </p:txBody>
-      </p:sp>
-      <p:sp>
-        <p:nvSpPr>
-          <p:cNvPr id="7" name="Text 5"/>
+        </p:txBody>
+      </p:sp>
+      <p:sp>
+        <p:nvSpPr>
+          <p:cNvPr id="6" name="Text 4"/>
           <p:cNvSpPr/>
           <p:nvPr/>
         </p:nvSpPr>
         <p:spPr>
           <a:xfrm>
-            <a:off x="365760" y="3566160"/>
-            <a:ext cx="8412480" cy="274320"/>
+            <a:off x="365760" y="4160520"/>
+            <a:ext cx="8412480" cy="457200"/>
           </a:xfrm>
           <a:prstGeom prst="rect">
             <a:avLst/>
@@ -10915,98 +11442,17 @@
               <a:buNone/>
             </a:pPr>
             <a:r>
-              <a:rPr lang="en-US" sz="1200" dirty="0">
-                <a:solidFill>
-                  <a:srgbClr val="212121"/>
-                </a:solidFill>
-                <a:latin typeface="Calibri" pitchFamily="34" charset="0"/>
-                <a:ea typeface="Calibri" pitchFamily="34" charset="-122"/>
-                <a:cs typeface="Calibri" pitchFamily="34" charset="-120"/>
-              </a:rPr>
-              <a:t>Create it:</a:t>
-            </a:r>
-            <a:endParaRPr lang="en-US" sz="1200" dirty="0"/>
-          </a:p>
-        </p:txBody>
-      </p:sp>
-      <p:sp>
-        <p:nvSpPr>
-          <p:cNvPr id="8" name="Shape 6"/>
-          <p:cNvSpPr/>
-          <p:nvPr/>
-        </p:nvSpPr>
-        <p:spPr>
-          <a:xfrm>
-            <a:off x="365760" y="3886200"/>
-            <a:ext cx="8412480" cy="777240"/>
-          </a:xfrm>
-          <a:prstGeom prst="rect">
-            <a:avLst/>
-          </a:prstGeom>
-          <a:solidFill>
-            <a:srgbClr val="F3F4F6"/>
-          </a:solidFill>
-          <a:ln w="6350">
-            <a:solidFill>
-              <a:srgbClr val="D1D5DB"/>
-            </a:solidFill>
-            <a:prstDash val="solid"/>
-          </a:ln>
-        </p:spPr>
-      </p:sp>
-      <p:sp>
-        <p:nvSpPr>
-          <p:cNvPr id="9" name="Text 7"/>
-          <p:cNvSpPr/>
-          <p:nvPr/>
-        </p:nvSpPr>
-        <p:spPr>
-          <a:xfrm>
-            <a:off x="502920" y="3977640"/>
-            <a:ext cx="8138160" cy="594360"/>
-          </a:xfrm>
-          <a:prstGeom prst="rect">
-            <a:avLst/>
-          </a:prstGeom>
-          <a:noFill/>
-          <a:ln/>
-        </p:spPr>
-        <p:txBody>
-          <a:bodyPr wrap="square" lIns="0" tIns="0" rIns="0" bIns="0" rtlCol="0" anchor="t"/>
-          <a:lstStyle/>
-          <a:p>
-            <a:pPr indent="0" marL="0">
-              <a:buNone/>
-            </a:pPr>
-            <a:r>
-              <a:rPr lang="en-US" sz="1200" dirty="0">
-                <a:solidFill>
-                  <a:srgbClr val="212121"/>
-                </a:solidFill>
-                <a:latin typeface="Consolas" pitchFamily="34" charset="0"/>
-                <a:ea typeface="Consolas" pitchFamily="34" charset="-122"/>
-                <a:cs typeface="Consolas" pitchFamily="34" charset="-120"/>
-              </a:rPr>
-              <a:t>azd ai project set $PROJECT_ENDPOINT</a:t>
-            </a:r>
-            <a:endParaRPr lang="en-US" sz="1200" dirty="0"/>
-          </a:p>
-          <a:p>
-            <a:pPr indent="0" marL="0">
-              <a:buNone/>
-            </a:pPr>
-            <a:r>
-              <a:rPr lang="en-US" sz="1200" dirty="0">
-                <a:solidFill>
-                  <a:srgbClr val="212121"/>
-                </a:solidFill>
-                <a:latin typeface="Consolas" pitchFamily="34" charset="0"/>
-                <a:ea typeface="Consolas" pitchFamily="34" charset="-122"/>
-                <a:cs typeface="Consolas" pitchFamily="34" charset="-120"/>
-              </a:rPr>
-              <a:t>azd ai toolbox create my-toolbox --from-file ./my-toolbox.yaml</a:t>
-            </a:r>
-            <a:endParaRPr lang="en-US" sz="1200" dirty="0"/>
+              <a:rPr lang="en-US" sz="1300" b="1" i="1" dirty="0">
+                <a:solidFill>
+                  <a:srgbClr val="1E2761"/>
+                </a:solidFill>
+                <a:latin typeface="Calibri" pitchFamily="34" charset="0"/>
+                <a:ea typeface="Calibri" pitchFamily="34" charset="-122"/>
+                <a:cs typeface="Calibri" pitchFamily="34" charset="-120"/>
+              </a:rPr>
+              <a:t>YAML references connections by name. Credentials never live in YAML — they live in connections.</a:t>
+            </a:r>
+            <a:endParaRPr lang="en-US" sz="1300" dirty="0"/>
           </a:p>
         </p:txBody>
       </p:sp>
@@ -11134,7 +11580,7 @@
                 <a:ea typeface="Calibri" pitchFamily="34" charset="-122"/>
                 <a:cs typeface="Calibri" pitchFamily="34" charset="-120"/>
               </a:rPr>
-              <a:t>Adding a tool that needs a connection</a:t>
+              <a:t>A minimal toolbox YAML</a:t>
             </a:r>
             <a:endParaRPr lang="en-US" sz="2800" dirty="0"/>
           </a:p>
@@ -11142,53 +11588,14 @@
       </p:sp>
       <p:sp>
         <p:nvSpPr>
-          <p:cNvPr id="5" name="Text 3"/>
+          <p:cNvPr id="5" name="Shape 3"/>
           <p:cNvSpPr/>
           <p:nvPr/>
         </p:nvSpPr>
         <p:spPr>
           <a:xfrm>
-            <a:off x="365760" y="1051560"/>
-            <a:ext cx="8412480" cy="365760"/>
-          </a:xfrm>
-          <a:prstGeom prst="rect">
-            <a:avLst/>
-          </a:prstGeom>
-          <a:noFill/>
-          <a:ln/>
-        </p:spPr>
-        <p:txBody>
-          <a:bodyPr wrap="square" rtlCol="0" anchor="ctr"/>
-          <a:lstStyle/>
-          <a:p>
-            <a:pPr indent="0" marL="0">
-              <a:buNone/>
-            </a:pPr>
-            <a:r>
-              <a:rPr lang="en-US" sz="1200" dirty="0">
-                <a:solidFill>
-                  <a:srgbClr val="212121"/>
-                </a:solidFill>
-                <a:latin typeface="Calibri" pitchFamily="34" charset="0"/>
-                <a:ea typeface="Calibri" pitchFamily="34" charset="-122"/>
-                <a:cs typeface="Calibri" pitchFamily="34" charset="-120"/>
-              </a:rPr>
-              <a:t>For tools that reach external systems, register a connection first:</a:t>
-            </a:r>
-            <a:endParaRPr lang="en-US" sz="1200" dirty="0"/>
-          </a:p>
-        </p:txBody>
-      </p:sp>
-      <p:sp>
-        <p:nvSpPr>
-          <p:cNvPr id="6" name="Shape 4"/>
-          <p:cNvSpPr/>
-          <p:nvPr/>
-        </p:nvSpPr>
-        <p:spPr>
-          <a:xfrm>
-            <a:off x="365760" y="1463040"/>
-            <a:ext cx="8412480" cy="1188720"/>
+            <a:off x="365760" y="1097280"/>
+            <a:ext cx="8412480" cy="2377440"/>
           </a:xfrm>
           <a:prstGeom prst="rect">
             <a:avLst/>
@@ -11206,14 +11613,14 @@
       </p:sp>
       <p:sp>
         <p:nvSpPr>
-          <p:cNvPr id="7" name="Text 5"/>
+          <p:cNvPr id="6" name="Text 4"/>
           <p:cNvSpPr/>
           <p:nvPr/>
         </p:nvSpPr>
         <p:spPr>
           <a:xfrm>
-            <a:off x="502920" y="1554480"/>
-            <a:ext cx="8138160" cy="1005840"/>
+            <a:off x="502920" y="1188720"/>
+            <a:ext cx="8138160" cy="2194560"/>
           </a:xfrm>
           <a:prstGeom prst="rect">
             <a:avLst/>
@@ -11237,7 +11644,7 @@
                 <a:ea typeface="Consolas" pitchFamily="34" charset="-122"/>
                 <a:cs typeface="Consolas" pitchFamily="34" charset="-120"/>
               </a:rPr>
-              <a:t>azd ai connection create my-search-conn \</a:t>
+              <a:t># my-toolbox.yaml</a:t>
             </a:r>
             <a:endParaRPr lang="en-US" sz="1200" dirty="0"/>
           </a:p>
@@ -11254,8 +11661,14 @@
                 <a:ea typeface="Consolas" pitchFamily="34" charset="-122"/>
                 <a:cs typeface="Consolas" pitchFamily="34" charset="-120"/>
               </a:rPr>
-              <a:t>  --kind cognitive-search \</a:t>
-            </a:r>
+              <a:t>description: Docs assistant helper toolbox</a:t>
+            </a:r>
+            <a:endParaRPr lang="en-US" sz="1200" dirty="0"/>
+          </a:p>
+          <a:p>
+            <a:pPr indent="0" marL="0">
+              <a:buNone/>
+            </a:pPr>
             <a:endParaRPr lang="en-US" sz="1200" dirty="0"/>
           </a:p>
           <a:p>
@@ -11271,7 +11684,7 @@
                 <a:ea typeface="Consolas" pitchFamily="34" charset="-122"/>
                 <a:cs typeface="Consolas" pitchFamily="34" charset="-120"/>
               </a:rPr>
-              <a:t>  --target https://&lt;search&gt;.search.windows.net \</a:t>
+              <a:t>tools:</a:t>
             </a:r>
             <a:endParaRPr lang="en-US" sz="1200" dirty="0"/>
           </a:p>
@@ -11288,21 +11701,118 @@
                 <a:ea typeface="Consolas" pitchFamily="34" charset="-122"/>
                 <a:cs typeface="Consolas" pitchFamily="34" charset="-120"/>
               </a:rPr>
-              <a:t>  --auth-type project-managed-identity</a:t>
+              <a:t>  - type: web_search</a:t>
             </a:r>
             <a:endParaRPr lang="en-US" sz="1200" dirty="0"/>
           </a:p>
-        </p:txBody>
-      </p:sp>
-      <p:sp>
-        <p:nvSpPr>
-          <p:cNvPr id="8" name="Text 6"/>
+          <a:p>
+            <a:pPr indent="0" marL="0">
+              <a:buNone/>
+            </a:pPr>
+            <a:r>
+              <a:rPr lang="en-US" sz="1200" dirty="0">
+                <a:solidFill>
+                  <a:srgbClr val="212121"/>
+                </a:solidFill>
+                <a:latin typeface="Consolas" pitchFamily="34" charset="0"/>
+                <a:ea typeface="Consolas" pitchFamily="34" charset="-122"/>
+                <a:cs typeface="Consolas" pitchFamily="34" charset="-120"/>
+              </a:rPr>
+              <a:t>    name: web</a:t>
+            </a:r>
+            <a:endParaRPr lang="en-US" sz="1200" dirty="0"/>
+          </a:p>
+          <a:p>
+            <a:pPr indent="0" marL="0">
+              <a:buNone/>
+            </a:pPr>
+            <a:endParaRPr lang="en-US" sz="1200" dirty="0"/>
+          </a:p>
+          <a:p>
+            <a:pPr indent="0" marL="0">
+              <a:buNone/>
+            </a:pPr>
+            <a:r>
+              <a:rPr lang="en-US" sz="1200" dirty="0">
+                <a:solidFill>
+                  <a:srgbClr val="212121"/>
+                </a:solidFill>
+                <a:latin typeface="Consolas" pitchFamily="34" charset="0"/>
+                <a:ea typeface="Consolas" pitchFamily="34" charset="-122"/>
+                <a:cs typeface="Consolas" pitchFamily="34" charset="-120"/>
+              </a:rPr>
+              <a:t>  - type: code_interpreter</a:t>
+            </a:r>
+            <a:endParaRPr lang="en-US" sz="1200" dirty="0"/>
+          </a:p>
+          <a:p>
+            <a:pPr indent="0" marL="0">
+              <a:buNone/>
+            </a:pPr>
+            <a:r>
+              <a:rPr lang="en-US" sz="1200" dirty="0">
+                <a:solidFill>
+                  <a:srgbClr val="212121"/>
+                </a:solidFill>
+                <a:latin typeface="Consolas" pitchFamily="34" charset="0"/>
+                <a:ea typeface="Consolas" pitchFamily="34" charset="-122"/>
+                <a:cs typeface="Consolas" pitchFamily="34" charset="-120"/>
+              </a:rPr>
+              <a:t>    container: { type: auto }</a:t>
+            </a:r>
+            <a:endParaRPr lang="en-US" sz="1200" dirty="0"/>
+          </a:p>
+          <a:p>
+            <a:pPr indent="0" marL="0">
+              <a:buNone/>
+            </a:pPr>
+            <a:r>
+              <a:rPr lang="en-US" sz="1200" dirty="0">
+                <a:solidFill>
+                  <a:srgbClr val="212121"/>
+                </a:solidFill>
+                <a:latin typeface="Consolas" pitchFamily="34" charset="0"/>
+                <a:ea typeface="Consolas" pitchFamily="34" charset="-122"/>
+                <a:cs typeface="Consolas" pitchFamily="34" charset="-120"/>
+              </a:rPr>
+              <a:t>    name: code</a:t>
+            </a:r>
+            <a:endParaRPr lang="en-US" sz="1200" dirty="0"/>
+          </a:p>
+          <a:p>
+            <a:pPr indent="0" marL="0">
+              <a:buNone/>
+            </a:pPr>
+            <a:endParaRPr lang="en-US" sz="1200" dirty="0"/>
+          </a:p>
+          <a:p>
+            <a:pPr indent="0" marL="0">
+              <a:buNone/>
+            </a:pPr>
+            <a:r>
+              <a:rPr lang="en-US" sz="1200" dirty="0">
+                <a:solidFill>
+                  <a:srgbClr val="212121"/>
+                </a:solidFill>
+                <a:latin typeface="Consolas" pitchFamily="34" charset="0"/>
+                <a:ea typeface="Consolas" pitchFamily="34" charset="-122"/>
+                <a:cs typeface="Consolas" pitchFamily="34" charset="-120"/>
+              </a:rPr>
+              <a:t>  - type: toolbox_search   # intent-based routing over the tools above</a:t>
+            </a:r>
+            <a:endParaRPr lang="en-US" sz="1200" dirty="0"/>
+          </a:p>
+        </p:txBody>
+      </p:sp>
+      <p:sp>
+        <p:nvSpPr>
+          <p:cNvPr id="7" name="Text 5"/>
           <p:cNvSpPr/>
           <p:nvPr/>
         </p:nvSpPr>
         <p:spPr>
           <a:xfrm>
-            <a:off x="365760" y="2743200"/>
+            <a:off x="365760" y="3566160"/>
             <a:ext cx="8412480" cy="274320"/>
           </a:xfrm>
           <a:prstGeom prst="rect">
@@ -11327,7 +11837,7 @@
                 <a:ea typeface="Calibri" pitchFamily="34" charset="-122"/>
                 <a:cs typeface="Calibri" pitchFamily="34" charset="-120"/>
               </a:rPr>
-              <a:t>Then reference by name in the toolbox YAML:</a:t>
+              <a:t>Create it:</a:t>
             </a:r>
             <a:endParaRPr lang="en-US" sz="1200" dirty="0"/>
           </a:p>
@@ -11335,14 +11845,14 @@
       </p:sp>
       <p:sp>
         <p:nvSpPr>
-          <p:cNvPr id="9" name="Shape 7"/>
+          <p:cNvPr id="8" name="Shape 6"/>
           <p:cNvSpPr/>
           <p:nvPr/>
         </p:nvSpPr>
         <p:spPr>
           <a:xfrm>
-            <a:off x="365760" y="3063240"/>
-            <a:ext cx="8412480" cy="1371600"/>
+            <a:off x="365760" y="3886200"/>
+            <a:ext cx="8412480" cy="777240"/>
           </a:xfrm>
           <a:prstGeom prst="rect">
             <a:avLst/>
@@ -11360,14 +11870,14 @@
       </p:sp>
       <p:sp>
         <p:nvSpPr>
-          <p:cNvPr id="10" name="Text 8"/>
+          <p:cNvPr id="9" name="Text 7"/>
           <p:cNvSpPr/>
           <p:nvPr/>
         </p:nvSpPr>
         <p:spPr>
           <a:xfrm>
-            <a:off x="502920" y="3154680"/>
-            <a:ext cx="8138160" cy="1188720"/>
+            <a:off x="502920" y="3977640"/>
+            <a:ext cx="8138160" cy="594360"/>
           </a:xfrm>
           <a:prstGeom prst="rect">
             <a:avLst/>
@@ -11391,7 +11901,7 @@
                 <a:ea typeface="Consolas" pitchFamily="34" charset="-122"/>
                 <a:cs typeface="Consolas" pitchFamily="34" charset="-120"/>
               </a:rPr>
-              <a:t>tools:</a:t>
+              <a:t>azd ai project set $PROJECT_ENDPOINT</a:t>
             </a:r>
             <a:endParaRPr lang="en-US" sz="1200" dirty="0"/>
           </a:p>
@@ -11408,133 +11918,9 @@
                 <a:ea typeface="Consolas" pitchFamily="34" charset="-122"/>
                 <a:cs typeface="Consolas" pitchFamily="34" charset="-120"/>
               </a:rPr>
-              <a:t>  - type: azure_ai_search</a:t>
+              <a:t>azd ai toolbox create my-toolbox --from-file ./my-toolbox.yaml</a:t>
             </a:r>
             <a:endParaRPr lang="en-US" sz="1200" dirty="0"/>
-          </a:p>
-          <a:p>
-            <a:pPr indent="0" marL="0">
-              <a:buNone/>
-            </a:pPr>
-            <a:r>
-              <a:rPr lang="en-US" sz="1200" dirty="0">
-                <a:solidFill>
-                  <a:srgbClr val="212121"/>
-                </a:solidFill>
-                <a:latin typeface="Consolas" pitchFamily="34" charset="0"/>
-                <a:ea typeface="Consolas" pitchFamily="34" charset="-122"/>
-                <a:cs typeface="Consolas" pitchFamily="34" charset="-120"/>
-              </a:rPr>
-              <a:t>    name: search</a:t>
-            </a:r>
-            <a:endParaRPr lang="en-US" sz="1200" dirty="0"/>
-          </a:p>
-          <a:p>
-            <a:pPr indent="0" marL="0">
-              <a:buNone/>
-            </a:pPr>
-            <a:r>
-              <a:rPr lang="en-US" sz="1200" dirty="0">
-                <a:solidFill>
-                  <a:srgbClr val="212121"/>
-                </a:solidFill>
-                <a:latin typeface="Consolas" pitchFamily="34" charset="0"/>
-                <a:ea typeface="Consolas" pitchFamily="34" charset="-122"/>
-                <a:cs typeface="Consolas" pitchFamily="34" charset="-120"/>
-              </a:rPr>
-              <a:t>    azure_ai_search:</a:t>
-            </a:r>
-            <a:endParaRPr lang="en-US" sz="1200" dirty="0"/>
-          </a:p>
-          <a:p>
-            <a:pPr indent="0" marL="0">
-              <a:buNone/>
-            </a:pPr>
-            <a:r>
-              <a:rPr lang="en-US" sz="1200" dirty="0">
-                <a:solidFill>
-                  <a:srgbClr val="212121"/>
-                </a:solidFill>
-                <a:latin typeface="Consolas" pitchFamily="34" charset="0"/>
-                <a:ea typeface="Consolas" pitchFamily="34" charset="-122"/>
-                <a:cs typeface="Consolas" pitchFamily="34" charset="-120"/>
-              </a:rPr>
-              <a:t>      indexes:</a:t>
-            </a:r>
-            <a:endParaRPr lang="en-US" sz="1200" dirty="0"/>
-          </a:p>
-          <a:p>
-            <a:pPr indent="0" marL="0">
-              <a:buNone/>
-            </a:pPr>
-            <a:r>
-              <a:rPr lang="en-US" sz="1200" dirty="0">
-                <a:solidFill>
-                  <a:srgbClr val="212121"/>
-                </a:solidFill>
-                <a:latin typeface="Consolas" pitchFamily="34" charset="0"/>
-                <a:ea typeface="Consolas" pitchFamily="34" charset="-122"/>
-                <a:cs typeface="Consolas" pitchFamily="34" charset="-120"/>
-              </a:rPr>
-              <a:t>        - project_connection_id: my-search-conn</a:t>
-            </a:r>
-            <a:endParaRPr lang="en-US" sz="1200" dirty="0"/>
-          </a:p>
-          <a:p>
-            <a:pPr indent="0" marL="0">
-              <a:buNone/>
-            </a:pPr>
-            <a:r>
-              <a:rPr lang="en-US" sz="1200" dirty="0">
-                <a:solidFill>
-                  <a:srgbClr val="212121"/>
-                </a:solidFill>
-                <a:latin typeface="Consolas" pitchFamily="34" charset="0"/>
-                <a:ea typeface="Consolas" pitchFamily="34" charset="-122"/>
-                <a:cs typeface="Consolas" pitchFamily="34" charset="-120"/>
-              </a:rPr>
-              <a:t>          index_name: docs-index</a:t>
-            </a:r>
-            <a:endParaRPr lang="en-US" sz="1200" dirty="0"/>
-          </a:p>
-        </p:txBody>
-      </p:sp>
-      <p:sp>
-        <p:nvSpPr>
-          <p:cNvPr id="11" name="Text 9"/>
-          <p:cNvSpPr/>
-          <p:nvPr/>
-        </p:nvSpPr>
-        <p:spPr>
-          <a:xfrm>
-            <a:off x="365760" y="4480560"/>
-            <a:ext cx="8412480" cy="365760"/>
-          </a:xfrm>
-          <a:prstGeom prst="rect">
-            <a:avLst/>
-          </a:prstGeom>
-          <a:noFill/>
-          <a:ln/>
-        </p:spPr>
-        <p:txBody>
-          <a:bodyPr wrap="square" rtlCol="0" anchor="ctr"/>
-          <a:lstStyle/>
-          <a:p>
-            <a:pPr indent="0" marL="0">
-              <a:buNone/>
-            </a:pPr>
-            <a:r>
-              <a:rPr lang="en-US" sz="1100" i="1" dirty="0">
-                <a:solidFill>
-                  <a:srgbClr val="6B7280"/>
-                </a:solidFill>
-                <a:latin typeface="Calibri" pitchFamily="34" charset="0"/>
-                <a:ea typeface="Calibri" pitchFamily="34" charset="-122"/>
-                <a:cs typeface="Calibri" pitchFamily="34" charset="-120"/>
-              </a:rPr>
-              <a:t>Managed identity means the toolbox authenticates as itself — no long-lived keys.</a:t>
-            </a:r>
-            <a:endParaRPr lang="en-US" sz="1100" dirty="0"/>
           </a:p>
         </p:txBody>
       </p:sp>

--- a/decks/day2/module-5-foundry-toolbox.pptx
+++ b/decks/day2/module-5-foundry-toolbox.pptx
@@ -23,10 +23,9 @@
     <p:sldId id="271" r:id="rId17"/>
     <p:sldId id="272" r:id="rId18"/>
     <p:sldId id="273" r:id="rId19"/>
-    <p:sldId id="274" r:id="rId20"/>
   </p:sldIdLst>
   <p:notesMasterIdLst>
-    <p:notesMasterId r:id="rId21"/>
+    <p:notesMasterId r:id="rId20"/>
   </p:notesMasterIdLst>
   <p:sldSz cx="9144000" cy="5143500"/>
   <p:notesSz cx="5143500" cy="9144000"/>
@@ -1159,10 +1158,10 @@
           <a:p>
             <a:r>
               <a:rPr lang="en-US" dirty="0"/>
-              <a:t>• Four-step workflow — attendees will run this in production
-• Test at developer endpoint, promote to default
-• No agent redeploy — the consumer endpoint always serves default
-• Same publish discipline as Prompt agents (Day 1 Module 6)</a:t>
+              <a:t>• Decision framework — left vs. right
+• Function tools = flexibility, quick prototyping
+• Toolbox = shared, governed, enterprise-integrated
+• The bottom line = mix. Sets up Module 6 next.</a:t>
             </a:r>
             <a:endParaRPr lang="en-US" dirty="0"/>
           </a:p>
@@ -1250,10 +1249,11 @@
           <a:p>
             <a:r>
               <a:rPr lang="en-US" dirty="0"/>
-              <a:t>• Decision framework — left vs. right
-• Function tools = flexibility, quick prototyping
-• Toolbox = shared, governed, enterprise-integrated
-• The bottom line = mix. Sets up Module 6 next.</a:t>
+              <a:t>• Six traps — same pattern as prior modules
+• The credentials-in-YAML trap is the biggest — attendees WILL try to shortcut
+• Endpoint confusion catches everyone once
+• 'Cost' bullet is real — Bing has per-call pricing
+• RAI policy is the governance win most attendees skip</a:t>
             </a:r>
             <a:endParaRPr lang="en-US" dirty="0"/>
           </a:p>
@@ -1341,11 +1341,9 @@
           <a:p>
             <a:r>
               <a:rPr lang="en-US" dirty="0"/>
-              <a:t>• Six traps — same pattern as prior modules
-• The credentials-in-YAML trap is the biggest — attendees WILL try to shortcut
-• Endpoint confusion catches everyone once
-• 'Cost' bullet is real — Bing has per-call pricing
-• RAI policy is the governance win most attendees skip</a:t>
+              <a:t>• Six-bullet recap
+• Bridge to Module 6 — the hands-on tool authoring
+• Time check — Modules 1+2+3+4+5 = ~160 min in against 240 budget</a:t>
             </a:r>
             <a:endParaRPr lang="en-US" dirty="0"/>
           </a:p>
@@ -1369,96 +1367,6 @@
             <a:fld id="{F7021451-1387-4CA6-816F-3879F97B5CBC}" type="slidenum">
               <a:rPr lang="en-US"/>
               <a:t>18</a:t>
-            </a:fld>
-            <a:endParaRPr lang="en-US"/>
-          </a:p>
-        </p:txBody>
-      </p:sp>
-    </p:spTree>
-    <p:extLst>
-      <p:ext uri="{BB962C8B-B14F-4D97-AF65-F5344CB8AC3E}">
-        <p14:creationId xmlns:p14="http://schemas.microsoft.com/office/powerpoint/2010/main" val="1024086991"/>
-      </p:ext>
-    </p:extLst>
-  </p:cSld>
-  <p:clrMapOvr>
-    <a:masterClrMapping/>
-  </p:clrMapOvr>
-</p:notes>
-</file>
-
-<file path=ppt/notesSlides/notesSlide19.xml><?xml version="1.0" encoding="utf-8"?>
-<p:notes xmlns:a="http://schemas.openxmlformats.org/drawingml/2006/main" xmlns:r="http://schemas.openxmlformats.org/officeDocument/2006/relationships" xmlns:p="http://schemas.openxmlformats.org/presentationml/2006/main">
-  <p:cSld>
-    <p:spTree>
-      <p:nvGrpSpPr>
-        <p:cNvPr id="1" name=""/>
-        <p:cNvGrpSpPr/>
-        <p:nvPr/>
-      </p:nvGrpSpPr>
-      <p:grpSpPr>
-        <a:xfrm>
-          <a:off x="0" y="0"/>
-          <a:ext cx="0" cy="0"/>
-          <a:chOff x="0" y="0"/>
-          <a:chExt cx="0" cy="0"/>
-        </a:xfrm>
-      </p:grpSpPr>
-      <p:sp>
-        <p:nvSpPr>
-          <p:cNvPr id="2" name="Slide Image Placeholder 1"/>
-          <p:cNvSpPr>
-            <a:spLocks noGrp="1" noRot="1" noChangeAspect="1"/>
-          </p:cNvSpPr>
-          <p:nvPr>
-            <p:ph type="sldImg"/>
-          </p:nvPr>
-        </p:nvSpPr>
-        <p:spPr/>
-      </p:sp>
-      <p:sp>
-        <p:nvSpPr>
-          <p:cNvPr id="3" name="Notes Placeholder 2"/>
-          <p:cNvSpPr>
-            <a:spLocks noGrp="1"/>
-          </p:cNvSpPr>
-          <p:nvPr>
-            <p:ph type="body" idx="1"/>
-          </p:nvPr>
-        </p:nvSpPr>
-        <p:spPr/>
-        <p:txBody>
-          <a:bodyPr/>
-          <a:lstStyle/>
-          <a:p>
-            <a:r>
-              <a:rPr lang="en-US" dirty="0"/>
-              <a:t>• Six-bullet recap
-• Bridge to Module 6 — the hands-on tool authoring
-• Time check — Modules 1+2+3+4+5 = ~160 min in against 240 budget</a:t>
-            </a:r>
-            <a:endParaRPr lang="en-US" dirty="0"/>
-          </a:p>
-        </p:txBody>
-      </p:sp>
-      <p:sp>
-        <p:nvSpPr>
-          <p:cNvPr id="4" name="Slide Number Placeholder 3"/>
-          <p:cNvSpPr>
-            <a:spLocks noGrp="1"/>
-          </p:cNvSpPr>
-          <p:nvPr>
-            <p:ph type="sldNum" sz="quarter" idx="10"/>
-          </p:nvPr>
-        </p:nvSpPr>
-        <p:spPr/>
-        <p:txBody>
-          <a:bodyPr/>
-          <a:lstStyle/>
-          <a:p>
-            <a:fld id="{F7021451-1387-4CA6-816F-3879F97B5CBC}" type="slidenum">
-              <a:rPr lang="en-US"/>
-              <a:t>19</a:t>
             </a:fld>
             <a:endParaRPr lang="en-US"/>
           </a:p>
@@ -5760,7 +5668,7 @@
                 <a:ea typeface="Calibri" pitchFamily="34" charset="-122"/>
                 <a:cs typeface="Calibri" pitchFamily="34" charset="-120"/>
               </a:rPr>
-              <a:t>Versioning workflow</a:t>
+              <a:t>When to build a function tool instead</a:t>
             </a:r>
             <a:endParaRPr lang="en-US" sz="2800" dirty="0"/>
           </a:p>
@@ -5775,6 +5683,296 @@
         <p:spPr>
           <a:xfrm>
             <a:off x="365760" y="1097280"/>
+            <a:ext cx="4069080" cy="365760"/>
+          </a:xfrm>
+          <a:prstGeom prst="rect">
+            <a:avLst/>
+          </a:prstGeom>
+          <a:noFill/>
+          <a:ln/>
+        </p:spPr>
+        <p:txBody>
+          <a:bodyPr wrap="square" lIns="0" tIns="0" rIns="0" bIns="0" rtlCol="0" anchor="ctr"/>
+          <a:lstStyle/>
+          <a:p>
+            <a:pPr indent="0" marL="0">
+              <a:buNone/>
+            </a:pPr>
+            <a:r>
+              <a:rPr lang="en-US" sz="2000" b="1" dirty="0">
+                <a:solidFill>
+                  <a:srgbClr val="1E2761"/>
+                </a:solidFill>
+                <a:latin typeface="Calibri" pitchFamily="34" charset="0"/>
+                <a:ea typeface="Calibri" pitchFamily="34" charset="-122"/>
+                <a:cs typeface="Calibri" pitchFamily="34" charset="-120"/>
+              </a:rPr>
+              <a:t>Custom function tool (Module 6)</a:t>
+            </a:r>
+            <a:endParaRPr lang="en-US" sz="2000" dirty="0"/>
+          </a:p>
+        </p:txBody>
+      </p:sp>
+      <p:sp>
+        <p:nvSpPr>
+          <p:cNvPr id="6" name="Text 4"/>
+          <p:cNvSpPr/>
+          <p:nvPr/>
+        </p:nvSpPr>
+        <p:spPr>
+          <a:xfrm>
+            <a:off x="4709160" y="1097280"/>
+            <a:ext cx="4069080" cy="365760"/>
+          </a:xfrm>
+          <a:prstGeom prst="rect">
+            <a:avLst/>
+          </a:prstGeom>
+          <a:noFill/>
+          <a:ln/>
+        </p:spPr>
+        <p:txBody>
+          <a:bodyPr wrap="square" lIns="0" tIns="0" rIns="0" bIns="0" rtlCol="0" anchor="ctr"/>
+          <a:lstStyle/>
+          <a:p>
+            <a:pPr indent="0" marL="0">
+              <a:buNone/>
+            </a:pPr>
+            <a:r>
+              <a:rPr lang="en-US" sz="2000" b="1" dirty="0">
+                <a:solidFill>
+                  <a:srgbClr val="1E2761"/>
+                </a:solidFill>
+                <a:latin typeface="Calibri" pitchFamily="34" charset="0"/>
+                <a:ea typeface="Calibri" pitchFamily="34" charset="-122"/>
+                <a:cs typeface="Calibri" pitchFamily="34" charset="-120"/>
+              </a:rPr>
+              <a:t>Foundry Toolbox</a:t>
+            </a:r>
+            <a:endParaRPr lang="en-US" sz="2000" dirty="0"/>
+          </a:p>
+        </p:txBody>
+      </p:sp>
+      <p:sp>
+        <p:nvSpPr>
+          <p:cNvPr id="7" name="Text 5"/>
+          <p:cNvSpPr/>
+          <p:nvPr/>
+        </p:nvSpPr>
+        <p:spPr>
+          <a:xfrm>
+            <a:off x="365760" y="1554480"/>
+            <a:ext cx="4069080" cy="3291840"/>
+          </a:xfrm>
+          <a:prstGeom prst="rect">
+            <a:avLst/>
+          </a:prstGeom>
+          <a:noFill/>
+          <a:ln/>
+        </p:spPr>
+        <p:txBody>
+          <a:bodyPr wrap="square" rtlCol="0" anchor="ctr"/>
+          <a:lstStyle/>
+          <a:p>
+            <a:pPr marL="342900" indent="-342900">
+              <a:spcAft>
+                <a:spcPts val="600"/>
+              </a:spcAft>
+              <a:buSzPct val="100000"/>
+              <a:buChar char="•"/>
+            </a:pPr>
+            <a:r>
+              <a:rPr lang="en-US" sz="1500" dirty="0">
+                <a:solidFill>
+                  <a:srgbClr val="212121"/>
+                </a:solidFill>
+                <a:latin typeface="Calibri" pitchFamily="34" charset="0"/>
+                <a:ea typeface="Calibri" pitchFamily="34" charset="-122"/>
+                <a:cs typeface="Calibri" pitchFamily="34" charset="-120"/>
+              </a:rPr>
+              <a:t>Logic doesn't fit any Toolbox catalog entry</a:t>
+            </a:r>
+            <a:endParaRPr lang="en-US" sz="1500" dirty="0"/>
+          </a:p>
+          <a:p>
+            <a:pPr marL="342900" indent="-342900">
+              <a:spcAft>
+                <a:spcPts val="600"/>
+              </a:spcAft>
+              <a:buSzPct val="100000"/>
+              <a:buChar char="•"/>
+            </a:pPr>
+            <a:r>
+              <a:rPr lang="en-US" sz="1500" dirty="0">
+                <a:solidFill>
+                  <a:srgbClr val="212121"/>
+                </a:solidFill>
+                <a:latin typeface="Calibri" pitchFamily="34" charset="0"/>
+                <a:ea typeface="Calibri" pitchFamily="34" charset="-122"/>
+                <a:cs typeface="Calibri" pitchFamily="34" charset="-120"/>
+              </a:rPr>
+              <a:t>Runtime context Toolbox model can't express (per-user filtering, session state)</a:t>
+            </a:r>
+            <a:endParaRPr lang="en-US" sz="1500" dirty="0"/>
+          </a:p>
+          <a:p>
+            <a:pPr marL="342900" indent="-342900">
+              <a:spcAft>
+                <a:spcPts val="600"/>
+              </a:spcAft>
+              <a:buSzPct val="100000"/>
+              <a:buChar char="•"/>
+            </a:pPr>
+            <a:r>
+              <a:rPr lang="en-US" sz="1500" dirty="0">
+                <a:solidFill>
+                  <a:srgbClr val="212121"/>
+                </a:solidFill>
+                <a:latin typeface="Calibri" pitchFamily="34" charset="0"/>
+                <a:ea typeface="Calibri" pitchFamily="34" charset="-122"/>
+                <a:cs typeface="Calibri" pitchFamily="34" charset="-120"/>
+              </a:rPr>
+              <a:t>Prototyping fast — don't want to publish a toolbox yet</a:t>
+            </a:r>
+            <a:endParaRPr lang="en-US" sz="1500" dirty="0"/>
+          </a:p>
+          <a:p>
+            <a:pPr marL="342900" indent="-342900">
+              <a:spcAft>
+                <a:spcPts val="600"/>
+              </a:spcAft>
+              <a:buSzPct val="100000"/>
+              <a:buChar char="•"/>
+            </a:pPr>
+            <a:r>
+              <a:rPr lang="en-US" sz="1500" dirty="0">
+                <a:solidFill>
+                  <a:srgbClr val="212121"/>
+                </a:solidFill>
+                <a:latin typeface="Calibri" pitchFamily="34" charset="0"/>
+                <a:ea typeface="Calibri" pitchFamily="34" charset="-122"/>
+                <a:cs typeface="Calibri" pitchFamily="34" charset="-120"/>
+              </a:rPr>
+              <a:t>Tool talks to something inside your app's process (in-memory cache, local model)</a:t>
+            </a:r>
+            <a:endParaRPr lang="en-US" sz="1500" dirty="0"/>
+          </a:p>
+        </p:txBody>
+      </p:sp>
+      <p:sp>
+        <p:nvSpPr>
+          <p:cNvPr id="8" name="Text 6"/>
+          <p:cNvSpPr/>
+          <p:nvPr/>
+        </p:nvSpPr>
+        <p:spPr>
+          <a:xfrm>
+            <a:off x="4709160" y="1554480"/>
+            <a:ext cx="4069080" cy="3291840"/>
+          </a:xfrm>
+          <a:prstGeom prst="rect">
+            <a:avLst/>
+          </a:prstGeom>
+          <a:noFill/>
+          <a:ln/>
+        </p:spPr>
+        <p:txBody>
+          <a:bodyPr wrap="square" rtlCol="0" anchor="ctr"/>
+          <a:lstStyle/>
+          <a:p>
+            <a:pPr marL="342900" indent="-342900">
+              <a:spcAft>
+                <a:spcPts val="600"/>
+              </a:spcAft>
+              <a:buSzPct val="100000"/>
+              <a:buChar char="•"/>
+            </a:pPr>
+            <a:r>
+              <a:rPr lang="en-US" sz="1500" dirty="0">
+                <a:solidFill>
+                  <a:srgbClr val="212121"/>
+                </a:solidFill>
+                <a:latin typeface="Calibri" pitchFamily="34" charset="0"/>
+                <a:ea typeface="Calibri" pitchFamily="34" charset="-122"/>
+                <a:cs typeface="Calibri" pitchFamily="34" charset="-120"/>
+              </a:rPr>
+              <a:t>Tool is a shared capability across agents</a:t>
+            </a:r>
+            <a:endParaRPr lang="en-US" sz="1500" dirty="0"/>
+          </a:p>
+          <a:p>
+            <a:pPr marL="342900" indent="-342900">
+              <a:spcAft>
+                <a:spcPts val="600"/>
+              </a:spcAft>
+              <a:buSzPct val="100000"/>
+              <a:buChar char="•"/>
+            </a:pPr>
+            <a:r>
+              <a:rPr lang="en-US" sz="1500" dirty="0">
+                <a:solidFill>
+                  <a:srgbClr val="212121"/>
+                </a:solidFill>
+                <a:latin typeface="Calibri" pitchFamily="34" charset="0"/>
+                <a:ea typeface="Calibri" pitchFamily="34" charset="-122"/>
+                <a:cs typeface="Calibri" pitchFamily="34" charset="-120"/>
+              </a:rPr>
+              <a:t>Want central governance, RBAC, and audit</a:t>
+            </a:r>
+            <a:endParaRPr lang="en-US" sz="1500" dirty="0"/>
+          </a:p>
+          <a:p>
+            <a:pPr marL="342900" indent="-342900">
+              <a:spcAft>
+                <a:spcPts val="600"/>
+              </a:spcAft>
+              <a:buSzPct val="100000"/>
+              <a:buChar char="•"/>
+            </a:pPr>
+            <a:r>
+              <a:rPr lang="en-US" sz="1500" dirty="0">
+                <a:solidFill>
+                  <a:srgbClr val="212121"/>
+                </a:solidFill>
+                <a:latin typeface="Calibri" pitchFamily="34" charset="0"/>
+                <a:ea typeface="Calibri" pitchFamily="34" charset="-122"/>
+                <a:cs typeface="Calibri" pitchFamily="34" charset="-120"/>
+              </a:rPr>
+              <a:t>Integrates with a supported enterprise system (SharePoint, Fabric, Bing, AI Search, MCP)</a:t>
+            </a:r>
+            <a:endParaRPr lang="en-US" sz="1500" dirty="0"/>
+          </a:p>
+          <a:p>
+            <a:pPr marL="342900" indent="-342900">
+              <a:spcAft>
+                <a:spcPts val="600"/>
+              </a:spcAft>
+              <a:buSzPct val="100000"/>
+              <a:buChar char="•"/>
+            </a:pPr>
+            <a:r>
+              <a:rPr lang="en-US" sz="1500" dirty="0">
+                <a:solidFill>
+                  <a:srgbClr val="212121"/>
+                </a:solidFill>
+                <a:latin typeface="Calibri" pitchFamily="34" charset="0"/>
+                <a:ea typeface="Calibri" pitchFamily="34" charset="-122"/>
+                <a:cs typeface="Calibri" pitchFamily="34" charset="-120"/>
+              </a:rPr>
+              <a:t>Want versioning as a first-class concern</a:t>
+            </a:r>
+            <a:endParaRPr lang="en-US" sz="1500" dirty="0"/>
+          </a:p>
+        </p:txBody>
+      </p:sp>
+      <p:sp>
+        <p:nvSpPr>
+          <p:cNvPr id="9" name="Text 7"/>
+          <p:cNvSpPr/>
+          <p:nvPr/>
+        </p:nvSpPr>
+        <p:spPr>
+          <a:xfrm>
+            <a:off x="365760" y="4434840"/>
             <a:ext cx="8412480" cy="365760"/>
           </a:xfrm>
           <a:prstGeom prst="rect">
@@ -5791,162 +5989,17 @@
               <a:buNone/>
             </a:pPr>
             <a:r>
-              <a:rPr lang="en-US" sz="1400" dirty="0">
-                <a:solidFill>
-                  <a:srgbClr val="212121"/>
-                </a:solidFill>
-                <a:latin typeface="Calibri" pitchFamily="34" charset="0"/>
-                <a:ea typeface="Calibri" pitchFamily="34" charset="-122"/>
-                <a:cs typeface="Calibri" pitchFamily="34" charset="-120"/>
-              </a:rPr>
-              <a:t>Standard workflow you'll use:</a:t>
-            </a:r>
-            <a:endParaRPr lang="en-US" sz="1400" dirty="0"/>
-          </a:p>
-        </p:txBody>
-      </p:sp>
-      <p:sp>
-        <p:nvSpPr>
-          <p:cNvPr id="6" name="Text 4"/>
-          <p:cNvSpPr/>
-          <p:nvPr/>
-        </p:nvSpPr>
-        <p:spPr>
-          <a:xfrm>
-            <a:off x="365760" y="1417320"/>
-            <a:ext cx="8412480" cy="2377440"/>
-          </a:xfrm>
-          <a:prstGeom prst="rect">
-            <a:avLst/>
-          </a:prstGeom>
-          <a:noFill/>
-          <a:ln/>
-        </p:spPr>
-        <p:txBody>
-          <a:bodyPr wrap="square" rtlCol="0" anchor="ctr"/>
-          <a:lstStyle/>
-          <a:p>
-            <a:pPr marL="342900" indent="-342900">
-              <a:spcAft>
-                <a:spcPts val="600"/>
-              </a:spcAft>
-              <a:buSzPct val="100000"/>
-              <a:buChar char="•"/>
-            </a:pPr>
-            <a:r>
-              <a:rPr lang="en-US" sz="1200" dirty="0">
-                <a:solidFill>
-                  <a:srgbClr val="212121"/>
-                </a:solidFill>
-                <a:latin typeface="Calibri" pitchFamily="34" charset="0"/>
-                <a:ea typeface="Calibri" pitchFamily="34" charset="-122"/>
-                <a:cs typeface="Calibri" pitchFamily="34" charset="-120"/>
-              </a:rPr>
-              <a:t>Create v1 → automatically the default → agents consume via the consumer endpoint</a:t>
-            </a:r>
-            <a:endParaRPr lang="en-US" sz="1200" dirty="0"/>
-          </a:p>
-          <a:p>
-            <a:pPr marL="342900" indent="-342900">
-              <a:spcAft>
-                <a:spcPts val="600"/>
-              </a:spcAft>
-              <a:buSzPct val="100000"/>
-              <a:buChar char="•"/>
-            </a:pPr>
-            <a:r>
-              <a:rPr lang="en-US" sz="1200" dirty="0">
-                <a:solidFill>
-                  <a:srgbClr val="212121"/>
-                </a:solidFill>
-                <a:latin typeface="Calibri" pitchFamily="34" charset="0"/>
-                <a:ea typeface="Calibri" pitchFamily="34" charset="-122"/>
-                <a:cs typeface="Calibri" pitchFamily="34" charset="-120"/>
-              </a:rPr>
-              <a:t>Author v2 (add a tool, tighten a description, swap an MCP connection)</a:t>
-            </a:r>
-            <a:endParaRPr lang="en-US" sz="1200" dirty="0"/>
-          </a:p>
-          <a:p>
-            <a:pPr marL="342900" indent="-342900">
-              <a:spcAft>
-                <a:spcPts val="600"/>
-              </a:spcAft>
-              <a:buSzPct val="100000"/>
-              <a:buChar char="•"/>
-            </a:pPr>
-            <a:r>
-              <a:rPr lang="en-US" sz="1200" dirty="0">
-                <a:solidFill>
-                  <a:srgbClr val="212121"/>
-                </a:solidFill>
-                <a:latin typeface="Calibri" pitchFamily="34" charset="0"/>
-                <a:ea typeface="Calibri" pitchFamily="34" charset="-122"/>
-                <a:cs typeface="Calibri" pitchFamily="34" charset="-120"/>
-              </a:rPr>
-              <a:t>Test against the developer endpoint (/versions/2/mcp) before promotion</a:t>
-            </a:r>
-            <a:endParaRPr lang="en-US" sz="1200" dirty="0"/>
-          </a:p>
-          <a:p>
-            <a:pPr marL="342900" indent="-342900">
-              <a:spcAft>
-                <a:spcPts val="600"/>
-              </a:spcAft>
-              <a:buSzPct val="100000"/>
-              <a:buChar char="•"/>
-            </a:pPr>
-            <a:r>
-              <a:rPr lang="en-US" sz="1200" dirty="0">
-                <a:solidFill>
-                  <a:srgbClr val="212121"/>
-                </a:solidFill>
-                <a:latin typeface="Calibri" pitchFamily="34" charset="0"/>
-                <a:ea typeface="Calibri" pitchFamily="34" charset="-122"/>
-                <a:cs typeface="Calibri" pitchFamily="34" charset="-120"/>
-              </a:rPr>
-              <a:t>Promote v2 to default when validated → agents pick it up on their next call, no code change</a:t>
-            </a:r>
-            <a:endParaRPr lang="en-US" sz="1200" dirty="0"/>
-          </a:p>
-        </p:txBody>
-      </p:sp>
-      <p:sp>
-        <p:nvSpPr>
-          <p:cNvPr id="7" name="Text 5"/>
-          <p:cNvSpPr/>
-          <p:nvPr/>
-        </p:nvSpPr>
-        <p:spPr>
-          <a:xfrm>
-            <a:off x="365760" y="4069080"/>
-            <a:ext cx="8412480" cy="457200"/>
-          </a:xfrm>
-          <a:prstGeom prst="rect">
-            <a:avLst/>
-          </a:prstGeom>
-          <a:noFill/>
-          <a:ln/>
-        </p:spPr>
-        <p:txBody>
-          <a:bodyPr wrap="square" rtlCol="0" anchor="ctr"/>
-          <a:lstStyle/>
-          <a:p>
-            <a:pPr indent="0" marL="0">
-              <a:buNone/>
-            </a:pPr>
-            <a:r>
-              <a:rPr lang="en-US" sz="1200" i="1" dirty="0">
-                <a:solidFill>
-                  <a:srgbClr val="6B7280"/>
-                </a:solidFill>
-                <a:latin typeface="Calibri" pitchFamily="34" charset="0"/>
-                <a:ea typeface="Calibri" pitchFamily="34" charset="-122"/>
-                <a:cs typeface="Calibri" pitchFamily="34" charset="-120"/>
-              </a:rPr>
-              <a:t>The promote step is the 'ship' moment. Same discipline as Prompt agent versioning from Day 1.</a:t>
-            </a:r>
-            <a:endParaRPr lang="en-US" sz="1200" dirty="0"/>
+              <a:rPr lang="en-US" sz="1300" b="1" i="1" dirty="0">
+                <a:solidFill>
+                  <a:srgbClr val="1E2761"/>
+                </a:solidFill>
+                <a:latin typeface="Calibri" pitchFamily="34" charset="0"/>
+                <a:ea typeface="Calibri" pitchFamily="34" charset="-122"/>
+                <a:cs typeface="Calibri" pitchFamily="34" charset="-120"/>
+              </a:rPr>
+              <a:t>Mix both. Real agents often have tools=[my_function_tool, my_toolbox].</a:t>
+            </a:r>
+            <a:endParaRPr lang="en-US" sz="1300" dirty="0"/>
           </a:p>
         </p:txBody>
       </p:sp>
@@ -6074,7 +6127,7 @@
                 <a:ea typeface="Calibri" pitchFamily="34" charset="-122"/>
                 <a:cs typeface="Calibri" pitchFamily="34" charset="-120"/>
               </a:rPr>
-              <a:t>When to build a function tool instead</a:t>
+              <a:t>Common traps</a:t>
             </a:r>
             <a:endParaRPr lang="en-US" sz="2800" dirty="0"/>
           </a:p>
@@ -6089,7 +6142,7 @@
         <p:spPr>
           <a:xfrm>
             <a:off x="365760" y="1097280"/>
-            <a:ext cx="4069080" cy="365760"/>
+            <a:ext cx="8412480" cy="3200400"/>
           </a:xfrm>
           <a:prstGeom prst="rect">
             <a:avLst/>
@@ -6098,84 +6151,6 @@
           <a:ln/>
         </p:spPr>
         <p:txBody>
-          <a:bodyPr wrap="square" lIns="0" tIns="0" rIns="0" bIns="0" rtlCol="0" anchor="ctr"/>
-          <a:lstStyle/>
-          <a:p>
-            <a:pPr indent="0" marL="0">
-              <a:buNone/>
-            </a:pPr>
-            <a:r>
-              <a:rPr lang="en-US" sz="2000" b="1" dirty="0">
-                <a:solidFill>
-                  <a:srgbClr val="1E2761"/>
-                </a:solidFill>
-                <a:latin typeface="Calibri" pitchFamily="34" charset="0"/>
-                <a:ea typeface="Calibri" pitchFamily="34" charset="-122"/>
-                <a:cs typeface="Calibri" pitchFamily="34" charset="-120"/>
-              </a:rPr>
-              <a:t>Custom function tool (Module 6)</a:t>
-            </a:r>
-            <a:endParaRPr lang="en-US" sz="2000" dirty="0"/>
-          </a:p>
-        </p:txBody>
-      </p:sp>
-      <p:sp>
-        <p:nvSpPr>
-          <p:cNvPr id="6" name="Text 4"/>
-          <p:cNvSpPr/>
-          <p:nvPr/>
-        </p:nvSpPr>
-        <p:spPr>
-          <a:xfrm>
-            <a:off x="4709160" y="1097280"/>
-            <a:ext cx="4069080" cy="365760"/>
-          </a:xfrm>
-          <a:prstGeom prst="rect">
-            <a:avLst/>
-          </a:prstGeom>
-          <a:noFill/>
-          <a:ln/>
-        </p:spPr>
-        <p:txBody>
-          <a:bodyPr wrap="square" lIns="0" tIns="0" rIns="0" bIns="0" rtlCol="0" anchor="ctr"/>
-          <a:lstStyle/>
-          <a:p>
-            <a:pPr indent="0" marL="0">
-              <a:buNone/>
-            </a:pPr>
-            <a:r>
-              <a:rPr lang="en-US" sz="2000" b="1" dirty="0">
-                <a:solidFill>
-                  <a:srgbClr val="1E2761"/>
-                </a:solidFill>
-                <a:latin typeface="Calibri" pitchFamily="34" charset="0"/>
-                <a:ea typeface="Calibri" pitchFamily="34" charset="-122"/>
-                <a:cs typeface="Calibri" pitchFamily="34" charset="-120"/>
-              </a:rPr>
-              <a:t>Foundry Toolbox</a:t>
-            </a:r>
-            <a:endParaRPr lang="en-US" sz="2000" dirty="0"/>
-          </a:p>
-        </p:txBody>
-      </p:sp>
-      <p:sp>
-        <p:nvSpPr>
-          <p:cNvPr id="7" name="Text 5"/>
-          <p:cNvSpPr/>
-          <p:nvPr/>
-        </p:nvSpPr>
-        <p:spPr>
-          <a:xfrm>
-            <a:off x="365760" y="1554480"/>
-            <a:ext cx="4069080" cy="3291840"/>
-          </a:xfrm>
-          <a:prstGeom prst="rect">
-            <a:avLst/>
-          </a:prstGeom>
-          <a:noFill/>
-          <a:ln/>
-        </p:spPr>
-        <p:txBody>
           <a:bodyPr wrap="square" rtlCol="0" anchor="ctr"/>
           <a:lstStyle/>
           <a:p>
@@ -6187,7 +6162,7 @@
               <a:buChar char="•"/>
             </a:pPr>
             <a:r>
-              <a:rPr lang="en-US" sz="1500" dirty="0">
+              <a:rPr lang="en-US" sz="1200" dirty="0">
                 <a:solidFill>
                   <a:srgbClr val="212121"/>
                 </a:solidFill>
@@ -6195,9 +6170,9 @@
                 <a:ea typeface="Calibri" pitchFamily="34" charset="-122"/>
                 <a:cs typeface="Calibri" pitchFamily="34" charset="-120"/>
               </a:rPr>
-              <a:t>Logic doesn't fit any Toolbox catalog entry</a:t>
-            </a:r>
-            <a:endParaRPr lang="en-US" sz="1500" dirty="0"/>
+              <a:t>Credentials in the YAML — don't. Use connections. YAML is checked into source.</a:t>
+            </a:r>
+            <a:endParaRPr lang="en-US" sz="1200" dirty="0"/>
           </a:p>
           <a:p>
             <a:pPr marL="342900" indent="-342900">
@@ -6208,7 +6183,7 @@
               <a:buChar char="•"/>
             </a:pPr>
             <a:r>
-              <a:rPr lang="en-US" sz="1500" dirty="0">
+              <a:rPr lang="en-US" sz="1200" dirty="0">
                 <a:solidFill>
                   <a:srgbClr val="212121"/>
                 </a:solidFill>
@@ -6216,9 +6191,9 @@
                 <a:ea typeface="Calibri" pitchFamily="34" charset="-122"/>
                 <a:cs typeface="Calibri" pitchFamily="34" charset="-120"/>
               </a:rPr>
-              <a:t>Runtime context Toolbox model can't express (per-user filtering, session state)</a:t>
-            </a:r>
-            <a:endParaRPr lang="en-US" sz="1500" dirty="0"/>
+              <a:t>Consumer vs. developer endpoint confusion — agents = consumer; test = developer.</a:t>
+            </a:r>
+            <a:endParaRPr lang="en-US" sz="1200" dirty="0"/>
           </a:p>
           <a:p>
             <a:pPr marL="342900" indent="-342900">
@@ -6229,7 +6204,7 @@
               <a:buChar char="•"/>
             </a:pPr>
             <a:r>
-              <a:rPr lang="en-US" sz="1500" dirty="0">
+              <a:rPr lang="en-US" sz="1200" dirty="0">
                 <a:solidFill>
                   <a:srgbClr val="212121"/>
                 </a:solidFill>
@@ -6237,9 +6212,9 @@
                 <a:ea typeface="Calibri" pitchFamily="34" charset="-122"/>
                 <a:cs typeface="Calibri" pitchFamily="34" charset="-120"/>
               </a:rPr>
-              <a:t>Prototyping fast — don't want to publish a toolbox yet</a:t>
-            </a:r>
-            <a:endParaRPr lang="en-US" sz="1500" dirty="0"/>
+              <a:t>Not testing before promoting — v2 is default the moment you promote. Test /versions/2/mcp first.</a:t>
+            </a:r>
+            <a:endParaRPr lang="en-US" sz="1200" dirty="0"/>
           </a:p>
           <a:p>
             <a:pPr marL="342900" indent="-342900">
@@ -6250,7 +6225,7 @@
               <a:buChar char="•"/>
             </a:pPr>
             <a:r>
-              <a:rPr lang="en-US" sz="1500" dirty="0">
+              <a:rPr lang="en-US" sz="1200" dirty="0">
                 <a:solidFill>
                   <a:srgbClr val="212121"/>
                 </a:solidFill>
@@ -6258,32 +6233,10 @@
                 <a:ea typeface="Calibri" pitchFamily="34" charset="-122"/>
                 <a:cs typeface="Calibri" pitchFamily="34" charset="-120"/>
               </a:rPr>
-              <a:t>Tool talks to something inside your app's process (in-memory cache, local model)</a:t>
-            </a:r>
-            <a:endParaRPr lang="en-US" sz="1500" dirty="0"/>
-          </a:p>
-        </p:txBody>
-      </p:sp>
-      <p:sp>
-        <p:nvSpPr>
-          <p:cNvPr id="8" name="Text 6"/>
-          <p:cNvSpPr/>
-          <p:nvPr/>
-        </p:nvSpPr>
-        <p:spPr>
-          <a:xfrm>
-            <a:off x="4709160" y="1554480"/>
-            <a:ext cx="4069080" cy="3291840"/>
-          </a:xfrm>
-          <a:prstGeom prst="rect">
-            <a:avLst/>
-          </a:prstGeom>
-          <a:noFill/>
-          <a:ln/>
-        </p:spPr>
-        <p:txBody>
-          <a:bodyPr wrap="square" rtlCol="0" anchor="ctr"/>
-          <a:lstStyle/>
+              <a:t>Too many tools in one toolbox — ≤10 per agent applies. Use toolbox_search when &gt;10.</a:t>
+            </a:r>
+            <a:endParaRPr lang="en-US" sz="1200" dirty="0"/>
+          </a:p>
           <a:p>
             <a:pPr marL="342900" indent="-342900">
               <a:spcAft>
@@ -6293,7 +6246,7 @@
               <a:buChar char="•"/>
             </a:pPr>
             <a:r>
-              <a:rPr lang="en-US" sz="1500" dirty="0">
+              <a:rPr lang="en-US" sz="1200" dirty="0">
                 <a:solidFill>
                   <a:srgbClr val="212121"/>
                 </a:solidFill>
@@ -6301,9 +6254,9 @@
                 <a:ea typeface="Calibri" pitchFamily="34" charset="-122"/>
                 <a:cs typeface="Calibri" pitchFamily="34" charset="-120"/>
               </a:rPr>
-              <a:t>Tool is a shared capability across agents</a:t>
-            </a:r>
-            <a:endParaRPr lang="en-US" sz="1500" dirty="0"/>
+              <a:t>Assuming toolbox tools are free — some have per-call costs (Bing, code interpreter). Budget.</a:t>
+            </a:r>
+            <a:endParaRPr lang="en-US" sz="1200" dirty="0"/>
           </a:p>
           <a:p>
             <a:pPr marL="342900" indent="-342900">
@@ -6314,7 +6267,7 @@
               <a:buChar char="•"/>
             </a:pPr>
             <a:r>
-              <a:rPr lang="en-US" sz="1500" dirty="0">
+              <a:rPr lang="en-US" sz="1200" dirty="0">
                 <a:solidFill>
                   <a:srgbClr val="212121"/>
                 </a:solidFill>
@@ -6322,90 +6275,9 @@
                 <a:ea typeface="Calibri" pitchFamily="34" charset="-122"/>
                 <a:cs typeface="Calibri" pitchFamily="34" charset="-120"/>
               </a:rPr>
-              <a:t>Want central governance, RBAC, and audit</a:t>
-            </a:r>
-            <a:endParaRPr lang="en-US" sz="1500" dirty="0"/>
-          </a:p>
-          <a:p>
-            <a:pPr marL="342900" indent="-342900">
-              <a:spcAft>
-                <a:spcPts val="600"/>
-              </a:spcAft>
-              <a:buSzPct val="100000"/>
-              <a:buChar char="•"/>
-            </a:pPr>
-            <a:r>
-              <a:rPr lang="en-US" sz="1500" dirty="0">
-                <a:solidFill>
-                  <a:srgbClr val="212121"/>
-                </a:solidFill>
-                <a:latin typeface="Calibri" pitchFamily="34" charset="0"/>
-                <a:ea typeface="Calibri" pitchFamily="34" charset="-122"/>
-                <a:cs typeface="Calibri" pitchFamily="34" charset="-120"/>
-              </a:rPr>
-              <a:t>Integrates with a supported enterprise system (SharePoint, Fabric, Bing, AI Search, MCP)</a:t>
-            </a:r>
-            <a:endParaRPr lang="en-US" sz="1500" dirty="0"/>
-          </a:p>
-          <a:p>
-            <a:pPr marL="342900" indent="-342900">
-              <a:spcAft>
-                <a:spcPts val="600"/>
-              </a:spcAft>
-              <a:buSzPct val="100000"/>
-              <a:buChar char="•"/>
-            </a:pPr>
-            <a:r>
-              <a:rPr lang="en-US" sz="1500" dirty="0">
-                <a:solidFill>
-                  <a:srgbClr val="212121"/>
-                </a:solidFill>
-                <a:latin typeface="Calibri" pitchFamily="34" charset="0"/>
-                <a:ea typeface="Calibri" pitchFamily="34" charset="-122"/>
-                <a:cs typeface="Calibri" pitchFamily="34" charset="-120"/>
-              </a:rPr>
-              <a:t>Want versioning as a first-class concern</a:t>
-            </a:r>
-            <a:endParaRPr lang="en-US" sz="1500" dirty="0"/>
-          </a:p>
-        </p:txBody>
-      </p:sp>
-      <p:sp>
-        <p:nvSpPr>
-          <p:cNvPr id="9" name="Text 7"/>
-          <p:cNvSpPr/>
-          <p:nvPr/>
-        </p:nvSpPr>
-        <p:spPr>
-          <a:xfrm>
-            <a:off x="365760" y="4434840"/>
-            <a:ext cx="8412480" cy="365760"/>
-          </a:xfrm>
-          <a:prstGeom prst="rect">
-            <a:avLst/>
-          </a:prstGeom>
-          <a:noFill/>
-          <a:ln/>
-        </p:spPr>
-        <p:txBody>
-          <a:bodyPr wrap="square" rtlCol="0" anchor="ctr"/>
-          <a:lstStyle/>
-          <a:p>
-            <a:pPr indent="0" marL="0">
-              <a:buNone/>
-            </a:pPr>
-            <a:r>
-              <a:rPr lang="en-US" sz="1300" b="1" i="1" dirty="0">
-                <a:solidFill>
-                  <a:srgbClr val="1E2761"/>
-                </a:solidFill>
-                <a:latin typeface="Calibri" pitchFamily="34" charset="0"/>
-                <a:ea typeface="Calibri" pitchFamily="34" charset="-122"/>
-                <a:cs typeface="Calibri" pitchFamily="34" charset="-120"/>
-              </a:rPr>
-              <a:t>Mix both. Real agents often have tools=[my_function_tool, my_toolbox].</a:t>
-            </a:r>
-            <a:endParaRPr lang="en-US" sz="1300" dirty="0"/>
+              <a:t>Skipping RAI policy — toolbox is the right place to enforce content safety centrally. Use it.</a:t>
+            </a:r>
+            <a:endParaRPr lang="en-US" sz="1200" dirty="0"/>
           </a:p>
         </p:txBody>
       </p:sp>
@@ -6420,284 +6292,6 @@
 <file path=ppt/slides/slide18.xml><?xml version="1.0" encoding="utf-8"?>
 <p:sld xmlns:a="http://schemas.openxmlformats.org/drawingml/2006/main" xmlns:r="http://schemas.openxmlformats.org/officeDocument/2006/relationships" xmlns:p="http://schemas.openxmlformats.org/presentationml/2006/main">
   <p:cSld name="Slide 18">
-    <p:bg>
-      <p:bgPr>
-        <a:solidFill>
-          <a:srgbClr val="FFFFFF"/>
-        </a:solidFill>
-      </p:bgPr>
-    </p:bg>
-    <p:spTree>
-      <p:nvGrpSpPr>
-        <p:cNvPr id="1" name=""/>
-        <p:cNvGrpSpPr/>
-        <p:nvPr/>
-      </p:nvGrpSpPr>
-      <p:grpSpPr>
-        <a:xfrm>
-          <a:off x="0" y="0"/>
-          <a:ext cx="0" cy="0"/>
-          <a:chOff x="0" y="0"/>
-          <a:chExt cx="0" cy="0"/>
-        </a:xfrm>
-      </p:grpSpPr>
-      <p:sp>
-        <p:nvSpPr>
-          <p:cNvPr id="2" name="Shape 0"/>
-          <p:cNvSpPr/>
-          <p:nvPr/>
-        </p:nvSpPr>
-        <p:spPr>
-          <a:xfrm>
-            <a:off x="0" y="0"/>
-            <a:ext cx="54864" cy="5143500"/>
-          </a:xfrm>
-          <a:prstGeom prst="rect">
-            <a:avLst/>
-          </a:prstGeom>
-          <a:solidFill>
-            <a:srgbClr val="1E2761"/>
-          </a:solidFill>
-          <a:ln/>
-        </p:spPr>
-      </p:sp>
-      <p:sp>
-        <p:nvSpPr>
-          <p:cNvPr id="3" name="Text 1"/>
-          <p:cNvSpPr/>
-          <p:nvPr/>
-        </p:nvSpPr>
-        <p:spPr>
-          <a:xfrm>
-            <a:off x="5669280" y="274320"/>
-            <a:ext cx="3291840" cy="274320"/>
-          </a:xfrm>
-          <a:prstGeom prst="rect">
-            <a:avLst/>
-          </a:prstGeom>
-          <a:noFill/>
-          <a:ln/>
-        </p:spPr>
-        <p:txBody>
-          <a:bodyPr wrap="square" lIns="0" tIns="0" rIns="0" bIns="0" rtlCol="0" anchor="ctr"/>
-          <a:lstStyle/>
-          <a:p>
-            <a:pPr algn="r" indent="0" marL="0">
-              <a:buNone/>
-            </a:pPr>
-            <a:r>
-              <a:rPr lang="en-US" sz="1000" dirty="0">
-                <a:solidFill>
-                  <a:srgbClr val="6B7280"/>
-                </a:solidFill>
-                <a:latin typeface="Calibri" pitchFamily="34" charset="0"/>
-                <a:ea typeface="Calibri" pitchFamily="34" charset="-122"/>
-                <a:cs typeface="Calibri" pitchFamily="34" charset="-120"/>
-              </a:rPr>
-              <a:t>Day 2 · Module 5</a:t>
-            </a:r>
-            <a:endParaRPr lang="en-US" sz="1000" dirty="0"/>
-          </a:p>
-        </p:txBody>
-      </p:sp>
-      <p:sp>
-        <p:nvSpPr>
-          <p:cNvPr id="4" name="Text 2"/>
-          <p:cNvSpPr/>
-          <p:nvPr/>
-        </p:nvSpPr>
-        <p:spPr>
-          <a:xfrm>
-            <a:off x="365760" y="320040"/>
-            <a:ext cx="6217920" cy="640080"/>
-          </a:xfrm>
-          <a:prstGeom prst="rect">
-            <a:avLst/>
-          </a:prstGeom>
-          <a:noFill/>
-          <a:ln/>
-        </p:spPr>
-        <p:txBody>
-          <a:bodyPr wrap="square" lIns="0" tIns="0" rIns="0" bIns="0" rtlCol="0" anchor="ctr"/>
-          <a:lstStyle/>
-          <a:p>
-            <a:pPr indent="0" marL="0">
-              <a:buNone/>
-            </a:pPr>
-            <a:r>
-              <a:rPr lang="en-US" sz="2800" b="1" dirty="0">
-                <a:solidFill>
-                  <a:srgbClr val="1E2761"/>
-                </a:solidFill>
-                <a:latin typeface="Calibri" pitchFamily="34" charset="0"/>
-                <a:ea typeface="Calibri" pitchFamily="34" charset="-122"/>
-                <a:cs typeface="Calibri" pitchFamily="34" charset="-120"/>
-              </a:rPr>
-              <a:t>Common traps</a:t>
-            </a:r>
-            <a:endParaRPr lang="en-US" sz="2800" dirty="0"/>
-          </a:p>
-        </p:txBody>
-      </p:sp>
-      <p:sp>
-        <p:nvSpPr>
-          <p:cNvPr id="5" name="Text 3"/>
-          <p:cNvSpPr/>
-          <p:nvPr/>
-        </p:nvSpPr>
-        <p:spPr>
-          <a:xfrm>
-            <a:off x="365760" y="1097280"/>
-            <a:ext cx="8412480" cy="3200400"/>
-          </a:xfrm>
-          <a:prstGeom prst="rect">
-            <a:avLst/>
-          </a:prstGeom>
-          <a:noFill/>
-          <a:ln/>
-        </p:spPr>
-        <p:txBody>
-          <a:bodyPr wrap="square" rtlCol="0" anchor="ctr"/>
-          <a:lstStyle/>
-          <a:p>
-            <a:pPr marL="342900" indent="-342900">
-              <a:spcAft>
-                <a:spcPts val="600"/>
-              </a:spcAft>
-              <a:buSzPct val="100000"/>
-              <a:buChar char="•"/>
-            </a:pPr>
-            <a:r>
-              <a:rPr lang="en-US" sz="1200" dirty="0">
-                <a:solidFill>
-                  <a:srgbClr val="212121"/>
-                </a:solidFill>
-                <a:latin typeface="Calibri" pitchFamily="34" charset="0"/>
-                <a:ea typeface="Calibri" pitchFamily="34" charset="-122"/>
-                <a:cs typeface="Calibri" pitchFamily="34" charset="-120"/>
-              </a:rPr>
-              <a:t>Credentials in the YAML — don't. Use connections. YAML is checked into source.</a:t>
-            </a:r>
-            <a:endParaRPr lang="en-US" sz="1200" dirty="0"/>
-          </a:p>
-          <a:p>
-            <a:pPr marL="342900" indent="-342900">
-              <a:spcAft>
-                <a:spcPts val="600"/>
-              </a:spcAft>
-              <a:buSzPct val="100000"/>
-              <a:buChar char="•"/>
-            </a:pPr>
-            <a:r>
-              <a:rPr lang="en-US" sz="1200" dirty="0">
-                <a:solidFill>
-                  <a:srgbClr val="212121"/>
-                </a:solidFill>
-                <a:latin typeface="Calibri" pitchFamily="34" charset="0"/>
-                <a:ea typeface="Calibri" pitchFamily="34" charset="-122"/>
-                <a:cs typeface="Calibri" pitchFamily="34" charset="-120"/>
-              </a:rPr>
-              <a:t>Consumer vs. developer endpoint confusion — agents = consumer; test = developer.</a:t>
-            </a:r>
-            <a:endParaRPr lang="en-US" sz="1200" dirty="0"/>
-          </a:p>
-          <a:p>
-            <a:pPr marL="342900" indent="-342900">
-              <a:spcAft>
-                <a:spcPts val="600"/>
-              </a:spcAft>
-              <a:buSzPct val="100000"/>
-              <a:buChar char="•"/>
-            </a:pPr>
-            <a:r>
-              <a:rPr lang="en-US" sz="1200" dirty="0">
-                <a:solidFill>
-                  <a:srgbClr val="212121"/>
-                </a:solidFill>
-                <a:latin typeface="Calibri" pitchFamily="34" charset="0"/>
-                <a:ea typeface="Calibri" pitchFamily="34" charset="-122"/>
-                <a:cs typeface="Calibri" pitchFamily="34" charset="-120"/>
-              </a:rPr>
-              <a:t>Not testing before promoting — v2 is default the moment you promote. Test /versions/2/mcp first.</a:t>
-            </a:r>
-            <a:endParaRPr lang="en-US" sz="1200" dirty="0"/>
-          </a:p>
-          <a:p>
-            <a:pPr marL="342900" indent="-342900">
-              <a:spcAft>
-                <a:spcPts val="600"/>
-              </a:spcAft>
-              <a:buSzPct val="100000"/>
-              <a:buChar char="•"/>
-            </a:pPr>
-            <a:r>
-              <a:rPr lang="en-US" sz="1200" dirty="0">
-                <a:solidFill>
-                  <a:srgbClr val="212121"/>
-                </a:solidFill>
-                <a:latin typeface="Calibri" pitchFamily="34" charset="0"/>
-                <a:ea typeface="Calibri" pitchFamily="34" charset="-122"/>
-                <a:cs typeface="Calibri" pitchFamily="34" charset="-120"/>
-              </a:rPr>
-              <a:t>Too many tools in one toolbox — ≤10 per agent applies. Use toolbox_search when &gt;10.</a:t>
-            </a:r>
-            <a:endParaRPr lang="en-US" sz="1200" dirty="0"/>
-          </a:p>
-          <a:p>
-            <a:pPr marL="342900" indent="-342900">
-              <a:spcAft>
-                <a:spcPts val="600"/>
-              </a:spcAft>
-              <a:buSzPct val="100000"/>
-              <a:buChar char="•"/>
-            </a:pPr>
-            <a:r>
-              <a:rPr lang="en-US" sz="1200" dirty="0">
-                <a:solidFill>
-                  <a:srgbClr val="212121"/>
-                </a:solidFill>
-                <a:latin typeface="Calibri" pitchFamily="34" charset="0"/>
-                <a:ea typeface="Calibri" pitchFamily="34" charset="-122"/>
-                <a:cs typeface="Calibri" pitchFamily="34" charset="-120"/>
-              </a:rPr>
-              <a:t>Assuming toolbox tools are free — some have per-call costs (Bing, code interpreter). Budget.</a:t>
-            </a:r>
-            <a:endParaRPr lang="en-US" sz="1200" dirty="0"/>
-          </a:p>
-          <a:p>
-            <a:pPr marL="342900" indent="-342900">
-              <a:spcAft>
-                <a:spcPts val="600"/>
-              </a:spcAft>
-              <a:buSzPct val="100000"/>
-              <a:buChar char="•"/>
-            </a:pPr>
-            <a:r>
-              <a:rPr lang="en-US" sz="1200" dirty="0">
-                <a:solidFill>
-                  <a:srgbClr val="212121"/>
-                </a:solidFill>
-                <a:latin typeface="Calibri" pitchFamily="34" charset="0"/>
-                <a:ea typeface="Calibri" pitchFamily="34" charset="-122"/>
-                <a:cs typeface="Calibri" pitchFamily="34" charset="-120"/>
-              </a:rPr>
-              <a:t>Skipping RAI policy — toolbox is the right place to enforce content safety centrally. Use it.</a:t>
-            </a:r>
-            <a:endParaRPr lang="en-US" sz="1200" dirty="0"/>
-          </a:p>
-        </p:txBody>
-      </p:sp>
-    </p:spTree>
-  </p:cSld>
-  <p:clrMapOvr>
-    <a:masterClrMapping/>
-  </p:clrMapOvr>
-</p:sld>
-</file>
-
-<file path=ppt/slides/slide19.xml><?xml version="1.0" encoding="utf-8"?>
-<p:sld xmlns:a="http://schemas.openxmlformats.org/drawingml/2006/main" xmlns:r="http://schemas.openxmlformats.org/officeDocument/2006/relationships" xmlns:p="http://schemas.openxmlformats.org/presentationml/2006/main">
-  <p:cSld name="Slide 19">
     <p:bg>
       <p:bgPr>
         <a:solidFill>
